--- a/pptx/图1.pptx
+++ b/pptx/图1.pptx
@@ -8,16 +8,16 @@
     <p:notesMasterId r:id="rId4"/>
   </p:notesMasterIdLst>
   <p:handoutMasterIdLst>
-    <p:handoutMasterId r:id="rId6"/>
+    <p:handoutMasterId r:id="rId5"/>
   </p:handoutMasterIdLst>
   <p:sldIdLst>
-    <p:sldId id="272" r:id="rId3"/>
-    <p:sldId id="273" r:id="rId5"/>
+    <p:sldId id="272" r:id="rId2"/>
+    <p:sldId id="273" r:id="rId3"/>
   </p:sldIdLst>
   <p:sldSz cx="12192000" cy="17243425"/>
-  <p:notesSz cx="7103745" cy="10234295"/>
+  <p:notesSz cx="7104063" cy="10234613"/>
   <p:custDataLst>
-    <p:tags r:id="rId10"/>
+    <p:tags r:id="rId6"/>
   </p:custDataLst>
   <p:defaultTextStyle>
     <a:defPPr>
@@ -134,7 +134,7 @@
 </file>
 
 <file path=ppt/charts/chart1.xml><?xml version="1.0" encoding="utf-8"?>
-<c:chartSpace xmlns:c="http://schemas.openxmlformats.org/drawingml/2006/chart" xmlns:a="http://schemas.openxmlformats.org/drawingml/2006/main" xmlns:r="http://schemas.openxmlformats.org/officeDocument/2006/relationships">
+<c:chartSpace xmlns:c="http://schemas.openxmlformats.org/drawingml/2006/chart" xmlns:a="http://schemas.openxmlformats.org/drawingml/2006/main" xmlns:r="http://schemas.openxmlformats.org/officeDocument/2006/relationships" xmlns:c16r2="http://schemas.microsoft.com/office/drawing/2015/06/chart">
   <c:date1904 val="0"/>
   <c:lang val="zh-CN"/>
   <c:roundedCorners val="0"/>
@@ -154,10 +154,10 @@
           <c:layoutTarget val="inner"/>
           <c:xMode val="edge"/>
           <c:yMode val="edge"/>
-          <c:x val="0.0971302016692252"/>
-          <c:y val="0.234541325765915"/>
-          <c:w val="0.83046357615894"/>
-          <c:h val="0.53091684434968"/>
+          <c:x val="9.7130201669225202E-2"/>
+          <c:y val="0.23454132576591499"/>
+          <c:w val="0.83046357615893995"/>
+          <c:h val="0.53091684434968001"/>
         </c:manualLayout>
       </c:layout>
       <c:barChart>
@@ -188,9 +188,6 @@
             <a:effectLst/>
           </c:spPr>
           <c:invertIfNegative val="0"/>
-          <c:dLbls>
-            <c:delete val="1"/>
-          </c:dLbls>
           <c:cat>
             <c:strRef>
               <c:f>Sheet1!$A$2</c:f>
@@ -214,6 +211,11 @@
               </c:numCache>
             </c:numRef>
           </c:val>
+          <c:extLst>
+            <c:ext xmlns:c16="http://schemas.microsoft.com/office/drawing/2014/chart" uri="{C3380CC4-5D6E-409C-BE32-E72D297353CC}">
+              <c16:uniqueId val="{00000000-C128-6C4A-A076-C8A35E39563F}"/>
+            </c:ext>
+          </c:extLst>
         </c:ser>
         <c:ser>
           <c:idx val="1"/>
@@ -239,9 +241,6 @@
             <a:effectLst/>
           </c:spPr>
           <c:invertIfNegative val="0"/>
-          <c:dLbls>
-            <c:delete val="1"/>
-          </c:dLbls>
           <c:cat>
             <c:strRef>
               <c:f>Sheet1!$A$2</c:f>
@@ -265,6 +264,11 @@
               </c:numCache>
             </c:numRef>
           </c:val>
+          <c:extLst>
+            <c:ext xmlns:c16="http://schemas.microsoft.com/office/drawing/2014/chart" uri="{C3380CC4-5D6E-409C-BE32-E72D297353CC}">
+              <c16:uniqueId val="{00000001-C128-6C4A-A076-C8A35E39563F}"/>
+            </c:ext>
+          </c:extLst>
         </c:ser>
         <c:ser>
           <c:idx val="2"/>
@@ -290,9 +294,6 @@
             <a:effectLst/>
           </c:spPr>
           <c:invertIfNegative val="0"/>
-          <c:dLbls>
-            <c:delete val="1"/>
-          </c:dLbls>
           <c:cat>
             <c:strRef>
               <c:f>Sheet1!$A$2</c:f>
@@ -316,6 +317,11 @@
               </c:numCache>
             </c:numRef>
           </c:val>
+          <c:extLst>
+            <c:ext xmlns:c16="http://schemas.microsoft.com/office/drawing/2014/chart" uri="{C3380CC4-5D6E-409C-BE32-E72D297353CC}">
+              <c16:uniqueId val="{00000002-C128-6C4A-A076-C8A35E39563F}"/>
+            </c:ext>
+          </c:extLst>
         </c:ser>
         <c:ser>
           <c:idx val="3"/>
@@ -341,9 +347,6 @@
             <a:effectLst/>
           </c:spPr>
           <c:invertIfNegative val="0"/>
-          <c:dLbls>
-            <c:delete val="1"/>
-          </c:dLbls>
           <c:cat>
             <c:strRef>
               <c:f>Sheet1!$A$2</c:f>
@@ -367,6 +370,11 @@
               </c:numCache>
             </c:numRef>
           </c:val>
+          <c:extLst>
+            <c:ext xmlns:c16="http://schemas.microsoft.com/office/drawing/2014/chart" uri="{C3380CC4-5D6E-409C-BE32-E72D297353CC}">
+              <c16:uniqueId val="{00000003-C128-6C4A-A076-C8A35E39563F}"/>
+            </c:ext>
+          </c:extLst>
         </c:ser>
         <c:ser>
           <c:idx val="4"/>
@@ -392,9 +400,6 @@
             <a:effectLst/>
           </c:spPr>
           <c:invertIfNegative val="0"/>
-          <c:dLbls>
-            <c:delete val="1"/>
-          </c:dLbls>
           <c:cat>
             <c:strRef>
               <c:f>Sheet1!$A$2</c:f>
@@ -418,6 +423,11 @@
               </c:numCache>
             </c:numRef>
           </c:val>
+          <c:extLst>
+            <c:ext xmlns:c16="http://schemas.microsoft.com/office/drawing/2014/chart" uri="{C3380CC4-5D6E-409C-BE32-E72D297353CC}">
+              <c16:uniqueId val="{00000004-C128-6C4A-A076-C8A35E39563F}"/>
+            </c:ext>
+          </c:extLst>
         </c:ser>
         <c:ser>
           <c:idx val="6"/>
@@ -443,9 +453,6 @@
             <a:effectLst/>
           </c:spPr>
           <c:invertIfNegative val="0"/>
-          <c:dLbls>
-            <c:delete val="1"/>
-          </c:dLbls>
           <c:cat>
             <c:strRef>
               <c:f>Sheet1!$A$2</c:f>
@@ -469,6 +476,11 @@
               </c:numCache>
             </c:numRef>
           </c:val>
+          <c:extLst>
+            <c:ext xmlns:c16="http://schemas.microsoft.com/office/drawing/2014/chart" uri="{C3380CC4-5D6E-409C-BE32-E72D297353CC}">
+              <c16:uniqueId val="{00000005-C128-6C4A-A076-C8A35E39563F}"/>
+            </c:ext>
+          </c:extLst>
         </c:ser>
         <c:dLbls>
           <c:showLegendKey val="0"/>
@@ -515,16 +527,10 @@
                   <a:effectLst/>
                 </c:spPr>
                 <c:invertIfNegative val="0"/>
-                <c:dLbls>
-                  <c:delete val="1"/>
-                </c:dLbls>
                 <c:cat>
                   <c:strRef>
                     <c:extLst>
                       <c:ext uri="{02D57815-91ED-43cb-92C2-25804820EDAC}">
-                        <c15:fullRef>
-                          <c15:sqref/>
-                        </c15:fullRef>
                         <c15:formulaRef>
                           <c15:sqref>Sheet1!$A$2</c15:sqref>
                         </c15:formulaRef>
@@ -556,6 +562,11 @@
                     </c:numCache>
                   </c:numRef>
                 </c:val>
+                <c:extLst>
+                  <c:ext xmlns:c16="http://schemas.microsoft.com/office/drawing/2014/chart" uri="{C3380CC4-5D6E-409C-BE32-E72D297353CC}">
+                    <c16:uniqueId val="{00000006-C128-6C4A-A076-C8A35E39563F}"/>
+                  </c:ext>
+                </c:extLst>
               </c15:ser>
             </c15:filteredBarSeries>
           </c:ext>
@@ -572,25 +583,6 @@
         <c:majorTickMark val="none"/>
         <c:minorTickMark val="none"/>
         <c:tickLblPos val="nextTo"/>
-        <c:txPr>
-          <a:bodyPr rot="-60000000" spcFirstLastPara="0" vertOverflow="ellipsis" vert="horz" wrap="square" anchor="ctr" anchorCtr="1"/>
-          <a:lstStyle/>
-          <a:p>
-            <a:pPr>
-              <a:defRPr lang="zh-CN" sz="900" b="0" i="0" u="none" strike="noStrike" kern="1200" baseline="0">
-                <a:solidFill>
-                  <a:schemeClr val="tx1">
-                    <a:lumMod val="65000"/>
-                    <a:lumOff val="35000"/>
-                  </a:schemeClr>
-                </a:solidFill>
-                <a:latin typeface="+mn-lt"/>
-                <a:ea typeface="+mn-ea"/>
-                <a:cs typeface="+mn-cs"/>
-              </a:defRPr>
-            </a:pPr>
-          </a:p>
-        </c:txPr>
         <c:crossAx val="583921027"/>
         <c:crosses val="autoZero"/>
         <c:auto val="1"/>
@@ -609,25 +601,6 @@
         <c:majorTickMark val="none"/>
         <c:minorTickMark val="none"/>
         <c:tickLblPos val="nextTo"/>
-        <c:txPr>
-          <a:bodyPr rot="-60000000" spcFirstLastPara="0" vertOverflow="ellipsis" vert="horz" wrap="square" anchor="ctr" anchorCtr="1"/>
-          <a:lstStyle/>
-          <a:p>
-            <a:pPr>
-              <a:defRPr lang="zh-CN" sz="900" b="0" i="0" u="none" strike="noStrike" kern="1200" baseline="0">
-                <a:solidFill>
-                  <a:schemeClr val="tx1">
-                    <a:lumMod val="65000"/>
-                    <a:lumOff val="35000"/>
-                  </a:schemeClr>
-                </a:solidFill>
-                <a:latin typeface="+mn-lt"/>
-                <a:ea typeface="+mn-ea"/>
-                <a:cs typeface="+mn-cs"/>
-              </a:defRPr>
-            </a:pPr>
-          </a:p>
-        </c:txPr>
         <c:crossAx val="103579588"/>
         <c:crosses val="autoZero"/>
         <c:crossBetween val="between"/>
@@ -663,16 +636,17 @@
       <a:pPr>
         <a:defRPr lang="zh-CN"/>
       </a:pPr>
+      <a:endParaRPr lang="zh-CN"/>
     </a:p>
   </c:txPr>
-  <c:externalData r:id="rId1">
+  <c:externalData r:id="rId3">
     <c:autoUpdate val="0"/>
   </c:externalData>
 </c:chartSpace>
 </file>
 
 <file path=ppt/charts/chart2.xml><?xml version="1.0" encoding="utf-8"?>
-<c:chartSpace xmlns:c="http://schemas.openxmlformats.org/drawingml/2006/chart" xmlns:a="http://schemas.openxmlformats.org/drawingml/2006/main" xmlns:r="http://schemas.openxmlformats.org/officeDocument/2006/relationships">
+<c:chartSpace xmlns:c="http://schemas.openxmlformats.org/drawingml/2006/chart" xmlns:a="http://schemas.openxmlformats.org/drawingml/2006/main" xmlns:r="http://schemas.openxmlformats.org/officeDocument/2006/relationships" xmlns:c16r2="http://schemas.microsoft.com/office/drawing/2015/06/chart">
   <c:date1904 val="0"/>
   <c:lang val="zh-CN"/>
   <c:roundedCorners val="0"/>
@@ -692,10 +666,10 @@
           <c:layoutTarget val="inner"/>
           <c:xMode val="edge"/>
           <c:yMode val="edge"/>
-          <c:x val="0.0971302428256071"/>
+          <c:x val="9.7130242825607102E-2"/>
           <c:y val="0.23454157782516"/>
-          <c:w val="0.83046357615894"/>
-          <c:h val="0.53091684434968"/>
+          <c:w val="0.83046357615893995"/>
+          <c:h val="0.53091684434968001"/>
         </c:manualLayout>
       </c:layout>
       <c:barChart>
@@ -726,9 +700,6 @@
             <a:effectLst/>
           </c:spPr>
           <c:invertIfNegative val="0"/>
-          <c:dLbls>
-            <c:delete val="1"/>
-          </c:dLbls>
           <c:cat>
             <c:strRef>
               <c:f>Sheet1!$A$2</c:f>
@@ -752,6 +723,11 @@
               </c:numCache>
             </c:numRef>
           </c:val>
+          <c:extLst>
+            <c:ext xmlns:c16="http://schemas.microsoft.com/office/drawing/2014/chart" uri="{C3380CC4-5D6E-409C-BE32-E72D297353CC}">
+              <c16:uniqueId val="{00000000-34CB-0941-AD7B-7E6C6C3FCB1F}"/>
+            </c:ext>
+          </c:extLst>
         </c:ser>
         <c:ser>
           <c:idx val="1"/>
@@ -777,9 +753,6 @@
             <a:effectLst/>
           </c:spPr>
           <c:invertIfNegative val="0"/>
-          <c:dLbls>
-            <c:delete val="1"/>
-          </c:dLbls>
           <c:cat>
             <c:strRef>
               <c:f>Sheet1!$A$2</c:f>
@@ -803,6 +776,11 @@
               </c:numCache>
             </c:numRef>
           </c:val>
+          <c:extLst>
+            <c:ext xmlns:c16="http://schemas.microsoft.com/office/drawing/2014/chart" uri="{C3380CC4-5D6E-409C-BE32-E72D297353CC}">
+              <c16:uniqueId val="{00000001-34CB-0941-AD7B-7E6C6C3FCB1F}"/>
+            </c:ext>
+          </c:extLst>
         </c:ser>
         <c:ser>
           <c:idx val="2"/>
@@ -828,9 +806,6 @@
             <a:effectLst/>
           </c:spPr>
           <c:invertIfNegative val="0"/>
-          <c:dLbls>
-            <c:delete val="1"/>
-          </c:dLbls>
           <c:cat>
             <c:strRef>
               <c:f>Sheet1!$A$2</c:f>
@@ -854,6 +829,11 @@
               </c:numCache>
             </c:numRef>
           </c:val>
+          <c:extLst>
+            <c:ext xmlns:c16="http://schemas.microsoft.com/office/drawing/2014/chart" uri="{C3380CC4-5D6E-409C-BE32-E72D297353CC}">
+              <c16:uniqueId val="{00000002-34CB-0941-AD7B-7E6C6C3FCB1F}"/>
+            </c:ext>
+          </c:extLst>
         </c:ser>
         <c:ser>
           <c:idx val="3"/>
@@ -879,9 +859,6 @@
             <a:effectLst/>
           </c:spPr>
           <c:invertIfNegative val="0"/>
-          <c:dLbls>
-            <c:delete val="1"/>
-          </c:dLbls>
           <c:cat>
             <c:strRef>
               <c:f>Sheet1!$A$2</c:f>
@@ -905,6 +882,11 @@
               </c:numCache>
             </c:numRef>
           </c:val>
+          <c:extLst>
+            <c:ext xmlns:c16="http://schemas.microsoft.com/office/drawing/2014/chart" uri="{C3380CC4-5D6E-409C-BE32-E72D297353CC}">
+              <c16:uniqueId val="{00000003-34CB-0941-AD7B-7E6C6C3FCB1F}"/>
+            </c:ext>
+          </c:extLst>
         </c:ser>
         <c:ser>
           <c:idx val="4"/>
@@ -930,9 +912,6 @@
             <a:effectLst/>
           </c:spPr>
           <c:invertIfNegative val="0"/>
-          <c:dLbls>
-            <c:delete val="1"/>
-          </c:dLbls>
           <c:cat>
             <c:strRef>
               <c:f>Sheet1!$A$2</c:f>
@@ -956,6 +935,11 @@
               </c:numCache>
             </c:numRef>
           </c:val>
+          <c:extLst>
+            <c:ext xmlns:c16="http://schemas.microsoft.com/office/drawing/2014/chart" uri="{C3380CC4-5D6E-409C-BE32-E72D297353CC}">
+              <c16:uniqueId val="{00000004-34CB-0941-AD7B-7E6C6C3FCB1F}"/>
+            </c:ext>
+          </c:extLst>
         </c:ser>
         <c:ser>
           <c:idx val="6"/>
@@ -981,9 +965,6 @@
             <a:effectLst/>
           </c:spPr>
           <c:invertIfNegative val="0"/>
-          <c:dLbls>
-            <c:delete val="1"/>
-          </c:dLbls>
           <c:cat>
             <c:strRef>
               <c:f>Sheet1!$A$2</c:f>
@@ -1007,6 +988,11 @@
               </c:numCache>
             </c:numRef>
           </c:val>
+          <c:extLst>
+            <c:ext xmlns:c16="http://schemas.microsoft.com/office/drawing/2014/chart" uri="{C3380CC4-5D6E-409C-BE32-E72D297353CC}">
+              <c16:uniqueId val="{00000005-34CB-0941-AD7B-7E6C6C3FCB1F}"/>
+            </c:ext>
+          </c:extLst>
         </c:ser>
         <c:ser>
           <c:idx val="7"/>
@@ -1032,9 +1018,6 @@
             <a:effectLst/>
           </c:spPr>
           <c:invertIfNegative val="0"/>
-          <c:dLbls>
-            <c:delete val="1"/>
-          </c:dLbls>
           <c:cat>
             <c:strRef>
               <c:f>Sheet1!$A$2</c:f>
@@ -1058,6 +1041,11 @@
               </c:numCache>
             </c:numRef>
           </c:val>
+          <c:extLst>
+            <c:ext xmlns:c16="http://schemas.microsoft.com/office/drawing/2014/chart" uri="{C3380CC4-5D6E-409C-BE32-E72D297353CC}">
+              <c16:uniqueId val="{00000006-34CB-0941-AD7B-7E6C6C3FCB1F}"/>
+            </c:ext>
+          </c:extLst>
         </c:ser>
         <c:dLbls>
           <c:showLegendKey val="0"/>
@@ -1104,16 +1092,10 @@
                   <a:effectLst/>
                 </c:spPr>
                 <c:invertIfNegative val="0"/>
-                <c:dLbls>
-                  <c:delete val="1"/>
-                </c:dLbls>
                 <c:cat>
                   <c:strRef>
                     <c:extLst>
                       <c:ext uri="{02D57815-91ED-43cb-92C2-25804820EDAC}">
-                        <c15:fullRef>
-                          <c15:sqref/>
-                        </c15:fullRef>
                         <c15:formulaRef>
                           <c15:sqref>Sheet1!$A$2</c15:sqref>
                         </c15:formulaRef>
@@ -1145,6 +1127,11 @@
                     </c:numCache>
                   </c:numRef>
                 </c:val>
+                <c:extLst>
+                  <c:ext xmlns:c16="http://schemas.microsoft.com/office/drawing/2014/chart" uri="{C3380CC4-5D6E-409C-BE32-E72D297353CC}">
+                    <c16:uniqueId val="{00000007-34CB-0941-AD7B-7E6C6C3FCB1F}"/>
+                  </c:ext>
+                </c:extLst>
               </c15:ser>
             </c15:filteredBarSeries>
           </c:ext>
@@ -1161,22 +1148,6 @@
         <c:majorTickMark val="none"/>
         <c:minorTickMark val="none"/>
         <c:tickLblPos val="nextTo"/>
-        <c:txPr>
-          <a:bodyPr rot="-60000000" spcFirstLastPara="0" vertOverflow="ellipsis" vert="horz" wrap="square" anchor="ctr" anchorCtr="1"/>
-          <a:lstStyle/>
-          <a:p>
-            <a:pPr>
-              <a:defRPr lang="en-US" altLang="zh-CN" sz="900" b="0" i="0" u="none" strike="noStrike" kern="1200" baseline="0">
-                <a:solidFill>
-                  <a:schemeClr val="tx1"/>
-                </a:solidFill>
-                <a:latin typeface="+mn-lt"/>
-                <a:ea typeface="+mn-ea"/>
-                <a:cs typeface="+mn-cs"/>
-              </a:defRPr>
-            </a:pPr>
-          </a:p>
-        </c:txPr>
         <c:crossAx val="583921027"/>
         <c:crosses val="autoZero"/>
         <c:auto val="1"/>
@@ -1195,22 +1166,6 @@
         <c:majorTickMark val="none"/>
         <c:minorTickMark val="none"/>
         <c:tickLblPos val="nextTo"/>
-        <c:txPr>
-          <a:bodyPr rot="-60000000" spcFirstLastPara="0" vertOverflow="ellipsis" vert="horz" wrap="square" anchor="ctr" anchorCtr="1"/>
-          <a:lstStyle/>
-          <a:p>
-            <a:pPr>
-              <a:defRPr lang="en-US" altLang="zh-CN" sz="900" b="0" i="0" u="none" strike="noStrike" kern="1200" baseline="0">
-                <a:solidFill>
-                  <a:schemeClr val="tx1"/>
-                </a:solidFill>
-                <a:latin typeface="+mn-lt"/>
-                <a:ea typeface="+mn-ea"/>
-                <a:cs typeface="+mn-cs"/>
-              </a:defRPr>
-            </a:pPr>
-          </a:p>
-        </c:txPr>
         <c:crossAx val="103579588"/>
         <c:crosses val="autoZero"/>
         <c:crossBetween val="between"/>
@@ -1253,16 +1208,17 @@
           <a:cs typeface="+mn-cs"/>
         </a:defRPr>
       </a:pPr>
+      <a:endParaRPr lang="zh-CN"/>
     </a:p>
   </c:txPr>
-  <c:externalData r:id="rId1">
+  <c:externalData r:id="rId3">
     <c:autoUpdate val="0"/>
   </c:externalData>
 </c:chartSpace>
 </file>
 
 <file path=ppt/charts/chart3.xml><?xml version="1.0" encoding="utf-8"?>
-<c:chartSpace xmlns:c="http://schemas.openxmlformats.org/drawingml/2006/chart" xmlns:a="http://schemas.openxmlformats.org/drawingml/2006/main" xmlns:r="http://schemas.openxmlformats.org/officeDocument/2006/relationships">
+<c:chartSpace xmlns:c="http://schemas.openxmlformats.org/drawingml/2006/chart" xmlns:a="http://schemas.openxmlformats.org/drawingml/2006/main" xmlns:r="http://schemas.openxmlformats.org/officeDocument/2006/relationships" xmlns:c16r2="http://schemas.microsoft.com/office/drawing/2015/06/chart">
   <c:date1904 val="0"/>
   <c:lang val="zh-CN"/>
   <c:roundedCorners val="0"/>
@@ -1282,10 +1238,10 @@
           <c:layoutTarget val="inner"/>
           <c:xMode val="edge"/>
           <c:yMode val="edge"/>
-          <c:x val="0.0971302016692252"/>
-          <c:y val="0.234541325765915"/>
-          <c:w val="0.83046357615894"/>
-          <c:h val="0.53091684434968"/>
+          <c:x val="9.7130201669225202E-2"/>
+          <c:y val="0.23454132576591499"/>
+          <c:w val="0.83046357615893995"/>
+          <c:h val="0.53091684434968001"/>
         </c:manualLayout>
       </c:layout>
       <c:barChart>
@@ -1316,9 +1272,6 @@
             <a:effectLst/>
           </c:spPr>
           <c:invertIfNegative val="0"/>
-          <c:dLbls>
-            <c:delete val="1"/>
-          </c:dLbls>
           <c:cat>
             <c:strRef>
               <c:f>Sheet1!$A$2</c:f>
@@ -1342,6 +1295,11 @@
               </c:numCache>
             </c:numRef>
           </c:val>
+          <c:extLst>
+            <c:ext xmlns:c16="http://schemas.microsoft.com/office/drawing/2014/chart" uri="{C3380CC4-5D6E-409C-BE32-E72D297353CC}">
+              <c16:uniqueId val="{00000000-A65F-3D48-B9C7-5BDB1F73B963}"/>
+            </c:ext>
+          </c:extLst>
         </c:ser>
         <c:ser>
           <c:idx val="1"/>
@@ -1367,9 +1325,6 @@
             <a:effectLst/>
           </c:spPr>
           <c:invertIfNegative val="0"/>
-          <c:dLbls>
-            <c:delete val="1"/>
-          </c:dLbls>
           <c:cat>
             <c:strRef>
               <c:f>Sheet1!$A$2</c:f>
@@ -1393,6 +1348,11 @@
               </c:numCache>
             </c:numRef>
           </c:val>
+          <c:extLst>
+            <c:ext xmlns:c16="http://schemas.microsoft.com/office/drawing/2014/chart" uri="{C3380CC4-5D6E-409C-BE32-E72D297353CC}">
+              <c16:uniqueId val="{00000001-A65F-3D48-B9C7-5BDB1F73B963}"/>
+            </c:ext>
+          </c:extLst>
         </c:ser>
         <c:ser>
           <c:idx val="2"/>
@@ -1418,9 +1378,6 @@
             <a:effectLst/>
           </c:spPr>
           <c:invertIfNegative val="0"/>
-          <c:dLbls>
-            <c:delete val="1"/>
-          </c:dLbls>
           <c:cat>
             <c:strRef>
               <c:f>Sheet1!$A$2</c:f>
@@ -1444,6 +1401,11 @@
               </c:numCache>
             </c:numRef>
           </c:val>
+          <c:extLst>
+            <c:ext xmlns:c16="http://schemas.microsoft.com/office/drawing/2014/chart" uri="{C3380CC4-5D6E-409C-BE32-E72D297353CC}">
+              <c16:uniqueId val="{00000002-A65F-3D48-B9C7-5BDB1F73B963}"/>
+            </c:ext>
+          </c:extLst>
         </c:ser>
         <c:ser>
           <c:idx val="3"/>
@@ -1469,9 +1431,6 @@
             <a:effectLst/>
           </c:spPr>
           <c:invertIfNegative val="0"/>
-          <c:dLbls>
-            <c:delete val="1"/>
-          </c:dLbls>
           <c:cat>
             <c:strRef>
               <c:f>Sheet1!$A$2</c:f>
@@ -1495,6 +1454,11 @@
               </c:numCache>
             </c:numRef>
           </c:val>
+          <c:extLst>
+            <c:ext xmlns:c16="http://schemas.microsoft.com/office/drawing/2014/chart" uri="{C3380CC4-5D6E-409C-BE32-E72D297353CC}">
+              <c16:uniqueId val="{00000003-A65F-3D48-B9C7-5BDB1F73B963}"/>
+            </c:ext>
+          </c:extLst>
         </c:ser>
         <c:ser>
           <c:idx val="4"/>
@@ -1520,9 +1484,6 @@
             <a:effectLst/>
           </c:spPr>
           <c:invertIfNegative val="0"/>
-          <c:dLbls>
-            <c:delete val="1"/>
-          </c:dLbls>
           <c:cat>
             <c:strRef>
               <c:f>Sheet1!$A$2</c:f>
@@ -1546,6 +1507,11 @@
               </c:numCache>
             </c:numRef>
           </c:val>
+          <c:extLst>
+            <c:ext xmlns:c16="http://schemas.microsoft.com/office/drawing/2014/chart" uri="{C3380CC4-5D6E-409C-BE32-E72D297353CC}">
+              <c16:uniqueId val="{00000004-A65F-3D48-B9C7-5BDB1F73B963}"/>
+            </c:ext>
+          </c:extLst>
         </c:ser>
         <c:ser>
           <c:idx val="6"/>
@@ -1571,9 +1537,6 @@
             <a:effectLst/>
           </c:spPr>
           <c:invertIfNegative val="0"/>
-          <c:dLbls>
-            <c:delete val="1"/>
-          </c:dLbls>
           <c:cat>
             <c:strRef>
               <c:f>Sheet1!$A$2</c:f>
@@ -1597,6 +1560,11 @@
               </c:numCache>
             </c:numRef>
           </c:val>
+          <c:extLst>
+            <c:ext xmlns:c16="http://schemas.microsoft.com/office/drawing/2014/chart" uri="{C3380CC4-5D6E-409C-BE32-E72D297353CC}">
+              <c16:uniqueId val="{00000005-A65F-3D48-B9C7-5BDB1F73B963}"/>
+            </c:ext>
+          </c:extLst>
         </c:ser>
         <c:dLbls>
           <c:showLegendKey val="0"/>
@@ -1643,16 +1611,10 @@
                   <a:effectLst/>
                 </c:spPr>
                 <c:invertIfNegative val="0"/>
-                <c:dLbls>
-                  <c:delete val="1"/>
-                </c:dLbls>
                 <c:cat>
                   <c:strRef>
                     <c:extLst>
                       <c:ext uri="{02D57815-91ED-43cb-92C2-25804820EDAC}">
-                        <c15:fullRef>
-                          <c15:sqref/>
-                        </c15:fullRef>
                         <c15:formulaRef>
                           <c15:sqref>Sheet1!$A$2</c15:sqref>
                         </c15:formulaRef>
@@ -1684,6 +1646,11 @@
                     </c:numCache>
                   </c:numRef>
                 </c:val>
+                <c:extLst>
+                  <c:ext xmlns:c16="http://schemas.microsoft.com/office/drawing/2014/chart" uri="{C3380CC4-5D6E-409C-BE32-E72D297353CC}">
+                    <c16:uniqueId val="{00000006-A65F-3D48-B9C7-5BDB1F73B963}"/>
+                  </c:ext>
+                </c:extLst>
               </c15:ser>
             </c15:filteredBarSeries>
           </c:ext>
@@ -1700,25 +1667,6 @@
         <c:majorTickMark val="none"/>
         <c:minorTickMark val="none"/>
         <c:tickLblPos val="nextTo"/>
-        <c:txPr>
-          <a:bodyPr rot="-60000000" spcFirstLastPara="0" vertOverflow="ellipsis" vert="horz" wrap="square" anchor="ctr" anchorCtr="1"/>
-          <a:lstStyle/>
-          <a:p>
-            <a:pPr>
-              <a:defRPr lang="zh-CN" sz="900" b="0" i="0" u="none" strike="noStrike" kern="1200" baseline="0">
-                <a:solidFill>
-                  <a:schemeClr val="tx1">
-                    <a:lumMod val="65000"/>
-                    <a:lumOff val="35000"/>
-                  </a:schemeClr>
-                </a:solidFill>
-                <a:latin typeface="+mn-lt"/>
-                <a:ea typeface="+mn-ea"/>
-                <a:cs typeface="+mn-cs"/>
-              </a:defRPr>
-            </a:pPr>
-          </a:p>
-        </c:txPr>
         <c:crossAx val="583921027"/>
         <c:crosses val="autoZero"/>
         <c:auto val="1"/>
@@ -1737,25 +1685,6 @@
         <c:majorTickMark val="none"/>
         <c:minorTickMark val="none"/>
         <c:tickLblPos val="nextTo"/>
-        <c:txPr>
-          <a:bodyPr rot="-60000000" spcFirstLastPara="0" vertOverflow="ellipsis" vert="horz" wrap="square" anchor="ctr" anchorCtr="1"/>
-          <a:lstStyle/>
-          <a:p>
-            <a:pPr>
-              <a:defRPr lang="zh-CN" sz="900" b="0" i="0" u="none" strike="noStrike" kern="1200" baseline="0">
-                <a:solidFill>
-                  <a:schemeClr val="tx1">
-                    <a:lumMod val="65000"/>
-                    <a:lumOff val="35000"/>
-                  </a:schemeClr>
-                </a:solidFill>
-                <a:latin typeface="+mn-lt"/>
-                <a:ea typeface="+mn-ea"/>
-                <a:cs typeface="+mn-cs"/>
-              </a:defRPr>
-            </a:pPr>
-          </a:p>
-        </c:txPr>
         <c:crossAx val="103579588"/>
         <c:crosses val="autoZero"/>
         <c:crossBetween val="between"/>
@@ -1791,16 +1720,17 @@
       <a:pPr>
         <a:defRPr lang="zh-CN"/>
       </a:pPr>
+      <a:endParaRPr lang="zh-CN"/>
     </a:p>
   </c:txPr>
-  <c:externalData r:id="rId1">
+  <c:externalData r:id="rId3">
     <c:autoUpdate val="0"/>
   </c:externalData>
 </c:chartSpace>
 </file>
 
 <file path=ppt/charts/chart4.xml><?xml version="1.0" encoding="utf-8"?>
-<c:chartSpace xmlns:c="http://schemas.openxmlformats.org/drawingml/2006/chart" xmlns:a="http://schemas.openxmlformats.org/drawingml/2006/main" xmlns:r="http://schemas.openxmlformats.org/officeDocument/2006/relationships">
+<c:chartSpace xmlns:c="http://schemas.openxmlformats.org/drawingml/2006/chart" xmlns:a="http://schemas.openxmlformats.org/drawingml/2006/main" xmlns:r="http://schemas.openxmlformats.org/officeDocument/2006/relationships" xmlns:c16r2="http://schemas.microsoft.com/office/drawing/2015/06/chart">
   <c:date1904 val="0"/>
   <c:lang val="zh-CN"/>
   <c:roundedCorners val="0"/>
@@ -1820,10 +1750,10 @@
           <c:layoutTarget val="inner"/>
           <c:xMode val="edge"/>
           <c:yMode val="edge"/>
-          <c:x val="0.0971302428256071"/>
+          <c:x val="9.7130242825607102E-2"/>
           <c:y val="0.23454157782516"/>
-          <c:w val="0.83046357615894"/>
-          <c:h val="0.53091684434968"/>
+          <c:w val="0.83046357615893995"/>
+          <c:h val="0.53091684434968001"/>
         </c:manualLayout>
       </c:layout>
       <c:barChart>
@@ -1854,9 +1784,6 @@
             <a:effectLst/>
           </c:spPr>
           <c:invertIfNegative val="0"/>
-          <c:dLbls>
-            <c:delete val="1"/>
-          </c:dLbls>
           <c:cat>
             <c:strRef>
               <c:f>Sheet1!$A$2</c:f>
@@ -1880,6 +1807,11 @@
               </c:numCache>
             </c:numRef>
           </c:val>
+          <c:extLst>
+            <c:ext xmlns:c16="http://schemas.microsoft.com/office/drawing/2014/chart" uri="{C3380CC4-5D6E-409C-BE32-E72D297353CC}">
+              <c16:uniqueId val="{00000000-8D69-A446-ABAB-B1C2E6BCB213}"/>
+            </c:ext>
+          </c:extLst>
         </c:ser>
         <c:ser>
           <c:idx val="1"/>
@@ -1905,9 +1837,6 @@
             <a:effectLst/>
           </c:spPr>
           <c:invertIfNegative val="0"/>
-          <c:dLbls>
-            <c:delete val="1"/>
-          </c:dLbls>
           <c:cat>
             <c:strRef>
               <c:f>Sheet1!$A$2</c:f>
@@ -1931,6 +1860,11 @@
               </c:numCache>
             </c:numRef>
           </c:val>
+          <c:extLst>
+            <c:ext xmlns:c16="http://schemas.microsoft.com/office/drawing/2014/chart" uri="{C3380CC4-5D6E-409C-BE32-E72D297353CC}">
+              <c16:uniqueId val="{00000001-8D69-A446-ABAB-B1C2E6BCB213}"/>
+            </c:ext>
+          </c:extLst>
         </c:ser>
         <c:ser>
           <c:idx val="2"/>
@@ -1956,9 +1890,6 @@
             <a:effectLst/>
           </c:spPr>
           <c:invertIfNegative val="0"/>
-          <c:dLbls>
-            <c:delete val="1"/>
-          </c:dLbls>
           <c:cat>
             <c:strRef>
               <c:f>Sheet1!$A$2</c:f>
@@ -1982,6 +1913,11 @@
               </c:numCache>
             </c:numRef>
           </c:val>
+          <c:extLst>
+            <c:ext xmlns:c16="http://schemas.microsoft.com/office/drawing/2014/chart" uri="{C3380CC4-5D6E-409C-BE32-E72D297353CC}">
+              <c16:uniqueId val="{00000002-8D69-A446-ABAB-B1C2E6BCB213}"/>
+            </c:ext>
+          </c:extLst>
         </c:ser>
         <c:ser>
           <c:idx val="3"/>
@@ -2007,9 +1943,6 @@
             <a:effectLst/>
           </c:spPr>
           <c:invertIfNegative val="0"/>
-          <c:dLbls>
-            <c:delete val="1"/>
-          </c:dLbls>
           <c:cat>
             <c:strRef>
               <c:f>Sheet1!$A$2</c:f>
@@ -2033,6 +1966,11 @@
               </c:numCache>
             </c:numRef>
           </c:val>
+          <c:extLst>
+            <c:ext xmlns:c16="http://schemas.microsoft.com/office/drawing/2014/chart" uri="{C3380CC4-5D6E-409C-BE32-E72D297353CC}">
+              <c16:uniqueId val="{00000003-8D69-A446-ABAB-B1C2E6BCB213}"/>
+            </c:ext>
+          </c:extLst>
         </c:ser>
         <c:ser>
           <c:idx val="4"/>
@@ -2058,9 +1996,6 @@
             <a:effectLst/>
           </c:spPr>
           <c:invertIfNegative val="0"/>
-          <c:dLbls>
-            <c:delete val="1"/>
-          </c:dLbls>
           <c:cat>
             <c:strRef>
               <c:f>Sheet1!$A$2</c:f>
@@ -2084,6 +2019,11 @@
               </c:numCache>
             </c:numRef>
           </c:val>
+          <c:extLst>
+            <c:ext xmlns:c16="http://schemas.microsoft.com/office/drawing/2014/chart" uri="{C3380CC4-5D6E-409C-BE32-E72D297353CC}">
+              <c16:uniqueId val="{00000004-8D69-A446-ABAB-B1C2E6BCB213}"/>
+            </c:ext>
+          </c:extLst>
         </c:ser>
         <c:ser>
           <c:idx val="6"/>
@@ -2109,9 +2049,6 @@
             <a:effectLst/>
           </c:spPr>
           <c:invertIfNegative val="0"/>
-          <c:dLbls>
-            <c:delete val="1"/>
-          </c:dLbls>
           <c:cat>
             <c:strRef>
               <c:f>Sheet1!$A$2</c:f>
@@ -2135,6 +2072,11 @@
               </c:numCache>
             </c:numRef>
           </c:val>
+          <c:extLst>
+            <c:ext xmlns:c16="http://schemas.microsoft.com/office/drawing/2014/chart" uri="{C3380CC4-5D6E-409C-BE32-E72D297353CC}">
+              <c16:uniqueId val="{00000005-8D69-A446-ABAB-B1C2E6BCB213}"/>
+            </c:ext>
+          </c:extLst>
         </c:ser>
         <c:ser>
           <c:idx val="7"/>
@@ -2160,9 +2102,6 @@
             <a:effectLst/>
           </c:spPr>
           <c:invertIfNegative val="0"/>
-          <c:dLbls>
-            <c:delete val="1"/>
-          </c:dLbls>
           <c:cat>
             <c:strRef>
               <c:f>Sheet1!$A$2</c:f>
@@ -2186,6 +2125,11 @@
               </c:numCache>
             </c:numRef>
           </c:val>
+          <c:extLst>
+            <c:ext xmlns:c16="http://schemas.microsoft.com/office/drawing/2014/chart" uri="{C3380CC4-5D6E-409C-BE32-E72D297353CC}">
+              <c16:uniqueId val="{00000006-8D69-A446-ABAB-B1C2E6BCB213}"/>
+            </c:ext>
+          </c:extLst>
         </c:ser>
         <c:dLbls>
           <c:showLegendKey val="0"/>
@@ -2232,16 +2176,10 @@
                   <a:effectLst/>
                 </c:spPr>
                 <c:invertIfNegative val="0"/>
-                <c:dLbls>
-                  <c:delete val="1"/>
-                </c:dLbls>
                 <c:cat>
                   <c:strRef>
                     <c:extLst>
                       <c:ext uri="{02D57815-91ED-43cb-92C2-25804820EDAC}">
-                        <c15:fullRef>
-                          <c15:sqref/>
-                        </c15:fullRef>
                         <c15:formulaRef>
                           <c15:sqref>Sheet1!$A$2</c15:sqref>
                         </c15:formulaRef>
@@ -2273,6 +2211,11 @@
                     </c:numCache>
                   </c:numRef>
                 </c:val>
+                <c:extLst>
+                  <c:ext xmlns:c16="http://schemas.microsoft.com/office/drawing/2014/chart" uri="{C3380CC4-5D6E-409C-BE32-E72D297353CC}">
+                    <c16:uniqueId val="{00000007-8D69-A446-ABAB-B1C2E6BCB213}"/>
+                  </c:ext>
+                </c:extLst>
               </c15:ser>
             </c15:filteredBarSeries>
           </c:ext>
@@ -2289,22 +2232,6 @@
         <c:majorTickMark val="none"/>
         <c:minorTickMark val="none"/>
         <c:tickLblPos val="nextTo"/>
-        <c:txPr>
-          <a:bodyPr rot="-60000000" spcFirstLastPara="0" vertOverflow="ellipsis" vert="horz" wrap="square" anchor="ctr" anchorCtr="1"/>
-          <a:lstStyle/>
-          <a:p>
-            <a:pPr>
-              <a:defRPr lang="en-US" altLang="zh-CN" sz="900" b="0" i="0" u="none" strike="noStrike" kern="1200" baseline="0">
-                <a:solidFill>
-                  <a:schemeClr val="tx1"/>
-                </a:solidFill>
-                <a:latin typeface="+mn-lt"/>
-                <a:ea typeface="+mn-ea"/>
-                <a:cs typeface="+mn-cs"/>
-              </a:defRPr>
-            </a:pPr>
-          </a:p>
-        </c:txPr>
         <c:crossAx val="583921027"/>
         <c:crosses val="autoZero"/>
         <c:auto val="1"/>
@@ -2323,22 +2250,6 @@
         <c:majorTickMark val="none"/>
         <c:minorTickMark val="none"/>
         <c:tickLblPos val="nextTo"/>
-        <c:txPr>
-          <a:bodyPr rot="-60000000" spcFirstLastPara="0" vertOverflow="ellipsis" vert="horz" wrap="square" anchor="ctr" anchorCtr="1"/>
-          <a:lstStyle/>
-          <a:p>
-            <a:pPr>
-              <a:defRPr lang="en-US" altLang="zh-CN" sz="900" b="0" i="0" u="none" strike="noStrike" kern="1200" baseline="0">
-                <a:solidFill>
-                  <a:schemeClr val="tx1"/>
-                </a:solidFill>
-                <a:latin typeface="+mn-lt"/>
-                <a:ea typeface="+mn-ea"/>
-                <a:cs typeface="+mn-cs"/>
-              </a:defRPr>
-            </a:pPr>
-          </a:p>
-        </c:txPr>
         <c:crossAx val="103579588"/>
         <c:crosses val="autoZero"/>
         <c:crossBetween val="between"/>
@@ -2381,9 +2292,10 @@
           <a:cs typeface="+mn-cs"/>
         </a:defRPr>
       </a:pPr>
+      <a:endParaRPr lang="zh-CN"/>
     </a:p>
   </c:txPr>
-  <c:externalData r:id="rId1">
+  <c:externalData r:id="rId3">
     <c:autoUpdate val="0"/>
   </c:externalData>
 </c:chartSpace>
@@ -4679,6 +4591,7 @@
           <a:p>
             <a:fld id="{0F9B84EA-7D68-4D60-9CB1-D50884785D1C}" type="datetimeFigureOut">
               <a:rPr lang="zh-CN" altLang="en-US" smtClean="0"/>
+              <a:t>2026/7/16</a:t>
             </a:fld>
             <a:endParaRPr lang="zh-CN" altLang="en-US"/>
           </a:p>
@@ -4744,12 +4657,18 @@
           <a:p>
             <a:fld id="{8D4E0FC9-F1F8-4FAE-9988-3BA365CFD46F}" type="slidenum">
               <a:rPr lang="zh-CN" altLang="en-US" smtClean="0"/>
+              <a:t>‹#›</a:t>
             </a:fld>
             <a:endParaRPr lang="zh-CN" altLang="en-US"/>
           </a:p>
         </p:txBody>
       </p:sp>
     </p:spTree>
+    <p:extLst>
+      <p:ext uri="{BB962C8B-B14F-4D97-AF65-F5344CB8AC3E}">
+        <p14:creationId xmlns:p14="http://schemas.microsoft.com/office/powerpoint/2010/main" val="1"/>
+      </p:ext>
+    </p:extLst>
   </p:cSld>
   <p:clrMap bg1="lt1" tx1="dk1" bg2="lt2" tx2="dk2" accent1="accent1" accent2="accent2" accent3="accent3" accent4="accent4" accent5="accent5" accent6="accent6" hlink="hlink" folHlink="folHlink"/>
 </p:handoutMaster>
@@ -4837,6 +4756,7 @@
           <a:p>
             <a:fld id="{D6C8D182-E4C8-4120-9249-FC9774456FFA}" type="datetimeFigureOut">
               <a:rPr lang="zh-CN" altLang="en-US" smtClean="0"/>
+              <a:t>2026/7/16</a:t>
             </a:fld>
             <a:endParaRPr lang="zh-CN" altLang="en-US"/>
           </a:p>
@@ -4903,7 +4823,6 @@
               <a:rPr lang="zh-CN" altLang="en-US"/>
               <a:t>编辑母版文本样式</a:t>
             </a:r>
-            <a:endParaRPr lang="zh-CN" altLang="en-US"/>
           </a:p>
           <a:p>
             <a:pPr lvl="1"/>
@@ -4911,7 +4830,6 @@
               <a:rPr lang="zh-CN" altLang="en-US"/>
               <a:t>第二级</a:t>
             </a:r>
-            <a:endParaRPr lang="zh-CN" altLang="en-US"/>
           </a:p>
           <a:p>
             <a:pPr lvl="2"/>
@@ -4919,7 +4837,6 @@
               <a:rPr lang="zh-CN" altLang="en-US"/>
               <a:t>第三级</a:t>
             </a:r>
-            <a:endParaRPr lang="zh-CN" altLang="en-US"/>
           </a:p>
           <a:p>
             <a:pPr lvl="3"/>
@@ -4927,7 +4844,6 @@
               <a:rPr lang="zh-CN" altLang="en-US"/>
               <a:t>第四级</a:t>
             </a:r>
-            <a:endParaRPr lang="zh-CN" altLang="en-US"/>
           </a:p>
           <a:p>
             <a:pPr lvl="4"/>
@@ -4935,7 +4851,6 @@
               <a:rPr lang="zh-CN" altLang="en-US"/>
               <a:t>第五级</a:t>
             </a:r>
-            <a:endParaRPr lang="zh-CN" altLang="en-US"/>
           </a:p>
         </p:txBody>
       </p:sp>
@@ -4999,6 +4914,7 @@
           <a:p>
             <a:fld id="{85D0DACE-38E0-42D2-9336-2B707D34BC6D}" type="slidenum">
               <a:rPr lang="zh-CN" altLang="en-US" smtClean="0"/>
+              <a:t>‹#›</a:t>
             </a:fld>
             <a:endParaRPr lang="zh-CN" altLang="en-US"/>
           </a:p>
@@ -5296,7 +5212,6 @@
               <a:rPr lang="zh-CN" altLang="en-US" dirty="0"/>
               <a:t>单击此处添加标题</a:t>
             </a:r>
-            <a:endParaRPr lang="zh-CN" altLang="en-US" dirty="0"/>
           </a:p>
         </p:txBody>
       </p:sp>
@@ -5317,6 +5232,7 @@
           <a:p>
             <a:fld id="{760FBDFE-C587-4B4C-A407-44438C67B59E}" type="datetimeFigureOut">
               <a:rPr lang="zh-CN" altLang="en-US" smtClean="0"/>
+              <a:t>2026/7/16</a:t>
             </a:fld>
             <a:endParaRPr lang="zh-CN" altLang="en-US"/>
           </a:p>
@@ -5358,6 +5274,7 @@
           <a:p>
             <a:fld id="{49AE70B2-8BF9-45C0-BB95-33D1B9D3A854}" type="slidenum">
               <a:rPr lang="zh-CN" altLang="en-US" smtClean="0"/>
+              <a:t>‹#›</a:t>
             </a:fld>
             <a:endParaRPr lang="zh-CN" altLang="en-US"/>
           </a:p>
@@ -5436,7 +5353,6 @@
               <a:rPr lang="zh-CN" altLang="en-US" dirty="0"/>
               <a:t>单击此处添加副标题</a:t>
             </a:r>
-            <a:endParaRPr lang="zh-CN" altLang="en-US" dirty="0"/>
           </a:p>
         </p:txBody>
       </p:sp>
@@ -5482,6 +5398,7 @@
           <a:p>
             <a:fld id="{760FBDFE-C587-4B4C-A407-44438C67B59E}" type="datetimeFigureOut">
               <a:rPr lang="zh-CN" altLang="en-US" smtClean="0"/>
+              <a:t>2026/7/16</a:t>
             </a:fld>
             <a:endParaRPr lang="zh-CN" altLang="en-US"/>
           </a:p>
@@ -5523,6 +5440,7 @@
           <a:p>
             <a:fld id="{49AE70B2-8BF9-45C0-BB95-33D1B9D3A854}" type="slidenum">
               <a:rPr lang="zh-CN" altLang="en-US" smtClean="0"/>
+              <a:t>‹#›</a:t>
             </a:fld>
             <a:endParaRPr lang="zh-CN" altLang="en-US"/>
           </a:p>
@@ -5553,7 +5471,6 @@
               <a:rPr lang="zh-CN" altLang="en-US" dirty="0"/>
               <a:t>单击此处编辑母版文本样式</a:t>
             </a:r>
-            <a:endParaRPr lang="zh-CN" altLang="en-US" dirty="0"/>
           </a:p>
           <a:p>
             <a:pPr lvl="1"/>
@@ -5561,7 +5478,6 @@
               <a:rPr lang="zh-CN" altLang="en-US" dirty="0"/>
               <a:t>第二级</a:t>
             </a:r>
-            <a:endParaRPr lang="zh-CN" altLang="en-US" dirty="0"/>
           </a:p>
           <a:p>
             <a:pPr lvl="2"/>
@@ -5569,7 +5485,6 @@
               <a:rPr lang="zh-CN" altLang="en-US" dirty="0"/>
               <a:t>第三级</a:t>
             </a:r>
-            <a:endParaRPr lang="zh-CN" altLang="en-US" dirty="0"/>
           </a:p>
           <a:p>
             <a:pPr lvl="3"/>
@@ -5577,7 +5492,6 @@
               <a:rPr lang="zh-CN" altLang="en-US" dirty="0"/>
               <a:t>第四级</a:t>
             </a:r>
-            <a:endParaRPr lang="zh-CN" altLang="en-US" dirty="0"/>
           </a:p>
           <a:p>
             <a:pPr lvl="4"/>
@@ -5585,7 +5499,6 @@
               <a:rPr lang="zh-CN" altLang="en-US" dirty="0"/>
               <a:t>第五级</a:t>
             </a:r>
-            <a:endParaRPr lang="zh-CN" altLang="en-US" dirty="0"/>
           </a:p>
         </p:txBody>
       </p:sp>
@@ -5652,7 +5565,6 @@
               <a:rPr lang="zh-CN" altLang="en-US" dirty="0"/>
               <a:t>单击此处编辑母版标题样式</a:t>
             </a:r>
-            <a:endParaRPr lang="zh-CN" altLang="en-US" dirty="0"/>
           </a:p>
         </p:txBody>
       </p:sp>
@@ -5734,7 +5646,6 @@
               <a:rPr lang="zh-CN" altLang="en-US" dirty="0"/>
               <a:t>单击此处编辑母版文本样式</a:t>
             </a:r>
-            <a:endParaRPr lang="zh-CN" altLang="en-US" dirty="0"/>
           </a:p>
           <a:p>
             <a:pPr lvl="1"/>
@@ -5742,7 +5653,6 @@
               <a:rPr lang="zh-CN" altLang="en-US" dirty="0"/>
               <a:t>第二级</a:t>
             </a:r>
-            <a:endParaRPr lang="zh-CN" altLang="en-US" dirty="0"/>
           </a:p>
           <a:p>
             <a:pPr lvl="2"/>
@@ -5750,7 +5660,6 @@
               <a:rPr lang="zh-CN" altLang="en-US" dirty="0"/>
               <a:t>第三级</a:t>
             </a:r>
-            <a:endParaRPr lang="zh-CN" altLang="en-US" dirty="0"/>
           </a:p>
           <a:p>
             <a:pPr lvl="3"/>
@@ -5758,7 +5667,6 @@
               <a:rPr lang="zh-CN" altLang="en-US" dirty="0"/>
               <a:t>第四级</a:t>
             </a:r>
-            <a:endParaRPr lang="zh-CN" altLang="en-US" dirty="0"/>
           </a:p>
           <a:p>
             <a:pPr lvl="4"/>
@@ -5766,7 +5674,6 @@
               <a:rPr lang="zh-CN" altLang="en-US" dirty="0"/>
               <a:t>第五级</a:t>
             </a:r>
-            <a:endParaRPr lang="zh-CN" altLang="en-US" dirty="0"/>
           </a:p>
         </p:txBody>
       </p:sp>
@@ -5787,6 +5694,7 @@
           <a:p>
             <a:fld id="{760FBDFE-C587-4B4C-A407-44438C67B59E}" type="datetimeFigureOut">
               <a:rPr lang="zh-CN" altLang="en-US" smtClean="0"/>
+              <a:t>2026/7/16</a:t>
             </a:fld>
             <a:endParaRPr lang="zh-CN" altLang="en-US"/>
           </a:p>
@@ -5828,6 +5736,7 @@
           <a:p>
             <a:fld id="{49AE70B2-8BF9-45C0-BB95-33D1B9D3A854}" type="slidenum">
               <a:rPr lang="zh-CN" altLang="en-US" smtClean="0"/>
+              <a:t>‹#›</a:t>
             </a:fld>
             <a:endParaRPr lang="zh-CN" altLang="en-US"/>
           </a:p>
@@ -5896,7 +5805,6 @@
               <a:rPr lang="zh-CN" altLang="en-US" dirty="0"/>
               <a:t>单击此处编辑母版标题样式</a:t>
             </a:r>
-            <a:endParaRPr lang="zh-CN" altLang="en-US" dirty="0"/>
           </a:p>
         </p:txBody>
       </p:sp>
@@ -6016,7 +5924,6 @@
               <a:rPr lang="zh-CN" altLang="en-US" dirty="0"/>
               <a:t>单击此处编辑母版文本样式</a:t>
             </a:r>
-            <a:endParaRPr lang="zh-CN" altLang="en-US" dirty="0"/>
           </a:p>
         </p:txBody>
       </p:sp>
@@ -6037,6 +5944,7 @@
           <a:p>
             <a:fld id="{760FBDFE-C587-4B4C-A407-44438C67B59E}" type="datetimeFigureOut">
               <a:rPr lang="zh-CN" altLang="en-US" smtClean="0"/>
+              <a:t>2026/7/16</a:t>
             </a:fld>
             <a:endParaRPr lang="zh-CN" altLang="en-US"/>
           </a:p>
@@ -6078,6 +5986,7 @@
           <a:p>
             <a:fld id="{49AE70B2-8BF9-45C0-BB95-33D1B9D3A854}" type="slidenum">
               <a:rPr lang="zh-CN" altLang="en-US" smtClean="0"/>
+              <a:t>‹#›</a:t>
             </a:fld>
             <a:endParaRPr lang="zh-CN" altLang="en-US"/>
           </a:p>
@@ -6146,7 +6055,6 @@
               <a:rPr lang="zh-CN" altLang="en-US" dirty="0"/>
               <a:t>单击此处编辑母版标题样式</a:t>
             </a:r>
-            <a:endParaRPr lang="zh-CN" altLang="en-US" dirty="0"/>
           </a:p>
         </p:txBody>
       </p:sp>
@@ -6243,7 +6151,6 @@
               <a:rPr lang="zh-CN" altLang="en-US" dirty="0"/>
               <a:t>单击此处编辑母版文本样式</a:t>
             </a:r>
-            <a:endParaRPr lang="zh-CN" altLang="en-US" dirty="0"/>
           </a:p>
           <a:p>
             <a:pPr lvl="1"/>
@@ -6251,7 +6158,6 @@
               <a:rPr lang="zh-CN" altLang="en-US" dirty="0"/>
               <a:t>第二级</a:t>
             </a:r>
-            <a:endParaRPr lang="zh-CN" altLang="en-US" dirty="0"/>
           </a:p>
           <a:p>
             <a:pPr lvl="2"/>
@@ -6259,7 +6165,6 @@
               <a:rPr lang="zh-CN" altLang="en-US" dirty="0"/>
               <a:t>第三级</a:t>
             </a:r>
-            <a:endParaRPr lang="zh-CN" altLang="en-US" dirty="0"/>
           </a:p>
           <a:p>
             <a:pPr lvl="3"/>
@@ -6267,7 +6172,6 @@
               <a:rPr lang="zh-CN" altLang="en-US" dirty="0"/>
               <a:t>第四级</a:t>
             </a:r>
-            <a:endParaRPr lang="zh-CN" altLang="en-US" dirty="0"/>
           </a:p>
           <a:p>
             <a:pPr lvl="4"/>
@@ -6275,7 +6179,6 @@
               <a:rPr lang="zh-CN" altLang="en-US" dirty="0"/>
               <a:t>第五级</a:t>
             </a:r>
-            <a:endParaRPr lang="zh-CN" altLang="en-US" dirty="0"/>
           </a:p>
         </p:txBody>
       </p:sp>
@@ -6372,7 +6275,6 @@
               <a:rPr lang="zh-CN" altLang="en-US" dirty="0"/>
               <a:t>单击此处编辑母版文本样式</a:t>
             </a:r>
-            <a:endParaRPr lang="zh-CN" altLang="en-US" dirty="0"/>
           </a:p>
           <a:p>
             <a:pPr lvl="1"/>
@@ -6380,7 +6282,6 @@
               <a:rPr lang="zh-CN" altLang="en-US" dirty="0"/>
               <a:t>第二级</a:t>
             </a:r>
-            <a:endParaRPr lang="zh-CN" altLang="en-US" dirty="0"/>
           </a:p>
           <a:p>
             <a:pPr lvl="2"/>
@@ -6388,7 +6289,6 @@
               <a:rPr lang="zh-CN" altLang="en-US" dirty="0"/>
               <a:t>第三级</a:t>
             </a:r>
-            <a:endParaRPr lang="zh-CN" altLang="en-US" dirty="0"/>
           </a:p>
           <a:p>
             <a:pPr lvl="3"/>
@@ -6396,7 +6296,6 @@
               <a:rPr lang="zh-CN" altLang="en-US" dirty="0"/>
               <a:t>第四级</a:t>
             </a:r>
-            <a:endParaRPr lang="zh-CN" altLang="en-US" dirty="0"/>
           </a:p>
           <a:p>
             <a:pPr lvl="4"/>
@@ -6404,7 +6303,6 @@
               <a:rPr lang="zh-CN" altLang="en-US" dirty="0"/>
               <a:t>第五级</a:t>
             </a:r>
-            <a:endParaRPr lang="zh-CN" altLang="en-US" dirty="0"/>
           </a:p>
         </p:txBody>
       </p:sp>
@@ -6425,6 +6323,7 @@
           <a:p>
             <a:fld id="{760FBDFE-C587-4B4C-A407-44438C67B59E}" type="datetimeFigureOut">
               <a:rPr lang="zh-CN" altLang="en-US" smtClean="0"/>
+              <a:t>2026/7/16</a:t>
             </a:fld>
             <a:endParaRPr lang="zh-CN" altLang="en-US"/>
           </a:p>
@@ -6466,6 +6365,7 @@
           <a:p>
             <a:fld id="{49AE70B2-8BF9-45C0-BB95-33D1B9D3A854}" type="slidenum">
               <a:rPr lang="zh-CN" altLang="en-US" smtClean="0"/>
+              <a:t>‹#›</a:t>
             </a:fld>
             <a:endParaRPr lang="zh-CN" altLang="en-US"/>
           </a:p>
@@ -6520,7 +6420,6 @@
               <a:rPr lang="zh-CN" altLang="en-US"/>
               <a:t>单击此处编辑母版标题样式</a:t>
             </a:r>
-            <a:endParaRPr lang="zh-CN" altLang="en-US"/>
           </a:p>
         </p:txBody>
       </p:sp>
@@ -6586,7 +6485,6 @@
               <a:rPr lang="zh-CN" altLang="en-US" dirty="0"/>
               <a:t>单击此处编辑母版文本样式</a:t>
             </a:r>
-            <a:endParaRPr lang="zh-CN" altLang="en-US" dirty="0"/>
           </a:p>
         </p:txBody>
       </p:sp>
@@ -6615,7 +6513,6 @@
               <a:rPr lang="zh-CN" altLang="en-US" dirty="0"/>
               <a:t>单击此处编辑母版文本样式</a:t>
             </a:r>
-            <a:endParaRPr lang="zh-CN" altLang="en-US" dirty="0"/>
           </a:p>
           <a:p>
             <a:pPr lvl="1"/>
@@ -6623,7 +6520,6 @@
               <a:rPr lang="zh-CN" altLang="en-US" dirty="0"/>
               <a:t>第二级</a:t>
             </a:r>
-            <a:endParaRPr lang="zh-CN" altLang="en-US" dirty="0"/>
           </a:p>
           <a:p>
             <a:pPr lvl="2"/>
@@ -6631,7 +6527,6 @@
               <a:rPr lang="zh-CN" altLang="en-US" dirty="0"/>
               <a:t>第三级</a:t>
             </a:r>
-            <a:endParaRPr lang="zh-CN" altLang="en-US" dirty="0"/>
           </a:p>
           <a:p>
             <a:pPr lvl="3"/>
@@ -6639,7 +6534,6 @@
               <a:rPr lang="zh-CN" altLang="en-US" dirty="0"/>
               <a:t>第四级</a:t>
             </a:r>
-            <a:endParaRPr lang="zh-CN" altLang="en-US" dirty="0"/>
           </a:p>
           <a:p>
             <a:pPr lvl="4"/>
@@ -6647,7 +6541,6 @@
               <a:rPr lang="zh-CN" altLang="en-US" dirty="0"/>
               <a:t>第五级</a:t>
             </a:r>
-            <a:endParaRPr lang="zh-CN" altLang="en-US" dirty="0"/>
           </a:p>
         </p:txBody>
       </p:sp>
@@ -6713,7 +6606,6 @@
               <a:rPr lang="zh-CN" altLang="en-US" dirty="0"/>
               <a:t>单击此处编辑母版文本样式</a:t>
             </a:r>
-            <a:endParaRPr lang="zh-CN" altLang="en-US" dirty="0"/>
           </a:p>
         </p:txBody>
       </p:sp>
@@ -6742,7 +6634,6 @@
               <a:rPr lang="zh-CN" altLang="en-US" dirty="0"/>
               <a:t>单击此处编辑母版文本样式</a:t>
             </a:r>
-            <a:endParaRPr lang="zh-CN" altLang="en-US" dirty="0"/>
           </a:p>
           <a:p>
             <a:pPr lvl="1"/>
@@ -6750,7 +6641,6 @@
               <a:rPr lang="zh-CN" altLang="en-US" dirty="0"/>
               <a:t>第二级</a:t>
             </a:r>
-            <a:endParaRPr lang="zh-CN" altLang="en-US" dirty="0"/>
           </a:p>
           <a:p>
             <a:pPr lvl="2"/>
@@ -6758,7 +6648,6 @@
               <a:rPr lang="zh-CN" altLang="en-US" dirty="0"/>
               <a:t>第三级</a:t>
             </a:r>
-            <a:endParaRPr lang="zh-CN" altLang="en-US" dirty="0"/>
           </a:p>
           <a:p>
             <a:pPr lvl="3"/>
@@ -6766,7 +6655,6 @@
               <a:rPr lang="zh-CN" altLang="en-US" dirty="0"/>
               <a:t>第四级</a:t>
             </a:r>
-            <a:endParaRPr lang="zh-CN" altLang="en-US" dirty="0"/>
           </a:p>
           <a:p>
             <a:pPr lvl="4"/>
@@ -6774,7 +6662,6 @@
               <a:rPr lang="zh-CN" altLang="en-US" dirty="0"/>
               <a:t>第五级</a:t>
             </a:r>
-            <a:endParaRPr lang="zh-CN" altLang="en-US" dirty="0"/>
           </a:p>
         </p:txBody>
       </p:sp>
@@ -6795,6 +6682,7 @@
           <a:p>
             <a:fld id="{760FBDFE-C587-4B4C-A407-44438C67B59E}" type="datetimeFigureOut">
               <a:rPr lang="zh-CN" altLang="en-US" smtClean="0"/>
+              <a:t>2026/7/16</a:t>
             </a:fld>
             <a:endParaRPr lang="zh-CN" altLang="en-US"/>
           </a:p>
@@ -6836,6 +6724,7 @@
           <a:p>
             <a:fld id="{49AE70B2-8BF9-45C0-BB95-33D1B9D3A854}" type="slidenum">
               <a:rPr lang="zh-CN" altLang="en-US" smtClean="0"/>
+              <a:t>‹#›</a:t>
             </a:fld>
             <a:endParaRPr lang="zh-CN" altLang="en-US"/>
           </a:p>
@@ -6904,7 +6793,6 @@
               <a:rPr lang="zh-CN" altLang="en-US" dirty="0"/>
               <a:t>单击此处编辑母版标题样式</a:t>
             </a:r>
-            <a:endParaRPr lang="zh-CN" altLang="en-US" dirty="0"/>
           </a:p>
         </p:txBody>
       </p:sp>
@@ -6925,6 +6813,7 @@
           <a:p>
             <a:fld id="{760FBDFE-C587-4B4C-A407-44438C67B59E}" type="datetimeFigureOut">
               <a:rPr lang="zh-CN" altLang="en-US" smtClean="0"/>
+              <a:t>2026/7/16</a:t>
             </a:fld>
             <a:endParaRPr lang="zh-CN" altLang="en-US"/>
           </a:p>
@@ -6966,6 +6855,7 @@
           <a:p>
             <a:fld id="{49AE70B2-8BF9-45C0-BB95-33D1B9D3A854}" type="slidenum">
               <a:rPr lang="zh-CN" altLang="en-US" smtClean="0"/>
+              <a:t>‹#›</a:t>
             </a:fld>
             <a:endParaRPr lang="zh-CN" altLang="en-US"/>
           </a:p>
@@ -7013,6 +6903,7 @@
           <a:p>
             <a:fld id="{760FBDFE-C587-4B4C-A407-44438C67B59E}" type="datetimeFigureOut">
               <a:rPr lang="zh-CN" altLang="en-US" smtClean="0"/>
+              <a:t>2026/7/16</a:t>
             </a:fld>
             <a:endParaRPr lang="zh-CN" altLang="en-US"/>
           </a:p>
@@ -7054,6 +6945,7 @@
           <a:p>
             <a:fld id="{49AE70B2-8BF9-45C0-BB95-33D1B9D3A854}" type="slidenum">
               <a:rPr lang="zh-CN" altLang="en-US" smtClean="0"/>
+              <a:t>‹#›</a:t>
             </a:fld>
             <a:endParaRPr lang="zh-CN" altLang="en-US"/>
           </a:p>
@@ -7122,7 +7014,6 @@
               <a:rPr lang="zh-CN" altLang="en-US" dirty="0"/>
               <a:t>单击此处编辑标题</a:t>
             </a:r>
-            <a:endParaRPr lang="zh-CN" altLang="en-US" dirty="0"/>
           </a:p>
         </p:txBody>
       </p:sp>
@@ -7254,7 +7145,6 @@
               <a:rPr lang="zh-CN" altLang="en-US" dirty="0"/>
               <a:t>单击此处编辑母版文本样式</a:t>
             </a:r>
-            <a:endParaRPr lang="zh-CN" altLang="en-US" dirty="0"/>
           </a:p>
         </p:txBody>
       </p:sp>
@@ -7275,6 +7165,7 @@
           <a:p>
             <a:fld id="{9EFD9D74-47D9-4702-A33C-335B63B48DBF}" type="datetimeFigureOut">
               <a:rPr lang="zh-CN" altLang="en-US" smtClean="0"/>
+              <a:t>2026/7/16</a:t>
             </a:fld>
             <a:endParaRPr lang="zh-CN" altLang="en-US" dirty="0"/>
           </a:p>
@@ -7316,6 +7207,7 @@
           <a:p>
             <a:fld id="{FABC47A4-756D-490B-A52F-7D9E2C9FC05F}" type="slidenum">
               <a:rPr lang="zh-CN" altLang="en-US" smtClean="0"/>
+              <a:t>‹#›</a:t>
             </a:fld>
             <a:endParaRPr lang="zh-CN" altLang="en-US"/>
           </a:p>
@@ -7376,7 +7268,6 @@
               <a:rPr lang="zh-CN" altLang="en-US"/>
               <a:t>单击此处编辑母版标题样式</a:t>
             </a:r>
-            <a:endParaRPr lang="zh-CN" altLang="en-US"/>
           </a:p>
         </p:txBody>
       </p:sp>
@@ -7405,7 +7296,6 @@
               <a:rPr lang="zh-CN" altLang="en-US" dirty="0"/>
               <a:t>单击此处编辑母版文本样式</a:t>
             </a:r>
-            <a:endParaRPr lang="zh-CN" altLang="en-US" dirty="0"/>
           </a:p>
           <a:p>
             <a:pPr lvl="1"/>
@@ -7413,7 +7303,6 @@
               <a:rPr lang="zh-CN" altLang="en-US" dirty="0"/>
               <a:t>第二级</a:t>
             </a:r>
-            <a:endParaRPr lang="zh-CN" altLang="en-US" dirty="0"/>
           </a:p>
           <a:p>
             <a:pPr lvl="2"/>
@@ -7421,7 +7310,6 @@
               <a:rPr lang="zh-CN" altLang="en-US" dirty="0"/>
               <a:t>第三级</a:t>
             </a:r>
-            <a:endParaRPr lang="zh-CN" altLang="en-US" dirty="0"/>
           </a:p>
           <a:p>
             <a:pPr lvl="3"/>
@@ -7429,7 +7317,6 @@
               <a:rPr lang="zh-CN" altLang="en-US" dirty="0"/>
               <a:t>第四级</a:t>
             </a:r>
-            <a:endParaRPr lang="zh-CN" altLang="en-US" dirty="0"/>
           </a:p>
           <a:p>
             <a:pPr lvl="4"/>
@@ -7437,7 +7324,6 @@
               <a:rPr lang="zh-CN" altLang="en-US" dirty="0"/>
               <a:t>第五级</a:t>
             </a:r>
-            <a:endParaRPr lang="zh-CN" altLang="en-US" dirty="0"/>
           </a:p>
         </p:txBody>
       </p:sp>
@@ -7458,6 +7344,7 @@
           <a:p>
             <a:fld id="{760FBDFE-C587-4B4C-A407-44438C67B59E}" type="datetimeFigureOut">
               <a:rPr lang="zh-CN" altLang="en-US" smtClean="0"/>
+              <a:t>2026/7/16</a:t>
             </a:fld>
             <a:endParaRPr lang="zh-CN" altLang="en-US"/>
           </a:p>
@@ -7499,6 +7386,7 @@
           <a:p>
             <a:fld id="{49AE70B2-8BF9-45C0-BB95-33D1B9D3A854}" type="slidenum">
               <a:rPr lang="zh-CN" altLang="en-US" smtClean="0"/>
+              <a:t>‹#›</a:t>
             </a:fld>
             <a:endParaRPr lang="zh-CN" altLang="en-US"/>
           </a:p>
@@ -7566,7 +7454,6 @@
               <a:rPr lang="zh-CN" altLang="en-US" dirty="0"/>
               <a:t>单击此处编辑母版标题样式</a:t>
             </a:r>
-            <a:endParaRPr lang="zh-CN" altLang="en-US" dirty="0"/>
           </a:p>
         </p:txBody>
       </p:sp>
@@ -7600,7 +7487,6 @@
               <a:rPr lang="zh-CN" altLang="en-US" dirty="0"/>
               <a:t>单击此处编辑母版文本样式</a:t>
             </a:r>
-            <a:endParaRPr lang="zh-CN" altLang="en-US" dirty="0"/>
           </a:p>
           <a:p>
             <a:pPr lvl="1"/>
@@ -7608,7 +7494,6 @@
               <a:rPr lang="zh-CN" altLang="en-US" dirty="0"/>
               <a:t>第二级</a:t>
             </a:r>
-            <a:endParaRPr lang="zh-CN" altLang="en-US" dirty="0"/>
           </a:p>
           <a:p>
             <a:pPr lvl="2"/>
@@ -7616,7 +7501,6 @@
               <a:rPr lang="zh-CN" altLang="en-US" dirty="0"/>
               <a:t>第三级</a:t>
             </a:r>
-            <a:endParaRPr lang="zh-CN" altLang="en-US" dirty="0"/>
           </a:p>
           <a:p>
             <a:pPr lvl="3"/>
@@ -7624,7 +7508,6 @@
               <a:rPr lang="zh-CN" altLang="en-US" dirty="0"/>
               <a:t>第四级</a:t>
             </a:r>
-            <a:endParaRPr lang="zh-CN" altLang="en-US" dirty="0"/>
           </a:p>
           <a:p>
             <a:pPr lvl="4"/>
@@ -7632,7 +7515,6 @@
               <a:rPr lang="zh-CN" altLang="en-US" dirty="0"/>
               <a:t>第五级</a:t>
             </a:r>
-            <a:endParaRPr lang="zh-CN" altLang="en-US" dirty="0"/>
           </a:p>
         </p:txBody>
       </p:sp>
@@ -7673,6 +7555,7 @@
           <a:p>
             <a:fld id="{760FBDFE-C587-4B4C-A407-44438C67B59E}" type="datetimeFigureOut">
               <a:rPr lang="zh-CN" altLang="en-US" smtClean="0"/>
+              <a:t>2026/7/16</a:t>
             </a:fld>
             <a:endParaRPr lang="zh-CN" altLang="en-US"/>
           </a:p>
@@ -7754,6 +7637,7 @@
           <a:p>
             <a:fld id="{49AE70B2-8BF9-45C0-BB95-33D1B9D3A854}" type="slidenum">
               <a:rPr lang="zh-CN" altLang="en-US" smtClean="0"/>
+              <a:t>‹#›</a:t>
             </a:fld>
             <a:endParaRPr lang="zh-CN" altLang="en-US"/>
           </a:p>
@@ -9206,7 +9090,6 @@
               <a:rPr lang="en-US" altLang="zh-CN" sz="1600" b="1" dirty="0"/>
               <a:t>Segmentation</a:t>
             </a:r>
-            <a:endParaRPr lang="en-US" altLang="zh-CN" sz="1600" b="1" dirty="0"/>
           </a:p>
         </p:txBody>
       </p:sp>
@@ -9237,7 +9120,6 @@
               <a:rPr lang="en-US" altLang="zh-CN" sz="1600" b="1" dirty="0"/>
               <a:t>Classification</a:t>
             </a:r>
-            <a:endParaRPr lang="en-US" altLang="zh-CN" sz="1600" b="1" dirty="0"/>
           </a:p>
         </p:txBody>
       </p:sp>
@@ -9267,7 +9149,6 @@
               <a:rPr lang="en-US" altLang="zh-CN" sz="1600" b="1" dirty="0"/>
               <a:t>Reporting </a:t>
             </a:r>
-            <a:endParaRPr lang="en-US" altLang="zh-CN" sz="1600" b="1" dirty="0"/>
           </a:p>
         </p:txBody>
       </p:sp>
@@ -9298,7 +9179,6 @@
               <a:rPr lang="en-US" altLang="zh-CN" sz="1600" b="1" dirty="0"/>
               <a:t>Opportunistic</a:t>
             </a:r>
-            <a:endParaRPr lang="en-US" altLang="zh-CN" sz="1600" b="1" dirty="0"/>
           </a:p>
           <a:p>
             <a:pPr algn="r"/>
@@ -9306,7 +9186,6 @@
               <a:rPr lang="en-US" altLang="zh-CN" sz="1600" b="1" dirty="0"/>
               <a:t>screening</a:t>
             </a:r>
-            <a:endParaRPr lang="en-US" altLang="zh-CN" sz="1600" b="1" dirty="0"/>
           </a:p>
         </p:txBody>
       </p:sp>
@@ -9400,11 +9279,6 @@
                 </a:rPr>
                 <a:t>OpenThyroidDB</a:t>
               </a:r>
-              <a:endParaRPr lang="en-US" altLang="zh-CN" sz="2400" b="1" dirty="0">
-                <a:solidFill>
-                  <a:schemeClr val="bg1"/>
-                </a:solidFill>
-              </a:endParaRPr>
             </a:p>
           </p:txBody>
         </p:sp>
@@ -9439,11 +9313,6 @@
                 </a:rPr>
                 <a:t>A multitask thyroid ultrasound database</a:t>
               </a:r>
-              <a:endParaRPr lang="en-US" altLang="zh-CN" sz="1100" dirty="0">
-                <a:solidFill>
-                  <a:schemeClr val="bg1"/>
-                </a:solidFill>
-              </a:endParaRPr>
             </a:p>
           </p:txBody>
         </p:sp>
@@ -9491,7 +9360,7 @@
             <p:nvPr/>
           </p:nvPicPr>
           <p:blipFill>
-            <a:blip r:embed="rId3">
+            <a:blip>
               <a:extLst>
                 <a:ext uri="{96DAC541-7B7A-43D3-8B79-37D633B846F1}">
                   <asvg:svgBlip xmlns:asvg="http://schemas.microsoft.com/office/drawing/2016/SVG/main" r:embed="rId4"/>
@@ -9557,11 +9426,6 @@
                   </a:rPr>
                   <a:t>Scanner Diversity</a:t>
                 </a:r>
-                <a:endParaRPr lang="en-US" altLang="zh-CN" sz="1200" dirty="0">
-                  <a:solidFill>
-                    <a:srgbClr val="B0ECF4"/>
-                  </a:solidFill>
-                </a:endParaRPr>
               </a:p>
             </p:txBody>
           </p:sp>
@@ -9574,10 +9438,10 @@
               <p:nvPr/>
             </p:nvPicPr>
             <p:blipFill>
-              <a:blip r:embed="rId5">
+              <a:blip>
                 <a:extLst>
                   <a:ext uri="{96DAC541-7B7A-43D3-8B79-37D633B846F1}">
-                    <asvg:svgBlip xmlns:asvg="http://schemas.microsoft.com/office/drawing/2016/SVG/main" r:embed="rId6"/>
+                    <asvg:svgBlip xmlns:asvg="http://schemas.microsoft.com/office/drawing/2016/SVG/main" r:embed="rId5"/>
                   </a:ext>
                 </a:extLst>
               </a:blip>
@@ -9643,11 +9507,6 @@
                 </a:rPr>
                 <a:t> E9 · GE S7 · ARIETTA 850 RESONA 70B · </a:t>
               </a:r>
-              <a:endParaRPr lang="en-US" altLang="zh-CN" sz="900" dirty="0">
-                <a:solidFill>
-                  <a:schemeClr val="bg1"/>
-                </a:solidFill>
-              </a:endParaRPr>
             </a:p>
             <a:p>
               <a:pPr algn="l"/>
@@ -9675,11 +9534,6 @@
                 </a:rPr>
                 <a:t> 30/MX · Hitachi Aloka Arietta V70 · </a:t>
               </a:r>
-              <a:endParaRPr lang="en-US" altLang="zh-CN" sz="900" dirty="0">
-                <a:solidFill>
-                  <a:schemeClr val="bg1"/>
-                </a:solidFill>
-              </a:endParaRPr>
             </a:p>
             <a:p>
               <a:pPr algn="l"/>
@@ -9715,11 +9569,6 @@
                 </a:rPr>
                 <a:t> · Samsung Medison RS80 · </a:t>
               </a:r>
-              <a:endParaRPr lang="en-US" altLang="zh-CN" sz="900" dirty="0">
-                <a:solidFill>
-                  <a:schemeClr val="bg1"/>
-                </a:solidFill>
-              </a:endParaRPr>
             </a:p>
             <a:p>
               <a:pPr algn="l"/>
@@ -9755,11 +9604,6 @@
                 </a:rPr>
                 <a:t> Ultimate …</a:t>
               </a:r>
-              <a:endParaRPr lang="en-US" altLang="zh-CN" sz="900" dirty="0">
-                <a:solidFill>
-                  <a:schemeClr val="bg1"/>
-                </a:solidFill>
-              </a:endParaRPr>
             </a:p>
           </p:txBody>
         </p:sp>
@@ -9790,7 +9634,6 @@
               <a:rPr lang="en-US" altLang="zh-CN" sz="1400" dirty="0"/>
               <a:t>Report generation</a:t>
             </a:r>
-            <a:endParaRPr lang="en-US" altLang="zh-CN" sz="1400" dirty="0"/>
           </a:p>
         </p:txBody>
       </p:sp>
@@ -10024,7 +9867,6 @@
               <a:rPr lang="en-US" altLang="zh-CN" sz="1400" dirty="0"/>
               <a:t>Segmentation</a:t>
             </a:r>
-            <a:endParaRPr lang="en-US" altLang="zh-CN" sz="1400" dirty="0"/>
           </a:p>
         </p:txBody>
       </p:sp>
@@ -10054,7 +9896,6 @@
               <a:rPr lang="en-US" altLang="zh-CN" sz="900"/>
               <a:t>Pixel-level delineation of thyroid nodules</a:t>
             </a:r>
-            <a:endParaRPr lang="en-US" altLang="zh-CN" sz="900"/>
           </a:p>
         </p:txBody>
       </p:sp>
@@ -10084,7 +9925,6 @@
               <a:rPr lang="en-US" altLang="zh-CN" sz="1400"/>
               <a:t>Classification</a:t>
             </a:r>
-            <a:endParaRPr lang="en-US" altLang="zh-CN" sz="1400"/>
           </a:p>
         </p:txBody>
       </p:sp>
@@ -10114,7 +9954,6 @@
               <a:rPr lang="en-US" altLang="zh-CN" sz="900"/>
               <a:t>Benign / malignant thyroid nodule classification</a:t>
             </a:r>
-            <a:endParaRPr lang="en-US" altLang="zh-CN" sz="900"/>
           </a:p>
         </p:txBody>
       </p:sp>
@@ -10130,7 +9969,7 @@
         </p:xfrm>
         <a:graphic>
           <a:graphicData uri="http://schemas.openxmlformats.org/drawingml/2006/chart">
-            <c:chart xmlns:c="http://schemas.openxmlformats.org/drawingml/2006/chart" xmlns:r="http://schemas.openxmlformats.org/officeDocument/2006/relationships" r:id="rId1"/>
+            <c:chart xmlns:c="http://schemas.openxmlformats.org/drawingml/2006/chart" xmlns:r="http://schemas.openxmlformats.org/officeDocument/2006/relationships" r:id="rId6"/>
           </a:graphicData>
         </a:graphic>
       </p:graphicFrame>
@@ -10165,11 +10004,6 @@
               </a:rPr>
               <a:t>AHU</a:t>
             </a:r>
-            <a:endParaRPr lang="en-US" altLang="zh-CN" sz="800" dirty="0">
-              <a:solidFill>
-                <a:schemeClr val="bg1"/>
-              </a:solidFill>
-            </a:endParaRPr>
           </a:p>
           <a:p>
             <a:pPr algn="ctr"/>
@@ -10181,11 +10015,6 @@
               </a:rPr>
               <a:t>125,896</a:t>
             </a:r>
-            <a:endParaRPr lang="en-US" altLang="zh-CN" sz="800" dirty="0">
-              <a:solidFill>
-                <a:schemeClr val="bg1"/>
-              </a:solidFill>
-            </a:endParaRPr>
           </a:p>
         </p:txBody>
       </p:sp>
@@ -10220,11 +10049,6 @@
               </a:rPr>
               <a:t>ThyroidXL</a:t>
             </a:r>
-            <a:endParaRPr lang="en-US" altLang="zh-CN" sz="800">
-              <a:solidFill>
-                <a:schemeClr val="bg1"/>
-              </a:solidFill>
-            </a:endParaRPr>
           </a:p>
           <a:p>
             <a:pPr algn="ctr"/>
@@ -10236,11 +10060,6 @@
               </a:rPr>
               <a:t>11,635</a:t>
             </a:r>
-            <a:endParaRPr lang="en-US" altLang="zh-CN" sz="800">
-              <a:solidFill>
-                <a:schemeClr val="bg1"/>
-              </a:solidFill>
-            </a:endParaRPr>
           </a:p>
         </p:txBody>
       </p:sp>
@@ -10275,11 +10094,6 @@
               </a:rPr>
               <a:t>ThyUS2Path</a:t>
             </a:r>
-            <a:endParaRPr lang="en-US" altLang="zh-CN" sz="600">
-              <a:solidFill>
-                <a:schemeClr val="bg1"/>
-              </a:solidFill>
-            </a:endParaRPr>
           </a:p>
           <a:p>
             <a:pPr algn="ctr"/>
@@ -10291,11 +10105,6 @@
               </a:rPr>
               <a:t>8,508</a:t>
             </a:r>
-            <a:endParaRPr lang="en-US" altLang="zh-CN" sz="800">
-              <a:solidFill>
-                <a:schemeClr val="bg1"/>
-              </a:solidFill>
-            </a:endParaRPr>
           </a:p>
         </p:txBody>
       </p:sp>
@@ -10330,11 +10139,6 @@
               </a:rPr>
               <a:t>TN5K</a:t>
             </a:r>
-            <a:endParaRPr lang="en-US" altLang="zh-CN" sz="800">
-              <a:solidFill>
-                <a:schemeClr val="bg1"/>
-              </a:solidFill>
-            </a:endParaRPr>
           </a:p>
           <a:p>
             <a:pPr algn="ctr"/>
@@ -10346,11 +10150,6 @@
               </a:rPr>
               <a:t>5,000</a:t>
             </a:r>
-            <a:endParaRPr lang="en-US" altLang="zh-CN" sz="800">
-              <a:solidFill>
-                <a:schemeClr val="bg1"/>
-              </a:solidFill>
-            </a:endParaRPr>
           </a:p>
         </p:txBody>
       </p:sp>
@@ -10385,11 +10184,6 @@
               </a:rPr>
               <a:t>TN3K</a:t>
             </a:r>
-            <a:endParaRPr lang="en-US" altLang="zh-CN" sz="800" dirty="0">
-              <a:solidFill>
-                <a:schemeClr val="bg1"/>
-              </a:solidFill>
-            </a:endParaRPr>
           </a:p>
           <a:p>
             <a:pPr algn="ctr"/>
@@ -10401,11 +10195,6 @@
               </a:rPr>
               <a:t>3,493</a:t>
             </a:r>
-            <a:endParaRPr lang="en-US" altLang="zh-CN" sz="800" dirty="0">
-              <a:solidFill>
-                <a:schemeClr val="bg1"/>
-              </a:solidFill>
-            </a:endParaRPr>
           </a:p>
         </p:txBody>
       </p:sp>
@@ -10440,11 +10229,6 @@
               </a:rPr>
               <a:t>DDTI</a:t>
             </a:r>
-            <a:endParaRPr lang="en-US" altLang="zh-CN" sz="800">
-              <a:solidFill>
-                <a:schemeClr val="bg1"/>
-              </a:solidFill>
-            </a:endParaRPr>
           </a:p>
           <a:p>
             <a:pPr algn="ctr"/>
@@ -10456,11 +10240,6 @@
               </a:rPr>
               <a:t>349</a:t>
             </a:r>
-            <a:endParaRPr lang="en-US" altLang="zh-CN" sz="800">
-              <a:solidFill>
-                <a:schemeClr val="bg1"/>
-              </a:solidFill>
-            </a:endParaRPr>
           </a:p>
         </p:txBody>
       </p:sp>
@@ -10491,7 +10270,6 @@
               <a:rPr lang="en-US" altLang="zh-CN" sz="700" dirty="0"/>
               <a:t>Public</a:t>
             </a:r>
-            <a:endParaRPr lang="en-US" altLang="zh-CN" sz="700" dirty="0"/>
           </a:p>
           <a:p>
             <a:pPr algn="ctr"/>
@@ -10499,7 +10277,6 @@
               <a:rPr lang="en-US" altLang="zh-CN" sz="700" dirty="0"/>
               <a:t>datasets</a:t>
             </a:r>
-            <a:endParaRPr lang="en-US" altLang="zh-CN" sz="700" dirty="0"/>
           </a:p>
         </p:txBody>
       </p:sp>
@@ -10529,7 +10306,6 @@
               <a:rPr lang="en-US" altLang="zh-CN" sz="900" dirty="0"/>
               <a:t>Images-report pairs for standardized reporting</a:t>
             </a:r>
-            <a:endParaRPr lang="en-US" altLang="zh-CN" sz="900" dirty="0"/>
           </a:p>
         </p:txBody>
       </p:sp>
@@ -10750,10 +10526,6 @@
                   </a:rPr>
                   <a:t>353 reports,</a:t>
                 </a:r>
-                <a:endParaRPr lang="en-US" altLang="zh-CN" sz="900" dirty="0">
-                  <a:latin typeface="Arial" panose="020B0604020202020204" pitchFamily="34" charset="0"/>
-                  <a:cs typeface="Arial" panose="020B0604020202020204" pitchFamily="34" charset="0"/>
-                </a:endParaRPr>
               </a:p>
               <a:p>
                 <a:pPr algn="ctr">
@@ -10768,10 +10540,6 @@
                   </a:rPr>
                   <a:t>4,471 images</a:t>
                 </a:r>
-                <a:endParaRPr lang="en-US" altLang="zh-CN" sz="900" dirty="0">
-                  <a:latin typeface="Arial" panose="020B0604020202020204" pitchFamily="34" charset="0"/>
-                  <a:cs typeface="Arial" panose="020B0604020202020204" pitchFamily="34" charset="0"/>
-                </a:endParaRPr>
               </a:p>
             </p:txBody>
           </p:sp>
@@ -10813,13 +10581,6 @@
                 </a:rPr>
                 <a:t>ZJH-TS</a:t>
               </a:r>
-              <a:endParaRPr lang="en-US" altLang="zh-CN" sz="1000" b="1" dirty="0">
-                <a:solidFill>
-                  <a:schemeClr val="bg1"/>
-                </a:solidFill>
-                <a:latin typeface="Arial" panose="020B0604020202020204" pitchFamily="34" charset="0"/>
-                <a:cs typeface="Arial" panose="020B0604020202020204" pitchFamily="34" charset="0"/>
-              </a:endParaRPr>
             </a:p>
           </p:txBody>
         </p:sp>
@@ -10831,7 +10592,7 @@
           <p:nvPr/>
         </p:nvGrpSpPr>
         <p:grpSpPr>
-          <a:xfrm rot="0">
+          <a:xfrm>
             <a:off x="4763135" y="5330190"/>
             <a:ext cx="2426970" cy="276225"/>
             <a:chOff x="7804" y="13506"/>
@@ -11027,10 +10788,6 @@
                 </a:rPr>
                 <a:t>23,955 reports,</a:t>
               </a:r>
-              <a:endParaRPr lang="en-US" altLang="zh-CN" sz="900" dirty="0">
-                <a:latin typeface="Arial" panose="020B0604020202020204" pitchFamily="34" charset="0"/>
-                <a:cs typeface="Arial" panose="020B0604020202020204" pitchFamily="34" charset="0"/>
-              </a:endParaRPr>
             </a:p>
             <a:p>
               <a:pPr algn="ctr">
@@ -11045,10 +10802,6 @@
                 </a:rPr>
                 <a:t>248,194 images</a:t>
               </a:r>
-              <a:endParaRPr lang="en-US" altLang="zh-CN" sz="900" dirty="0">
-                <a:latin typeface="Arial" panose="020B0604020202020204" pitchFamily="34" charset="0"/>
-                <a:cs typeface="Arial" panose="020B0604020202020204" pitchFamily="34" charset="0"/>
-              </a:endParaRPr>
             </a:p>
           </p:txBody>
         </p:sp>
@@ -11079,7 +10832,6 @@
               <a:rPr lang="en-US" altLang="zh-CN" sz="1400" dirty="0"/>
               <a:t>Opportunistic diagnosis</a:t>
             </a:r>
-            <a:endParaRPr lang="en-US" altLang="zh-CN" sz="1400" dirty="0"/>
           </a:p>
         </p:txBody>
       </p:sp>
@@ -11109,7 +10861,6 @@
               <a:rPr lang="en-US" altLang="zh-CN" sz="900"/>
               <a:t>LNM prediction and FTC/PTC subtype classification</a:t>
             </a:r>
-            <a:endParaRPr lang="en-US" altLang="zh-CN" sz="900"/>
           </a:p>
         </p:txBody>
       </p:sp>
@@ -11330,10 +11081,6 @@
                   </a:rPr>
                   <a:t>Public dataset</a:t>
                 </a:r>
-                <a:endParaRPr lang="en-US" altLang="zh-CN" sz="800" dirty="0">
-                  <a:latin typeface="Arial" panose="020B0604020202020204" pitchFamily="34" charset="0"/>
-                  <a:cs typeface="Arial" panose="020B0604020202020204" pitchFamily="34" charset="0"/>
-                </a:endParaRPr>
               </a:p>
               <a:p>
                 <a:pPr algn="ctr">
@@ -11348,10 +11095,6 @@
                   </a:rPr>
                   <a:t>200 images</a:t>
                 </a:r>
-                <a:endParaRPr lang="en-US" altLang="zh-CN" sz="800" dirty="0">
-                  <a:latin typeface="Arial" panose="020B0604020202020204" pitchFamily="34" charset="0"/>
-                  <a:cs typeface="Arial" panose="020B0604020202020204" pitchFamily="34" charset="0"/>
-                </a:endParaRPr>
               </a:p>
             </p:txBody>
           </p:sp>
@@ -11392,13 +11135,6 @@
                   </a:rPr>
                   <a:t>FTC / PTC</a:t>
                 </a:r>
-                <a:endParaRPr lang="en-US" altLang="zh-CN" sz="1000" b="1">
-                  <a:solidFill>
-                    <a:schemeClr val="bg1"/>
-                  </a:solidFill>
-                  <a:latin typeface="Arial" panose="020B0604020202020204" pitchFamily="34" charset="0"/>
-                  <a:cs typeface="Arial" panose="020B0604020202020204" pitchFamily="34" charset="0"/>
-                </a:endParaRPr>
               </a:p>
             </p:txBody>
           </p:sp>
@@ -11643,10 +11379,6 @@
               </a:rPr>
               <a:t>Ours</a:t>
             </a:r>
-            <a:endParaRPr lang="en-US" altLang="zh-CN" sz="800" dirty="0">
-              <a:latin typeface="Arial" panose="020B0604020202020204" pitchFamily="34" charset="0"/>
-              <a:cs typeface="Arial" panose="020B0604020202020204" pitchFamily="34" charset="0"/>
-            </a:endParaRPr>
           </a:p>
           <a:p>
             <a:pPr algn="ctr">
@@ -11661,10 +11393,6 @@
               </a:rPr>
               <a:t>496 images</a:t>
             </a:r>
-            <a:endParaRPr lang="en-US" altLang="zh-CN" sz="800" dirty="0">
-              <a:latin typeface="Arial" panose="020B0604020202020204" pitchFamily="34" charset="0"/>
-              <a:cs typeface="Arial" panose="020B0604020202020204" pitchFamily="34" charset="0"/>
-            </a:endParaRPr>
           </a:p>
         </p:txBody>
       </p:sp>
@@ -11705,13 +11433,6 @@
               </a:rPr>
               <a:t>LNM</a:t>
             </a:r>
-            <a:endParaRPr lang="en-US" altLang="zh-CN" sz="1000" b="1" dirty="0">
-              <a:solidFill>
-                <a:schemeClr val="bg1"/>
-              </a:solidFill>
-              <a:latin typeface="Arial" panose="020B0604020202020204" pitchFamily="34" charset="0"/>
-              <a:cs typeface="Arial" panose="020B0604020202020204" pitchFamily="34" charset="0"/>
-            </a:endParaRPr>
           </a:p>
         </p:txBody>
       </p:sp>
@@ -11756,10 +11477,6 @@
               </a:rPr>
               <a:t>,</a:t>
             </a:r>
-            <a:endParaRPr lang="en-US" altLang="zh-CN" sz="800" dirty="0">
-              <a:latin typeface="Arial" panose="020B0604020202020204" pitchFamily="34" charset="0"/>
-              <a:cs typeface="Arial" panose="020B0604020202020204" pitchFamily="34" charset="0"/>
-            </a:endParaRPr>
           </a:p>
           <a:p>
             <a:pPr algn="ctr">
@@ -11774,10 +11491,6 @@
               </a:rPr>
               <a:t>338 images</a:t>
             </a:r>
-            <a:endParaRPr lang="en-US" altLang="zh-CN" sz="800" dirty="0">
-              <a:latin typeface="Arial" panose="020B0604020202020204" pitchFamily="34" charset="0"/>
-              <a:cs typeface="Arial" panose="020B0604020202020204" pitchFamily="34" charset="0"/>
-            </a:endParaRPr>
           </a:p>
         </p:txBody>
       </p:sp>
@@ -11793,7 +11506,7 @@
         </p:xfrm>
         <a:graphic>
           <a:graphicData uri="http://schemas.openxmlformats.org/drawingml/2006/chart">
-            <c:chart xmlns:c="http://schemas.openxmlformats.org/drawingml/2006/chart" xmlns:r="http://schemas.openxmlformats.org/officeDocument/2006/relationships" r:id="rId2"/>
+            <c:chart xmlns:c="http://schemas.openxmlformats.org/drawingml/2006/chart" xmlns:r="http://schemas.openxmlformats.org/officeDocument/2006/relationships" r:id="rId7"/>
           </a:graphicData>
         </a:graphic>
       </p:graphicFrame>
@@ -11828,11 +11541,6 @@
               </a:rPr>
               <a:t>Cline-clip</a:t>
             </a:r>
-            <a:endParaRPr lang="en-US" altLang="zh-CN" sz="800" dirty="0">
-              <a:solidFill>
-                <a:schemeClr val="bg1"/>
-              </a:solidFill>
-            </a:endParaRPr>
           </a:p>
           <a:p>
             <a:pPr algn="ctr"/>
@@ -11844,11 +11552,6 @@
               </a:rPr>
               <a:t>17,417</a:t>
             </a:r>
-            <a:endParaRPr lang="en-US" altLang="zh-CN" sz="800" dirty="0">
-              <a:solidFill>
-                <a:schemeClr val="bg1"/>
-              </a:solidFill>
-            </a:endParaRPr>
           </a:p>
         </p:txBody>
       </p:sp>
@@ -11899,11 +11602,6 @@
               </a:rPr>
               <a:t>15,186</a:t>
             </a:r>
-            <a:endParaRPr lang="en-US" altLang="zh-CN" sz="800" dirty="0">
-              <a:solidFill>
-                <a:schemeClr val="bg1"/>
-              </a:solidFill>
-            </a:endParaRPr>
           </a:p>
         </p:txBody>
       </p:sp>
@@ -11954,11 +11652,6 @@
               </a:rPr>
               <a:t>11,635</a:t>
             </a:r>
-            <a:endParaRPr lang="en-US" altLang="zh-CN" sz="800" dirty="0">
-              <a:solidFill>
-                <a:schemeClr val="bg1"/>
-              </a:solidFill>
-            </a:endParaRPr>
           </a:p>
         </p:txBody>
       </p:sp>
@@ -11993,11 +11686,6 @@
               </a:rPr>
               <a:t>TN3K</a:t>
             </a:r>
-            <a:endParaRPr lang="en-US" altLang="zh-CN" sz="800">
-              <a:solidFill>
-                <a:schemeClr val="bg1"/>
-              </a:solidFill>
-            </a:endParaRPr>
           </a:p>
           <a:p>
             <a:pPr algn="ctr"/>
@@ -12009,11 +11697,6 @@
               </a:rPr>
               <a:t>3,493</a:t>
             </a:r>
-            <a:endParaRPr lang="en-US" altLang="zh-CN" sz="800">
-              <a:solidFill>
-                <a:schemeClr val="bg1"/>
-              </a:solidFill>
-            </a:endParaRPr>
           </a:p>
         </p:txBody>
       </p:sp>
@@ -12072,11 +11755,6 @@
               </a:rPr>
               <a:t>7,288</a:t>
             </a:r>
-            <a:endParaRPr lang="en-US" altLang="zh-CN" sz="800" dirty="0">
-              <a:solidFill>
-                <a:schemeClr val="bg1"/>
-              </a:solidFill>
-            </a:endParaRPr>
           </a:p>
         </p:txBody>
       </p:sp>
@@ -12111,11 +11789,6 @@
               </a:rPr>
               <a:t>PKTN</a:t>
             </a:r>
-            <a:endParaRPr lang="en-US" altLang="zh-CN" sz="800">
-              <a:solidFill>
-                <a:schemeClr val="bg1"/>
-              </a:solidFill>
-            </a:endParaRPr>
           </a:p>
           <a:p>
             <a:pPr algn="ctr"/>
@@ -12127,11 +11800,6 @@
               </a:rPr>
               <a:t>1,005</a:t>
             </a:r>
-            <a:endParaRPr lang="en-US" altLang="zh-CN" sz="800">
-              <a:solidFill>
-                <a:schemeClr val="bg1"/>
-              </a:solidFill>
-            </a:endParaRPr>
           </a:p>
         </p:txBody>
       </p:sp>
@@ -12166,11 +11834,6 @@
               </a:rPr>
               <a:t>DDTI</a:t>
             </a:r>
-            <a:endParaRPr lang="en-US" altLang="zh-CN" sz="800" dirty="0">
-              <a:solidFill>
-                <a:schemeClr val="bg1"/>
-              </a:solidFill>
-            </a:endParaRPr>
           </a:p>
           <a:p>
             <a:pPr algn="ctr"/>
@@ -12182,11 +11845,6 @@
               </a:rPr>
               <a:t>637</a:t>
             </a:r>
-            <a:endParaRPr lang="en-US" altLang="zh-CN" sz="800" dirty="0">
-              <a:solidFill>
-                <a:schemeClr val="bg1"/>
-              </a:solidFill>
-            </a:endParaRPr>
           </a:p>
         </p:txBody>
       </p:sp>
@@ -12222,7 +11880,6 @@
               <a:rPr lang="en-US" altLang="zh-CN" sz="1200" dirty="0"/>
               <a:t>Agentic nodule mask generation</a:t>
             </a:r>
-            <a:endParaRPr lang="en-US" altLang="zh-CN" sz="1200" dirty="0"/>
           </a:p>
           <a:p>
             <a:pPr indent="0">
@@ -12236,7 +11893,6 @@
               <a:rPr lang="en-US" altLang="zh-CN" sz="1200" dirty="0"/>
               <a:t>Clinician-auditable refinement</a:t>
             </a:r>
-            <a:endParaRPr lang="en-US" altLang="zh-CN" sz="1200" dirty="0"/>
           </a:p>
           <a:p>
             <a:pPr indent="0">
@@ -12250,7 +11906,6 @@
               <a:rPr lang="en-US" altLang="zh-CN" sz="1200" dirty="0"/>
               <a:t>Traceable tool calls</a:t>
             </a:r>
-            <a:endParaRPr lang="en-US" altLang="zh-CN" sz="1200" dirty="0"/>
           </a:p>
         </p:txBody>
       </p:sp>
@@ -12287,7 +11942,6 @@
               <a:rPr lang="en-US" altLang="zh-CN" sz="1200" dirty="0"/>
               <a:t>Auditable malignancy assessment</a:t>
             </a:r>
-            <a:endParaRPr lang="en-US" altLang="zh-CN" sz="1200" dirty="0"/>
           </a:p>
           <a:p>
             <a:pPr algn="r">
@@ -12302,7 +11956,6 @@
               <a:rPr lang="en-US" altLang="zh-CN" sz="1200" dirty="0"/>
               <a:t>Radiomic feature analysis</a:t>
             </a:r>
-            <a:endParaRPr lang="en-US" altLang="zh-CN" sz="1200" dirty="0"/>
           </a:p>
           <a:p>
             <a:pPr algn="r">
@@ -12317,7 +11970,6 @@
               <a:rPr lang="en-US" altLang="zh-CN" sz="1200" dirty="0"/>
               <a:t>SHAP-based explanation</a:t>
             </a:r>
-            <a:endParaRPr lang="en-US" altLang="zh-CN" sz="1200" dirty="0"/>
           </a:p>
         </p:txBody>
       </p:sp>
@@ -12351,7 +12003,6 @@
               <a:rPr lang="en-US" altLang="zh-CN" sz="1200" dirty="0"/>
               <a:t>Ultrasound-based report drafting</a:t>
             </a:r>
-            <a:endParaRPr lang="en-US" altLang="zh-CN" sz="1200" dirty="0"/>
           </a:p>
           <a:p>
             <a:pPr>
@@ -12363,7 +12014,6 @@
               <a:rPr lang="en-US" altLang="zh-CN" sz="1200" dirty="0"/>
               <a:t>Image and video interpretation</a:t>
             </a:r>
-            <a:endParaRPr lang="en-US" altLang="zh-CN" sz="1200" dirty="0"/>
           </a:p>
         </p:txBody>
       </p:sp>
@@ -12396,10 +12046,6 @@
               </a:rPr>
               <a:t>a</a:t>
             </a:r>
-            <a:endParaRPr lang="en-US" altLang="zh-CN" sz="2400" b="1">
-              <a:latin typeface="Arial" panose="020B0604020202020204" pitchFamily="34" charset="0"/>
-              <a:cs typeface="Arial" panose="020B0604020202020204" pitchFamily="34" charset="0"/>
-            </a:endParaRPr>
           </a:p>
         </p:txBody>
       </p:sp>
@@ -12432,10 +12078,6 @@
               </a:rPr>
               <a:t>b</a:t>
             </a:r>
-            <a:endParaRPr lang="en-US" altLang="zh-CN" sz="2400" b="1" dirty="0">
-              <a:latin typeface="Arial" panose="020B0604020202020204" pitchFamily="34" charset="0"/>
-              <a:cs typeface="Arial" panose="020B0604020202020204" pitchFamily="34" charset="0"/>
-            </a:endParaRPr>
           </a:p>
         </p:txBody>
       </p:sp>
@@ -12468,10 +12110,6 @@
               </a:rPr>
               <a:t>c</a:t>
             </a:r>
-            <a:endParaRPr lang="en-US" altLang="zh-CN" sz="2400" b="1" dirty="0">
-              <a:latin typeface="Arial" panose="020B0604020202020204" pitchFamily="34" charset="0"/>
-              <a:cs typeface="Arial" panose="020B0604020202020204" pitchFamily="34" charset="0"/>
-            </a:endParaRPr>
           </a:p>
         </p:txBody>
       </p:sp>
@@ -12553,7 +12191,7 @@
             <p:nvPr/>
           </p:nvPicPr>
           <p:blipFill>
-            <a:blip r:embed="rId7">
+            <a:blip>
               <a:extLst>
                 <a:ext uri="{96DAC541-7B7A-43D3-8B79-37D633B846F1}">
                   <asvg:svgBlip xmlns:asvg="http://schemas.microsoft.com/office/drawing/2016/SVG/main" r:embed="rId8"/>
@@ -12605,11 +12243,6 @@
                 </a:rPr>
                 <a:t>ThyroidXAgent</a:t>
               </a:r>
-              <a:endParaRPr lang="en-US" altLang="zh-CN" sz="1400" b="1" dirty="0">
-                <a:solidFill>
-                  <a:schemeClr val="bg1"/>
-                </a:solidFill>
-              </a:endParaRPr>
             </a:p>
           </p:txBody>
         </p:sp>
@@ -12622,15 +12255,15 @@
           </p:cNvPicPr>
           <p:nvPr>
             <p:custDataLst>
-              <p:tags r:id="rId9"/>
+              <p:tags r:id="rId1"/>
             </p:custDataLst>
           </p:nvPr>
         </p:nvPicPr>
         <p:blipFill>
-          <a:blip r:embed="rId10">
+          <a:blip>
             <a:extLst>
               <a:ext uri="{96DAC541-7B7A-43D3-8B79-37D633B846F1}">
-                <asvg:svgBlip xmlns:asvg="http://schemas.microsoft.com/office/drawing/2016/SVG/main" r:embed="rId11"/>
+                <asvg:svgBlip xmlns:asvg="http://schemas.microsoft.com/office/drawing/2016/SVG/main" r:embed="rId9"/>
               </a:ext>
             </a:extLst>
           </a:blip>
@@ -13075,10 +12708,10 @@
                 <p:nvPr/>
               </p:nvPicPr>
               <p:blipFill>
-                <a:blip r:embed="rId12">
+                <a:blip>
                   <a:extLst>
                     <a:ext uri="{96DAC541-7B7A-43D3-8B79-37D633B846F1}">
-                      <asvg:svgBlip xmlns:asvg="http://schemas.microsoft.com/office/drawing/2016/SVG/main" r:embed="rId13"/>
+                      <asvg:svgBlip xmlns:asvg="http://schemas.microsoft.com/office/drawing/2016/SVG/main" r:embed="rId10"/>
                     </a:ext>
                   </a:extLst>
                 </a:blip>
@@ -13124,7 +12757,6 @@
                   <a:rPr lang="en-US" altLang="zh-CN" sz="800" dirty="0"/>
                   <a:t>Review and correction</a:t>
                 </a:r>
-                <a:endParaRPr lang="en-US" altLang="zh-CN" sz="800" dirty="0"/>
               </a:p>
             </p:txBody>
           </p:sp>
@@ -13156,7 +12788,6 @@
                 <a:rPr lang="en-US" altLang="zh-CN" sz="1200" dirty="0"/>
                 <a:t>Expert refinement</a:t>
               </a:r>
-              <a:endParaRPr lang="en-US" altLang="zh-CN" sz="1200" dirty="0"/>
             </a:p>
           </p:txBody>
         </p:sp>
@@ -13202,7 +12833,6 @@
                 <a:rPr lang="en-US" altLang="zh-CN" sz="1200" dirty="0"/>
                 <a:t>Refined outputs</a:t>
               </a:r>
-              <a:endParaRPr lang="en-US" altLang="zh-CN" sz="1200" dirty="0"/>
             </a:p>
           </p:txBody>
         </p:sp>
@@ -13444,10 +13074,10 @@
                 <p:nvPr/>
               </p:nvPicPr>
               <p:blipFill>
-                <a:blip r:embed="rId14">
+                <a:blip>
                   <a:extLst>
                     <a:ext uri="{96DAC541-7B7A-43D3-8B79-37D633B846F1}">
-                      <asvg:svgBlip xmlns:asvg="http://schemas.microsoft.com/office/drawing/2016/SVG/main" r:embed="rId15"/>
+                      <asvg:svgBlip xmlns:asvg="http://schemas.microsoft.com/office/drawing/2016/SVG/main" r:embed="rId11"/>
                     </a:ext>
                   </a:extLst>
                 </a:blip>
@@ -13493,7 +13123,6 @@
                   <a:rPr lang="en-US" altLang="zh-CN" sz="800" dirty="0"/>
                   <a:t>Refined mask</a:t>
                 </a:r>
-                <a:endParaRPr lang="en-US" altLang="zh-CN" sz="800" dirty="0"/>
               </a:p>
             </p:txBody>
           </p:sp>
@@ -13524,7 +13153,6 @@
                   <a:rPr lang="en-US" altLang="zh-CN" sz="800" dirty="0"/>
                   <a:t>Verified</a:t>
                 </a:r>
-                <a:endParaRPr lang="en-US" altLang="zh-CN" sz="800" dirty="0"/>
               </a:p>
               <a:p>
                 <a:pPr algn="ctr"/>
@@ -13532,7 +13160,6 @@
                   <a:rPr lang="en-US" altLang="zh-CN" sz="800" dirty="0"/>
                   <a:t>diagnosis</a:t>
                 </a:r>
-                <a:endParaRPr lang="en-US" altLang="zh-CN" sz="800" dirty="0"/>
               </a:p>
             </p:txBody>
           </p:sp>
@@ -13563,7 +13190,6 @@
                   <a:rPr lang="en-US" altLang="zh-CN" sz="800" dirty="0"/>
                   <a:t>Corrected</a:t>
                 </a:r>
-                <a:endParaRPr lang="en-US" altLang="zh-CN" sz="800" dirty="0"/>
               </a:p>
               <a:p>
                 <a:pPr algn="ctr"/>
@@ -13571,7 +13197,6 @@
                   <a:rPr lang="en-US" altLang="zh-CN" sz="800" dirty="0"/>
                   <a:t>report</a:t>
                 </a:r>
-                <a:endParaRPr lang="en-US" altLang="zh-CN" sz="800" dirty="0"/>
               </a:p>
             </p:txBody>
           </p:sp>
@@ -14014,10 +13639,10 @@
               <p:nvPr/>
             </p:nvPicPr>
             <p:blipFill>
-              <a:blip r:embed="rId16">
+              <a:blip>
                 <a:extLst>
                   <a:ext uri="{96DAC541-7B7A-43D3-8B79-37D633B846F1}">
-                    <asvg:svgBlip xmlns:asvg="http://schemas.microsoft.com/office/drawing/2016/SVG/main" r:embed="rId17"/>
+                    <asvg:svgBlip xmlns:asvg="http://schemas.microsoft.com/office/drawing/2016/SVG/main" r:embed="rId12"/>
                   </a:ext>
                 </a:extLst>
               </a:blip>
@@ -14063,7 +13688,6 @@
                 <a:rPr lang="en-US" altLang="zh-CN" sz="1200"/>
                 <a:t>Evolving Database</a:t>
               </a:r>
-              <a:endParaRPr lang="en-US" altLang="zh-CN" sz="1200"/>
             </a:p>
           </p:txBody>
         </p:sp>
@@ -14094,7 +13718,6 @@
                 <a:rPr lang="en-US" altLang="zh-CN" sz="800" dirty="0"/>
                 <a:t>High-quality, expert-refined data repository</a:t>
               </a:r>
-              <a:endParaRPr lang="en-US" altLang="zh-CN" sz="800" dirty="0"/>
             </a:p>
           </p:txBody>
         </p:sp>
@@ -14122,10 +13745,10 @@
             <p:nvPr/>
           </p:nvPicPr>
           <p:blipFill>
-            <a:blip r:embed="rId18">
+            <a:blip>
               <a:extLst>
                 <a:ext uri="{96DAC541-7B7A-43D3-8B79-37D633B846F1}">
-                  <asvg:svgBlip xmlns:asvg="http://schemas.microsoft.com/office/drawing/2016/SVG/main" r:embed="rId19"/>
+                  <asvg:svgBlip xmlns:asvg="http://schemas.microsoft.com/office/drawing/2016/SVG/main" r:embed="rId13"/>
                 </a:ext>
               </a:extLst>
             </a:blip>
@@ -14170,7 +13793,6 @@
                 <a:rPr lang="en-US" altLang="zh-CN" sz="1200" dirty="0"/>
                 <a:t>Model updating</a:t>
               </a:r>
-              <a:endParaRPr lang="en-US" altLang="zh-CN" sz="1200" dirty="0"/>
             </a:p>
           </p:txBody>
         </p:sp>
@@ -14213,7 +13835,6 @@
                 <a:rPr lang="en-US" altLang="zh-CN" sz="800" dirty="0"/>
                 <a:t>evolving</a:t>
               </a:r>
-              <a:endParaRPr lang="en-US" altLang="zh-CN" sz="800" dirty="0"/>
             </a:p>
           </p:txBody>
         </p:sp>
@@ -14245,7 +13866,6 @@
               <a:rPr lang="en-US" altLang="zh-CN" sz="1200" dirty="0"/>
               <a:t>Clinician-in-the-loop</a:t>
             </a:r>
-            <a:endParaRPr lang="en-US" altLang="zh-CN" sz="1200" dirty="0"/>
           </a:p>
         </p:txBody>
       </p:sp>
@@ -14280,7 +13900,6 @@
               <a:rPr lang="en-US" altLang="zh-CN" sz="1200" dirty="0"/>
               <a:t>Efficient and reliable diagnosis</a:t>
             </a:r>
-            <a:endParaRPr lang="en-US" altLang="zh-CN" sz="1200" dirty="0"/>
           </a:p>
         </p:txBody>
       </p:sp>
@@ -14438,10 +14057,10 @@
           <p:nvPr/>
         </p:nvPicPr>
         <p:blipFill>
-          <a:blip r:embed="rId20">
+          <a:blip>
             <a:extLst>
               <a:ext uri="{96DAC541-7B7A-43D3-8B79-37D633B846F1}">
-                <asvg:svgBlip xmlns:asvg="http://schemas.microsoft.com/office/drawing/2016/SVG/main" r:embed="rId21"/>
+                <asvg:svgBlip xmlns:asvg="http://schemas.microsoft.com/office/drawing/2016/SVG/main" r:embed="rId14"/>
               </a:ext>
             </a:extLst>
           </a:blip>
@@ -14500,7 +14119,6 @@
                 <a:rPr lang="en-US" altLang="zh-CN" sz="1200" dirty="0"/>
                 <a:t>Initial outputs</a:t>
               </a:r>
-              <a:endParaRPr lang="en-US" altLang="zh-CN" sz="1200" dirty="0"/>
             </a:p>
           </p:txBody>
         </p:sp>
@@ -14545,7 +14163,6 @@
                   <a:rPr lang="en-US" altLang="zh-CN" sz="800" dirty="0"/>
                   <a:t>mask</a:t>
                 </a:r>
-                <a:endParaRPr lang="en-US" altLang="zh-CN" sz="800" dirty="0"/>
               </a:p>
             </p:txBody>
           </p:sp>
@@ -14576,7 +14193,6 @@
                   <a:rPr lang="en-US" altLang="zh-CN" sz="800" dirty="0"/>
                   <a:t>diagnosis</a:t>
                 </a:r>
-                <a:endParaRPr lang="en-US" altLang="zh-CN" sz="800" dirty="0"/>
               </a:p>
             </p:txBody>
           </p:sp>
@@ -14607,7 +14223,6 @@
                   <a:rPr lang="en-US" altLang="zh-CN" sz="800" dirty="0"/>
                   <a:t>report</a:t>
                 </a:r>
-                <a:endParaRPr lang="en-US" altLang="zh-CN" sz="800" dirty="0"/>
               </a:p>
             </p:txBody>
           </p:sp>
@@ -14620,10 +14235,10 @@
               <p:nvPr/>
             </p:nvPicPr>
             <p:blipFill>
-              <a:blip r:embed="rId22">
+              <a:blip>
                 <a:extLst>
                   <a:ext uri="{96DAC541-7B7A-43D3-8B79-37D633B846F1}">
-                    <asvg:svgBlip xmlns:asvg="http://schemas.microsoft.com/office/drawing/2016/SVG/main" r:embed="rId23"/>
+                    <asvg:svgBlip xmlns:asvg="http://schemas.microsoft.com/office/drawing/2016/SVG/main" r:embed="rId15"/>
                   </a:ext>
                 </a:extLst>
               </a:blip>
@@ -14666,10 +14281,10 @@
             <p:nvPr/>
           </p:nvPicPr>
           <p:blipFill>
-            <a:blip r:embed="rId24">
+            <a:blip>
               <a:extLst>
                 <a:ext uri="{96DAC541-7B7A-43D3-8B79-37D633B846F1}">
-                  <asvg:svgBlip xmlns:asvg="http://schemas.microsoft.com/office/drawing/2016/SVG/main" r:embed="rId25"/>
+                  <asvg:svgBlip xmlns:asvg="http://schemas.microsoft.com/office/drawing/2016/SVG/main" r:embed="rId16"/>
                 </a:ext>
               </a:extLst>
             </a:blip>
@@ -14714,7 +14329,6 @@
                 <a:rPr lang="en-US" altLang="zh-CN" sz="1200" dirty="0"/>
                 <a:t>Curated feedback</a:t>
               </a:r>
-              <a:endParaRPr lang="en-US" altLang="zh-CN" sz="1200" dirty="0"/>
             </a:p>
           </p:txBody>
         </p:sp>
@@ -14748,7 +14362,6 @@
                 <a:rPr lang="en-US" altLang="zh-CN" sz="800" dirty="0"/>
                 <a:t>Verified corrections and annotations</a:t>
               </a:r>
-              <a:endParaRPr lang="en-US" altLang="zh-CN" sz="800" dirty="0"/>
             </a:p>
           </p:txBody>
         </p:sp>
@@ -14923,7 +14536,6 @@
               <a:rPr lang="en-US" altLang="zh-CN" sz="900" dirty="0"/>
               <a:t>Expert review</a:t>
             </a:r>
-            <a:endParaRPr lang="en-US" altLang="zh-CN" sz="900" dirty="0"/>
           </a:p>
         </p:txBody>
       </p:sp>
@@ -14953,7 +14565,6 @@
               <a:rPr lang="en-US" altLang="zh-CN" sz="900" dirty="0"/>
               <a:t>After refinement</a:t>
             </a:r>
-            <a:endParaRPr lang="en-US" altLang="zh-CN" sz="900" dirty="0"/>
           </a:p>
         </p:txBody>
       </p:sp>
@@ -14983,7 +14594,6 @@
               <a:rPr lang="en-US" altLang="zh-CN" sz="900"/>
               <a:t>Stored as feedback</a:t>
             </a:r>
-            <a:endParaRPr lang="en-US" altLang="zh-CN" sz="900"/>
           </a:p>
         </p:txBody>
       </p:sp>
@@ -15013,7 +14623,6 @@
               <a:rPr lang="en-US" altLang="zh-CN" sz="900"/>
               <a:t>Used for updating</a:t>
             </a:r>
-            <a:endParaRPr lang="en-US" altLang="zh-CN" sz="900"/>
           </a:p>
         </p:txBody>
       </p:sp>
@@ -15044,7 +14653,6 @@
               <a:rPr lang="en-US" altLang="zh-CN" sz="700" dirty="0"/>
               <a:t>Ours newly contributed</a:t>
             </a:r>
-            <a:endParaRPr lang="en-US" altLang="zh-CN" sz="700" dirty="0"/>
           </a:p>
         </p:txBody>
       </p:sp>
@@ -15258,7 +14866,6 @@
                   <a:rPr lang="en-US" altLang="zh-CN" sz="900" dirty="0"/>
                   <a:t>148 cases videos</a:t>
                 </a:r>
-                <a:endParaRPr lang="en-US" altLang="zh-CN" sz="900" dirty="0"/>
               </a:p>
             </p:txBody>
           </p:sp>
@@ -15300,13 +14907,6 @@
                 </a:rPr>
                 <a:t>TNVideo</a:t>
               </a:r>
-              <a:endParaRPr lang="en-US" altLang="zh-CN" sz="1000" b="1" dirty="0">
-                <a:solidFill>
-                  <a:schemeClr val="bg1"/>
-                </a:solidFill>
-                <a:latin typeface="Arial" panose="020B0604020202020204" pitchFamily="34" charset="0"/>
-                <a:cs typeface="Arial" panose="020B0604020202020204" pitchFamily="34" charset="0"/>
-              </a:endParaRPr>
             </a:p>
           </p:txBody>
         </p:sp>
@@ -15338,7 +14938,6 @@
               <a:rPr lang="en-US" altLang="zh-CN" sz="700" dirty="0"/>
               <a:t>Public</a:t>
             </a:r>
-            <a:endParaRPr lang="en-US" altLang="zh-CN" sz="700" dirty="0"/>
           </a:p>
           <a:p>
             <a:pPr algn="ctr"/>
@@ -15346,7 +14945,6 @@
               <a:rPr lang="en-US" altLang="zh-CN" sz="700" dirty="0"/>
               <a:t>datasets</a:t>
             </a:r>
-            <a:endParaRPr lang="en-US" altLang="zh-CN" sz="700" dirty="0"/>
           </a:p>
         </p:txBody>
       </p:sp>
@@ -15377,7 +14975,6 @@
               <a:rPr lang="en-US" altLang="zh-CN" sz="700" dirty="0"/>
               <a:t>Ours newly contributed</a:t>
             </a:r>
-            <a:endParaRPr lang="en-US" altLang="zh-CN" sz="700" dirty="0"/>
           </a:p>
         </p:txBody>
       </p:sp>
@@ -15616,13 +15213,6 @@
                   </a:rPr>
                   <a:t>ZJH-2K</a:t>
                 </a:r>
-                <a:endParaRPr lang="en-US" altLang="zh-CN" sz="1000" b="1" dirty="0">
-                  <a:solidFill>
-                    <a:schemeClr val="bg1"/>
-                  </a:solidFill>
-                  <a:latin typeface="Arial" panose="020B0604020202020204" pitchFamily="34" charset="0"/>
-                  <a:cs typeface="Arial" panose="020B0604020202020204" pitchFamily="34" charset="0"/>
-                </a:endParaRPr>
               </a:p>
             </p:txBody>
           </p:sp>
@@ -15654,7 +15244,6 @@
                 <a:rPr lang="en-US" altLang="zh-CN" sz="800" dirty="0"/>
                 <a:t>1,854 images</a:t>
               </a:r>
-              <a:endParaRPr lang="en-US" altLang="zh-CN" sz="800" dirty="0"/>
             </a:p>
           </p:txBody>
         </p:sp>
@@ -15894,13 +15483,6 @@
                   </a:rPr>
                   <a:t>TNVideo</a:t>
                 </a:r>
-                <a:endParaRPr lang="en-US" altLang="zh-CN" sz="1000" b="1" dirty="0">
-                  <a:solidFill>
-                    <a:schemeClr val="bg1"/>
-                  </a:solidFill>
-                  <a:latin typeface="Arial" panose="020B0604020202020204" pitchFamily="34" charset="0"/>
-                  <a:cs typeface="Arial" panose="020B0604020202020204" pitchFamily="34" charset="0"/>
-                </a:endParaRPr>
               </a:p>
             </p:txBody>
           </p:sp>
@@ -15932,7 +15514,6 @@
                 <a:rPr lang="en-US" altLang="zh-CN" sz="800" dirty="0"/>
                 <a:t>148 cases</a:t>
               </a:r>
-              <a:endParaRPr lang="en-US" altLang="zh-CN" sz="800" dirty="0"/>
             </a:p>
           </p:txBody>
         </p:sp>
@@ -15964,7 +15545,6 @@
               <a:rPr lang="en-US" altLang="zh-CN" sz="700" dirty="0"/>
               <a:t>Ours newly contributed</a:t>
             </a:r>
-            <a:endParaRPr lang="en-US" altLang="zh-CN" sz="700" dirty="0"/>
           </a:p>
         </p:txBody>
       </p:sp>
@@ -16203,13 +15783,6 @@
                   </a:rPr>
                   <a:t>ZJH-2K</a:t>
                 </a:r>
-                <a:endParaRPr lang="en-US" altLang="zh-CN" sz="1000" b="1" dirty="0">
-                  <a:solidFill>
-                    <a:schemeClr val="bg1"/>
-                  </a:solidFill>
-                  <a:latin typeface="Arial" panose="020B0604020202020204" pitchFamily="34" charset="0"/>
-                  <a:cs typeface="Arial" panose="020B0604020202020204" pitchFamily="34" charset="0"/>
-                </a:endParaRPr>
               </a:p>
             </p:txBody>
           </p:sp>
@@ -16241,7 +15814,6 @@
                 <a:rPr lang="en-US" altLang="zh-CN" sz="800" dirty="0"/>
                 <a:t>1,854 cases</a:t>
               </a:r>
-              <a:endParaRPr lang="en-US" altLang="zh-CN" sz="800" dirty="0"/>
             </a:p>
           </p:txBody>
         </p:sp>
@@ -16481,13 +16053,6 @@
                   </a:rPr>
                   <a:t>TNVideo</a:t>
                 </a:r>
-                <a:endParaRPr lang="en-US" altLang="zh-CN" sz="1000" b="1" dirty="0">
-                  <a:solidFill>
-                    <a:schemeClr val="bg1"/>
-                  </a:solidFill>
-                  <a:latin typeface="Arial" panose="020B0604020202020204" pitchFamily="34" charset="0"/>
-                  <a:cs typeface="Arial" panose="020B0604020202020204" pitchFamily="34" charset="0"/>
-                </a:endParaRPr>
               </a:p>
             </p:txBody>
           </p:sp>
@@ -16519,7 +16084,6 @@
                 <a:rPr lang="en-US" altLang="zh-CN" sz="800" dirty="0"/>
                 <a:t>148 cases</a:t>
               </a:r>
-              <a:endParaRPr lang="en-US" altLang="zh-CN" sz="800" dirty="0"/>
             </a:p>
           </p:txBody>
         </p:sp>
@@ -16553,10 +16117,6 @@
               </a:rPr>
               <a:t>d</a:t>
             </a:r>
-            <a:endParaRPr lang="en-US" altLang="zh-CN" sz="2400" b="1" dirty="0">
-              <a:latin typeface="Arial" panose="020B0604020202020204" pitchFamily="34" charset="0"/>
-              <a:cs typeface="Arial" panose="020B0604020202020204" pitchFamily="34" charset="0"/>
-            </a:endParaRPr>
           </a:p>
         </p:txBody>
       </p:sp>
@@ -16645,7 +16205,7 @@
               <p:nvPr/>
             </p:nvPicPr>
             <p:blipFill>
-              <a:blip r:embed="rId7">
+              <a:blip>
                 <a:extLst>
                   <a:ext uri="{96DAC541-7B7A-43D3-8B79-37D633B846F1}">
                     <asvg:svgBlip xmlns:asvg="http://schemas.microsoft.com/office/drawing/2016/SVG/main" r:embed="rId8"/>
@@ -16697,11 +16257,6 @@
                   </a:rPr>
                   <a:t>ThyroidX</a:t>
                 </a:r>
-                <a:endParaRPr lang="en-US" altLang="zh-CN" sz="800" b="1" dirty="0">
-                  <a:solidFill>
-                    <a:schemeClr val="bg1"/>
-                  </a:solidFill>
-                </a:endParaRPr>
               </a:p>
               <a:p>
                 <a:pPr algn="ctr"/>
@@ -16713,11 +16268,6 @@
                   </a:rPr>
                   <a:t>Agent</a:t>
                 </a:r>
-                <a:endParaRPr lang="en-US" altLang="zh-CN" sz="800" b="1" dirty="0">
-                  <a:solidFill>
-                    <a:schemeClr val="bg1"/>
-                  </a:solidFill>
-                </a:endParaRPr>
               </a:p>
             </p:txBody>
           </p:sp>
@@ -16745,10 +16295,10 @@
               <p:nvPr/>
             </p:nvPicPr>
             <p:blipFill>
-              <a:blip r:embed="rId26">
+              <a:blip>
                 <a:extLst>
                   <a:ext uri="{96DAC541-7B7A-43D3-8B79-37D633B846F1}">
-                    <asvg:svgBlip xmlns:asvg="http://schemas.microsoft.com/office/drawing/2016/SVG/main" r:embed="rId27"/>
+                    <asvg:svgBlip xmlns:asvg="http://schemas.microsoft.com/office/drawing/2016/SVG/main" r:embed="rId17"/>
                   </a:ext>
                 </a:extLst>
               </a:blip>
@@ -16786,13 +16336,13 @@
               <a:bodyPr wrap="square" lIns="36195" rIns="36195" rtlCol="0">
                 <a:spAutoFit/>
               </a:bodyPr>
+              <a:lstStyle/>
               <a:p>
                 <a:pPr algn="ctr"/>
                 <a:r>
                   <a:rPr lang="en-US" altLang="zh-CN" sz="900"/>
                   <a:t>Training and internal validation</a:t>
                 </a:r>
-                <a:endParaRPr lang="en-US" altLang="zh-CN" sz="900"/>
               </a:p>
             </p:txBody>
           </p:sp>
@@ -16816,6 +16366,7 @@
               <a:bodyPr wrap="square" rtlCol="0">
                 <a:spAutoFit/>
               </a:bodyPr>
+              <a:lstStyle/>
               <a:p>
                 <a:pPr algn="ctr"/>
                 <a:r>
@@ -16826,11 +16377,6 @@
                   </a:rPr>
                   <a:t>10 centers</a:t>
                 </a:r>
-                <a:endParaRPr lang="en-US" altLang="zh-CN" sz="1000">
-                  <a:solidFill>
-                    <a:srgbClr val="0D3565"/>
-                  </a:solidFill>
-                </a:endParaRPr>
               </a:p>
             </p:txBody>
           </p:sp>
@@ -16858,10 +16404,10 @@
               <p:nvPr/>
             </p:nvPicPr>
             <p:blipFill>
-              <a:blip r:embed="rId28">
+              <a:blip>
                 <a:extLst>
                   <a:ext uri="{96DAC541-7B7A-43D3-8B79-37D633B846F1}">
-                    <asvg:svgBlip xmlns:asvg="http://schemas.microsoft.com/office/drawing/2016/SVG/main" r:embed="rId29"/>
+                    <asvg:svgBlip xmlns:asvg="http://schemas.microsoft.com/office/drawing/2016/SVG/main" r:embed="rId18"/>
                   </a:ext>
                 </a:extLst>
               </a:blip>
@@ -16899,13 +16445,13 @@
               <a:bodyPr wrap="square" rtlCol="0">
                 <a:spAutoFit/>
               </a:bodyPr>
+              <a:lstStyle/>
               <a:p>
                 <a:pPr algn="ctr"/>
                 <a:r>
                   <a:rPr lang="en-US" altLang="zh-CN" sz="900"/>
                   <a:t>External validation</a:t>
                 </a:r>
-                <a:endParaRPr lang="en-US" altLang="zh-CN" sz="900"/>
               </a:p>
             </p:txBody>
           </p:sp>
@@ -16929,6 +16475,7 @@
               <a:bodyPr wrap="square" rtlCol="0">
                 <a:spAutoFit/>
               </a:bodyPr>
+              <a:lstStyle/>
               <a:p>
                 <a:pPr algn="ctr"/>
                 <a:r>
@@ -16939,11 +16486,6 @@
                   </a:rPr>
                   <a:t>35 centers</a:t>
                 </a:r>
-                <a:endParaRPr lang="en-US" altLang="zh-CN" sz="1000">
-                  <a:solidFill>
-                    <a:srgbClr val="EA6F17"/>
-                  </a:solidFill>
-                </a:endParaRPr>
               </a:p>
             </p:txBody>
           </p:sp>
@@ -17238,10 +16780,6 @@
                   </a:rPr>
                   <a:t>2,474 reports,</a:t>
                 </a:r>
-                <a:endParaRPr lang="en-US" altLang="zh-CN" sz="900" dirty="0">
-                  <a:latin typeface="Arial" panose="020B0604020202020204" pitchFamily="34" charset="0"/>
-                  <a:cs typeface="Arial" panose="020B0604020202020204" pitchFamily="34" charset="0"/>
-                </a:endParaRPr>
               </a:p>
               <a:p>
                 <a:pPr algn="ctr">
@@ -17256,10 +16794,6 @@
                   </a:rPr>
                   <a:t>15,921 images</a:t>
                 </a:r>
-                <a:endParaRPr lang="en-US" altLang="zh-CN" sz="900" dirty="0">
-                  <a:latin typeface="Arial" panose="020B0604020202020204" pitchFamily="34" charset="0"/>
-                  <a:cs typeface="Arial" panose="020B0604020202020204" pitchFamily="34" charset="0"/>
-                </a:endParaRPr>
               </a:p>
             </p:txBody>
           </p:sp>
@@ -17300,13 +16834,6 @@
                   </a:rPr>
                   <a:t>KMVE</a:t>
                 </a:r>
-                <a:endParaRPr lang="en-US" altLang="zh-CN" sz="1000" b="1" dirty="0">
-                  <a:solidFill>
-                    <a:schemeClr val="bg1"/>
-                  </a:solidFill>
-                  <a:latin typeface="Arial" panose="020B0604020202020204" pitchFamily="34" charset="0"/>
-                  <a:cs typeface="Arial" panose="020B0604020202020204" pitchFamily="34" charset="0"/>
-                </a:endParaRPr>
               </a:p>
             </p:txBody>
           </p:sp>
@@ -17339,7 +16866,6 @@
               <a:rPr lang="en-US" altLang="zh-CN" sz="700" dirty="0"/>
               <a:t>Public</a:t>
             </a:r>
-            <a:endParaRPr lang="en-US" altLang="zh-CN" sz="700" dirty="0"/>
           </a:p>
           <a:p>
             <a:pPr algn="ctr"/>
@@ -17347,7 +16873,6 @@
               <a:rPr lang="en-US" altLang="zh-CN" sz="700" dirty="0"/>
               <a:t>datasets</a:t>
             </a:r>
-            <a:endParaRPr lang="en-US" altLang="zh-CN" sz="700" dirty="0"/>
           </a:p>
         </p:txBody>
       </p:sp>
@@ -17388,13 +16913,6 @@
               </a:rPr>
               <a:t>SMU-HMC</a:t>
             </a:r>
-            <a:endParaRPr lang="en-US" altLang="zh-CN" sz="1000" b="1" dirty="0">
-              <a:solidFill>
-                <a:schemeClr val="bg1"/>
-              </a:solidFill>
-              <a:latin typeface="Arial" panose="020B0604020202020204" pitchFamily="34" charset="0"/>
-              <a:cs typeface="Arial" panose="020B0604020202020204" pitchFamily="34" charset="0"/>
-            </a:endParaRPr>
           </a:p>
         </p:txBody>
       </p:sp>
@@ -17737,11 +17255,6 @@
                           </a:rPr>
                           <a:t>ThyroidXAgent</a:t>
                         </a:r>
-                        <a:endParaRPr lang="en-US" altLang="zh-CN" sz="1400" b="1" dirty="0">
-                          <a:solidFill>
-                            <a:schemeClr val="bg1"/>
-                          </a:solidFill>
-                        </a:endParaRPr>
                       </a:p>
                     </p:txBody>
                   </p:sp>
@@ -17754,7 +17267,7 @@
                       <p:nvPr/>
                     </p:nvPicPr>
                     <p:blipFill>
-                      <a:blip r:embed="rId7">
+                      <a:blip>
                         <a:extLst>
                           <a:ext uri="{96DAC541-7B7A-43D3-8B79-37D633B846F1}">
                             <asvg:svgBlip xmlns:asvg="http://schemas.microsoft.com/office/drawing/2016/SVG/main" r:embed="rId8"/>
@@ -18468,10 +17981,10 @@
                       <p:nvPr/>
                     </p:nvPicPr>
                     <p:blipFill>
-                      <a:blip r:embed="rId30">
+                      <a:blip>
                         <a:extLst>
                           <a:ext uri="{96DAC541-7B7A-43D3-8B79-37D633B846F1}">
-                            <asvg:svgBlip xmlns:asvg="http://schemas.microsoft.com/office/drawing/2016/SVG/main" r:embed="rId31"/>
+                            <asvg:svgBlip xmlns:asvg="http://schemas.microsoft.com/office/drawing/2016/SVG/main" r:embed="rId19"/>
                           </a:ext>
                         </a:extLst>
                       </a:blip>
@@ -18498,10 +18011,10 @@
                       <p:nvPr/>
                     </p:nvPicPr>
                     <p:blipFill>
-                      <a:blip r:embed="rId32">
+                      <a:blip>
                         <a:extLst>
                           <a:ext uri="{96DAC541-7B7A-43D3-8B79-37D633B846F1}">
-                            <asvg:svgBlip xmlns:asvg="http://schemas.microsoft.com/office/drawing/2016/SVG/main" r:embed="rId33"/>
+                            <asvg:svgBlip xmlns:asvg="http://schemas.microsoft.com/office/drawing/2016/SVG/main" r:embed="rId20"/>
                           </a:ext>
                         </a:extLst>
                       </a:blip>
@@ -18831,10 +18344,10 @@
                         <p:nvPr/>
                       </p:nvPicPr>
                       <p:blipFill>
-                        <a:blip r:embed="rId34">
+                        <a:blip>
                           <a:extLst>
                             <a:ext uri="{96DAC541-7B7A-43D3-8B79-37D633B846F1}">
-                              <asvg:svgBlip xmlns:asvg="http://schemas.microsoft.com/office/drawing/2016/SVG/main" r:embed="rId35"/>
+                              <asvg:svgBlip xmlns:asvg="http://schemas.microsoft.com/office/drawing/2016/SVG/main" r:embed="rId21"/>
                             </a:ext>
                           </a:extLst>
                         </a:blip>
@@ -18951,10 +18464,10 @@
                       <p:nvPr/>
                     </p:nvPicPr>
                     <p:blipFill>
-                      <a:blip r:embed="rId36">
+                      <a:blip>
                         <a:extLst>
                           <a:ext uri="{96DAC541-7B7A-43D3-8B79-37D633B846F1}">
-                            <asvg:svgBlip xmlns:asvg="http://schemas.microsoft.com/office/drawing/2016/SVG/main" r:embed="rId37"/>
+                            <asvg:svgBlip xmlns:asvg="http://schemas.microsoft.com/office/drawing/2016/SVG/main" r:embed="rId22"/>
                           </a:ext>
                         </a:extLst>
                       </a:blip>
@@ -19212,10 +18725,10 @@
                         <p:nvPr/>
                       </p:nvPicPr>
                       <p:blipFill>
-                        <a:blip r:embed="rId38">
+                        <a:blip>
                           <a:extLst>
                             <a:ext uri="{96DAC541-7B7A-43D3-8B79-37D633B846F1}">
-                              <asvg:svgBlip xmlns:asvg="http://schemas.microsoft.com/office/drawing/2016/SVG/main" r:embed="rId39"/>
+                              <asvg:svgBlip xmlns:asvg="http://schemas.microsoft.com/office/drawing/2016/SVG/main" r:embed="rId23"/>
                             </a:ext>
                           </a:extLst>
                         </a:blip>
@@ -19490,10 +19003,10 @@
                         <p:nvPr/>
                       </p:nvPicPr>
                       <p:blipFill>
-                        <a:blip r:embed="rId40">
+                        <a:blip>
                           <a:extLst>
                             <a:ext uri="{96DAC541-7B7A-43D3-8B79-37D633B846F1}">
-                              <asvg:svgBlip xmlns:asvg="http://schemas.microsoft.com/office/drawing/2016/SVG/main" r:embed="rId41"/>
+                              <asvg:svgBlip xmlns:asvg="http://schemas.microsoft.com/office/drawing/2016/SVG/main" r:embed="rId24"/>
                             </a:ext>
                           </a:extLst>
                         </a:blip>
@@ -19521,10 +19034,10 @@
                       <p:nvPr/>
                     </p:nvPicPr>
                     <p:blipFill>
-                      <a:blip r:embed="rId42">
+                      <a:blip>
                         <a:extLst>
                           <a:ext uri="{96DAC541-7B7A-43D3-8B79-37D633B846F1}">
-                            <asvg:svgBlip xmlns:asvg="http://schemas.microsoft.com/office/drawing/2016/SVG/main" r:embed="rId43"/>
+                            <asvg:svgBlip xmlns:asvg="http://schemas.microsoft.com/office/drawing/2016/SVG/main" r:embed="rId25"/>
                           </a:ext>
                         </a:extLst>
                       </a:blip>
@@ -20094,6 +19607,7 @@
                     </p:style>
                     <p:txBody>
                       <a:bodyPr rtlCol="0" anchor="ctr"/>
+                      <a:lstStyle/>
                       <a:p>
                         <a:pPr algn="ctr"/>
                         <a:endParaRPr lang="zh-CN" altLang="en-US"/>
@@ -20109,10 +19623,10 @@
                       <p:nvPr/>
                     </p:nvPicPr>
                     <p:blipFill>
-                      <a:blip r:embed="rId44">
+                      <a:blip>
                         <a:extLst>
                           <a:ext uri="{96DAC541-7B7A-43D3-8B79-37D633B846F1}">
-                            <asvg:svgBlip xmlns:asvg="http://schemas.microsoft.com/office/drawing/2016/SVG/main" r:embed="rId45"/>
+                            <asvg:svgBlip xmlns:asvg="http://schemas.microsoft.com/office/drawing/2016/SVG/main" r:embed="rId26"/>
                           </a:ext>
                         </a:extLst>
                       </a:blip>
@@ -20175,6 +19689,7 @@
         </p:style>
         <p:txBody>
           <a:bodyPr rtlCol="0" anchor="ctr"/>
+          <a:lstStyle/>
           <a:p>
             <a:pPr algn="ctr"/>
             <a:endParaRPr lang="zh-CN" altLang="en-US"/>
@@ -20220,6 +19735,7 @@
         </p:style>
         <p:txBody>
           <a:bodyPr rtlCol="0" anchor="ctr"/>
+          <a:lstStyle/>
           <a:p>
             <a:pPr algn="ctr"/>
             <a:endParaRPr lang="zh-CN" altLang="en-US"/>
@@ -20265,6 +19781,7 @@
         </p:style>
         <p:txBody>
           <a:bodyPr rtlCol="0" anchor="ctr"/>
+          <a:lstStyle/>
           <a:p>
             <a:pPr algn="ctr"/>
             <a:endParaRPr lang="zh-CN" altLang="en-US"/>
@@ -20310,6 +19827,7 @@
         </p:style>
         <p:txBody>
           <a:bodyPr rtlCol="0" anchor="ctr"/>
+          <a:lstStyle/>
           <a:p>
             <a:pPr algn="ctr"/>
             <a:endParaRPr lang="zh-CN" altLang="en-US"/>
@@ -20355,6 +19873,7 @@
         </p:style>
         <p:txBody>
           <a:bodyPr rtlCol="0" anchor="ctr"/>
+          <a:lstStyle/>
           <a:p>
             <a:pPr algn="ctr"/>
             <a:endParaRPr lang="zh-CN" altLang="en-US"/>
@@ -20400,6 +19919,7 @@
         </p:style>
         <p:txBody>
           <a:bodyPr rtlCol="0" anchor="ctr"/>
+          <a:lstStyle/>
           <a:p>
             <a:pPr algn="ctr"/>
             <a:endParaRPr lang="zh-CN" altLang="en-US"/>
@@ -20445,6 +19965,7 @@
         </p:style>
         <p:txBody>
           <a:bodyPr rtlCol="0" anchor="ctr"/>
+          <a:lstStyle/>
           <a:p>
             <a:pPr algn="ctr"/>
             <a:endParaRPr lang="zh-CN" altLang="en-US"/>
@@ -20490,6 +20011,7 @@
         </p:style>
         <p:txBody>
           <a:bodyPr rtlCol="0" anchor="ctr"/>
+          <a:lstStyle/>
           <a:p>
             <a:pPr algn="ctr"/>
             <a:endParaRPr lang="zh-CN" altLang="en-US"/>
@@ -20535,6 +20057,7 @@
         </p:style>
         <p:txBody>
           <a:bodyPr rtlCol="0" anchor="ctr"/>
+          <a:lstStyle/>
           <a:p>
             <a:pPr algn="ctr"/>
             <a:endParaRPr lang="zh-CN" altLang="en-US"/>
@@ -20561,6 +20084,7 @@
           <a:bodyPr wrap="square" lIns="36195" rtlCol="0" anchor="t">
             <a:spAutoFit/>
           </a:bodyPr>
+          <a:lstStyle/>
           <a:p>
             <a:pPr>
               <a:lnSpc>
@@ -20573,9 +20097,6 @@
               </a:rPr>
               <a:t>Traceable tool-call records</a:t>
             </a:r>
-            <a:endParaRPr lang="en-US" altLang="zh-CN" sz="1200" dirty="0">
-              <a:sym typeface="+mn-ea"/>
-            </a:endParaRPr>
           </a:p>
         </p:txBody>
       </p:sp>
@@ -20630,13 +20151,13 @@
           <a:bodyPr wrap="square" rIns="36195">
             <a:spAutoFit/>
           </a:bodyPr>
+          <a:lstStyle/>
           <a:p>
             <a:pPr algn="r"/>
             <a:r>
               <a:rPr lang="en-US" altLang="zh-CN" sz="1200"/>
               <a:t>Lymph-node metastasis</a:t>
             </a:r>
-            <a:endParaRPr lang="en-US" altLang="zh-CN" sz="1200"/>
           </a:p>
           <a:p>
             <a:pPr algn="r"/>
@@ -20644,7 +20165,6 @@
               <a:rPr lang="en-US" altLang="zh-CN" sz="1200"/>
               <a:t>prediction</a:t>
             </a:r>
-            <a:endParaRPr lang="en-US" altLang="zh-CN" sz="1200"/>
           </a:p>
         </p:txBody>
       </p:sp>
@@ -20674,7 +20194,6 @@
               <a:rPr lang="en-US" altLang="zh-CN" sz="1200" dirty="0"/>
               <a:t>Explainable risk prediction</a:t>
             </a:r>
-            <a:endParaRPr lang="en-US" altLang="zh-CN" sz="1200" dirty="0"/>
           </a:p>
         </p:txBody>
       </p:sp>
@@ -20717,6 +20236,7 @@
         </p:style>
         <p:txBody>
           <a:bodyPr rtlCol="0" anchor="ctr"/>
+          <a:lstStyle/>
           <a:p>
             <a:pPr algn="ctr"/>
             <a:endParaRPr lang="zh-CN" altLang="en-US"/>
@@ -20762,6 +20282,7 @@
         </p:style>
         <p:txBody>
           <a:bodyPr rtlCol="0" anchor="ctr"/>
+          <a:lstStyle/>
           <a:p>
             <a:pPr algn="ctr"/>
             <a:endParaRPr lang="zh-CN" altLang="en-US"/>
@@ -20807,6 +20328,7 @@
         </p:style>
         <p:txBody>
           <a:bodyPr rtlCol="0" anchor="ctr"/>
+          <a:lstStyle/>
           <a:p>
             <a:pPr algn="ctr"/>
             <a:endParaRPr lang="zh-CN" altLang="en-US"/>
@@ -20838,11 +20360,71 @@
           <a:chExt cx="0" cy="0"/>
         </a:xfrm>
       </p:grpSpPr>
+      <p:sp>
+        <p:nvSpPr>
+          <p:cNvPr id="454" name="圆角矩形 453">
+            <a:extLst>
+              <a:ext uri="{FF2B5EF4-FFF2-40B4-BE49-F238E27FC236}">
+                <a16:creationId xmlns:a16="http://schemas.microsoft.com/office/drawing/2014/main" id="{D2C28105-A11B-165B-1864-75A9F66BFC90}"/>
+              </a:ext>
+            </a:extLst>
+          </p:cNvPr>
+          <p:cNvSpPr/>
+          <p:nvPr/>
+        </p:nvSpPr>
+        <p:spPr>
+          <a:xfrm>
+            <a:off x="9615203" y="5239316"/>
+            <a:ext cx="820245" cy="636351"/>
+          </a:xfrm>
+          <a:prstGeom prst="roundRect">
+            <a:avLst/>
+          </a:prstGeom>
+          <a:solidFill>
+            <a:srgbClr val="F8F8FA"/>
+          </a:solidFill>
+          <a:ln w="3175">
+            <a:solidFill>
+              <a:schemeClr val="tx1"/>
+            </a:solidFill>
+          </a:ln>
+        </p:spPr>
+        <p:style>
+          <a:lnRef idx="2">
+            <a:schemeClr val="accent1">
+              <a:lumMod val="75000"/>
+            </a:schemeClr>
+          </a:lnRef>
+          <a:fillRef idx="1">
+            <a:schemeClr val="accent1"/>
+          </a:fillRef>
+          <a:effectRef idx="0">
+            <a:srgbClr val="FFFFFF"/>
+          </a:effectRef>
+          <a:fontRef idx="minor">
+            <a:schemeClr val="lt1"/>
+          </a:fontRef>
+        </p:style>
+        <p:txBody>
+          <a:bodyPr rtlCol="0" anchor="ctr"/>
+          <a:lstStyle/>
+          <a:p>
+            <a:pPr algn="ctr"/>
+            <a:endParaRPr lang="zh-CN" altLang="en-US"/>
+          </a:p>
+        </p:txBody>
+      </p:sp>
       <p:graphicFrame>
         <p:nvGraphicFramePr>
           <p:cNvPr id="16" name="图表 15"/>
           <p:cNvGraphicFramePr/>
-          <p:nvPr/>
+          <p:nvPr>
+            <p:extLst>
+              <p:ext uri="{D42A27DB-BD31-4B8C-83A1-F6EECF244321}">
+                <p14:modId xmlns:p14="http://schemas.microsoft.com/office/powerpoint/2010/main" val="4073150848"/>
+              </p:ext>
+            </p:extLst>
+          </p:nvPr>
         </p:nvGraphicFramePr>
         <p:xfrm>
           <a:off x="7613508" y="2916875"/>
@@ -20850,7 +20432,7 @@
         </p:xfrm>
         <a:graphic>
           <a:graphicData uri="http://schemas.openxmlformats.org/drawingml/2006/chart">
-            <c:chart xmlns:c="http://schemas.openxmlformats.org/drawingml/2006/chart" xmlns:r="http://schemas.openxmlformats.org/officeDocument/2006/relationships" r:id="rId1"/>
+            <c:chart xmlns:c="http://schemas.openxmlformats.org/drawingml/2006/chart" xmlns:r="http://schemas.openxmlformats.org/officeDocument/2006/relationships" r:id="rId4"/>
           </a:graphicData>
         </a:graphic>
       </p:graphicFrame>
@@ -20858,7 +20440,13 @@
         <p:nvGraphicFramePr>
           <p:cNvPr id="71" name="图表 70"/>
           <p:cNvGraphicFramePr/>
-          <p:nvPr/>
+          <p:nvPr>
+            <p:extLst>
+              <p:ext uri="{D42A27DB-BD31-4B8C-83A1-F6EECF244321}">
+                <p14:modId xmlns:p14="http://schemas.microsoft.com/office/powerpoint/2010/main" val="3938992369"/>
+              </p:ext>
+            </p:extLst>
+          </p:nvPr>
         </p:nvGraphicFramePr>
         <p:xfrm>
           <a:off x="4355465" y="2917510"/>
@@ -20866,7 +20454,7 @@
         </p:xfrm>
         <a:graphic>
           <a:graphicData uri="http://schemas.openxmlformats.org/drawingml/2006/chart">
-            <c:chart xmlns:c="http://schemas.openxmlformats.org/drawingml/2006/chart" xmlns:r="http://schemas.openxmlformats.org/officeDocument/2006/relationships" r:id="rId2"/>
+            <c:chart xmlns:c="http://schemas.openxmlformats.org/drawingml/2006/chart" xmlns:r="http://schemas.openxmlformats.org/officeDocument/2006/relationships" r:id="rId5"/>
           </a:graphicData>
         </a:graphic>
       </p:graphicFrame>
@@ -22002,7 +21590,6 @@
               <a:rPr lang="en-US" altLang="zh-CN" sz="1600" b="1" dirty="0"/>
               <a:t>Segmentation</a:t>
             </a:r>
-            <a:endParaRPr lang="en-US" altLang="zh-CN" sz="1600" b="1" dirty="0"/>
           </a:p>
         </p:txBody>
       </p:sp>
@@ -22033,7 +21620,6 @@
               <a:rPr lang="en-US" altLang="zh-CN" sz="1600" b="1" dirty="0"/>
               <a:t>Classification</a:t>
             </a:r>
-            <a:endParaRPr lang="en-US" altLang="zh-CN" sz="1600" b="1" dirty="0"/>
           </a:p>
         </p:txBody>
       </p:sp>
@@ -22063,7 +21649,6 @@
               <a:rPr lang="en-US" altLang="zh-CN" sz="1600" b="1" dirty="0"/>
               <a:t>Reporting </a:t>
             </a:r>
-            <a:endParaRPr lang="en-US" altLang="zh-CN" sz="1600" b="1" dirty="0"/>
           </a:p>
         </p:txBody>
       </p:sp>
@@ -22094,7 +21679,6 @@
               <a:rPr lang="en-US" altLang="zh-CN" sz="1600" b="1" dirty="0"/>
               <a:t>Opportunistic</a:t>
             </a:r>
-            <a:endParaRPr lang="en-US" altLang="zh-CN" sz="1600" b="1" dirty="0"/>
           </a:p>
           <a:p>
             <a:pPr algn="r"/>
@@ -22102,7 +21686,6 @@
               <a:rPr lang="en-US" altLang="zh-CN" sz="1600" b="1" dirty="0"/>
               <a:t>screening</a:t>
             </a:r>
-            <a:endParaRPr lang="en-US" altLang="zh-CN" sz="1600" b="1" dirty="0"/>
           </a:p>
         </p:txBody>
       </p:sp>
@@ -22196,11 +21779,6 @@
                 </a:rPr>
                 <a:t>OpenThyroidDB</a:t>
               </a:r>
-              <a:endParaRPr lang="en-US" altLang="zh-CN" sz="2400" b="1" dirty="0">
-                <a:solidFill>
-                  <a:schemeClr val="bg1"/>
-                </a:solidFill>
-              </a:endParaRPr>
             </a:p>
           </p:txBody>
         </p:sp>
@@ -22235,11 +21813,6 @@
                 </a:rPr>
                 <a:t>A multitask thyroid ultrasound database</a:t>
               </a:r>
-              <a:endParaRPr lang="en-US" altLang="zh-CN" sz="1100" dirty="0">
-                <a:solidFill>
-                  <a:schemeClr val="bg1"/>
-                </a:solidFill>
-              </a:endParaRPr>
             </a:p>
           </p:txBody>
         </p:sp>
@@ -22287,10 +21860,10 @@
             <p:nvPr/>
           </p:nvPicPr>
           <p:blipFill>
-            <a:blip r:embed="rId3">
+            <a:blip>
               <a:extLst>
                 <a:ext uri="{96DAC541-7B7A-43D3-8B79-37D633B846F1}">
-                  <asvg:svgBlip xmlns:asvg="http://schemas.microsoft.com/office/drawing/2016/SVG/main" r:embed="rId4"/>
+                  <asvg:svgBlip xmlns:asvg="http://schemas.microsoft.com/office/drawing/2016/SVG/main" r:embed="rId6"/>
                 </a:ext>
               </a:extLst>
             </a:blip>
@@ -22353,11 +21926,6 @@
                   </a:rPr>
                   <a:t>Scanner Diversity</a:t>
                 </a:r>
-                <a:endParaRPr lang="en-US" altLang="zh-CN" sz="1200" dirty="0">
-                  <a:solidFill>
-                    <a:srgbClr val="B0ECF4"/>
-                  </a:solidFill>
-                </a:endParaRPr>
               </a:p>
             </p:txBody>
           </p:sp>
@@ -22370,10 +21938,10 @@
               <p:nvPr/>
             </p:nvPicPr>
             <p:blipFill>
-              <a:blip r:embed="rId5">
+              <a:blip>
                 <a:extLst>
                   <a:ext uri="{96DAC541-7B7A-43D3-8B79-37D633B846F1}">
-                    <asvg:svgBlip xmlns:asvg="http://schemas.microsoft.com/office/drawing/2016/SVG/main" r:embed="rId6"/>
+                    <asvg:svgBlip xmlns:asvg="http://schemas.microsoft.com/office/drawing/2016/SVG/main" r:embed="rId7"/>
                   </a:ext>
                 </a:extLst>
               </a:blip>
@@ -22439,11 +22007,6 @@
                 </a:rPr>
                 <a:t> E9 · GE S7 · ARIETTA 850 RESONA 70B · </a:t>
               </a:r>
-              <a:endParaRPr lang="en-US" altLang="zh-CN" sz="900" dirty="0">
-                <a:solidFill>
-                  <a:schemeClr val="bg1"/>
-                </a:solidFill>
-              </a:endParaRPr>
             </a:p>
             <a:p>
               <a:pPr algn="l"/>
@@ -22471,11 +22034,6 @@
                 </a:rPr>
                 <a:t> 30/MX · Hitachi Aloka Arietta V70 · </a:t>
               </a:r>
-              <a:endParaRPr lang="en-US" altLang="zh-CN" sz="900" dirty="0">
-                <a:solidFill>
-                  <a:schemeClr val="bg1"/>
-                </a:solidFill>
-              </a:endParaRPr>
             </a:p>
             <a:p>
               <a:pPr algn="l"/>
@@ -22511,11 +22069,6 @@
                 </a:rPr>
                 <a:t> · Samsung Medison RS80 · </a:t>
               </a:r>
-              <a:endParaRPr lang="en-US" altLang="zh-CN" sz="900" dirty="0">
-                <a:solidFill>
-                  <a:schemeClr val="bg1"/>
-                </a:solidFill>
-              </a:endParaRPr>
             </a:p>
             <a:p>
               <a:pPr algn="l"/>
@@ -22551,11 +22104,6 @@
                 </a:rPr>
                 <a:t> Ultimate …</a:t>
               </a:r>
-              <a:endParaRPr lang="en-US" altLang="zh-CN" sz="900" dirty="0">
-                <a:solidFill>
-                  <a:schemeClr val="bg1"/>
-                </a:solidFill>
-              </a:endParaRPr>
             </a:p>
           </p:txBody>
         </p:sp>
@@ -22586,7 +22134,6 @@
               <a:rPr lang="en-US" altLang="zh-CN" sz="1400" dirty="0"/>
               <a:t>Report generation</a:t>
             </a:r>
-            <a:endParaRPr lang="en-US" altLang="zh-CN" sz="1400" dirty="0"/>
           </a:p>
         </p:txBody>
       </p:sp>
@@ -22820,7 +22367,6 @@
               <a:rPr lang="en-US" altLang="zh-CN" sz="1400" dirty="0"/>
               <a:t>Segmentation</a:t>
             </a:r>
-            <a:endParaRPr lang="en-US" altLang="zh-CN" sz="1400" dirty="0"/>
           </a:p>
         </p:txBody>
       </p:sp>
@@ -22850,7 +22396,6 @@
               <a:rPr lang="en-US" altLang="zh-CN" sz="900"/>
               <a:t>Pixel-level delineation of thyroid structures</a:t>
             </a:r>
-            <a:endParaRPr lang="en-US" altLang="zh-CN" sz="900"/>
           </a:p>
         </p:txBody>
       </p:sp>
@@ -22880,7 +22425,6 @@
               <a:rPr lang="en-US" altLang="zh-CN" sz="1400"/>
               <a:t>Classification</a:t>
             </a:r>
-            <a:endParaRPr lang="en-US" altLang="zh-CN" sz="1400"/>
           </a:p>
         </p:txBody>
       </p:sp>
@@ -22910,7 +22454,6 @@
               <a:rPr lang="en-US" altLang="zh-CN" sz="900"/>
               <a:t>Thyroid nodule diagnosis and categorization</a:t>
             </a:r>
-            <a:endParaRPr lang="en-US" altLang="zh-CN" sz="900"/>
           </a:p>
         </p:txBody>
       </p:sp>
@@ -22945,11 +22488,6 @@
               </a:rPr>
               <a:t>AHU</a:t>
             </a:r>
-            <a:endParaRPr lang="en-US" altLang="zh-CN" sz="800" dirty="0">
-              <a:solidFill>
-                <a:schemeClr val="bg1"/>
-              </a:solidFill>
-            </a:endParaRPr>
           </a:p>
           <a:p>
             <a:pPr algn="ctr"/>
@@ -22961,11 +22499,6 @@
               </a:rPr>
               <a:t>125,896</a:t>
             </a:r>
-            <a:endParaRPr lang="en-US" altLang="zh-CN" sz="800" dirty="0">
-              <a:solidFill>
-                <a:schemeClr val="bg1"/>
-              </a:solidFill>
-            </a:endParaRPr>
           </a:p>
         </p:txBody>
       </p:sp>
@@ -22993,14 +22526,14 @@
           <a:p>
             <a:pPr algn="ctr"/>
             <a:r>
-              <a:rPr lang="en-US" altLang="zh-CN" sz="800">
+              <a:rPr lang="en-US" altLang="zh-CN" sz="800" dirty="0" err="1">
                 <a:solidFill>
                   <a:schemeClr val="bg1"/>
                 </a:solidFill>
               </a:rPr>
               <a:t>ThyroidXL</a:t>
             </a:r>
-            <a:endParaRPr lang="en-US" altLang="zh-CN" sz="800">
+            <a:endParaRPr lang="en-US" altLang="zh-CN" sz="800" dirty="0">
               <a:solidFill>
                 <a:schemeClr val="bg1"/>
               </a:solidFill>
@@ -23009,18 +22542,13 @@
           <a:p>
             <a:pPr algn="ctr"/>
             <a:r>
-              <a:rPr lang="en-US" altLang="zh-CN" sz="800">
+              <a:rPr lang="en-US" altLang="zh-CN" sz="800" dirty="0">
                 <a:solidFill>
                   <a:schemeClr val="bg1"/>
                 </a:solidFill>
               </a:rPr>
-              <a:t>11,635</a:t>
+              <a:t>11,631</a:t>
             </a:r>
-            <a:endParaRPr lang="en-US" altLang="zh-CN" sz="800">
-              <a:solidFill>
-                <a:schemeClr val="bg1"/>
-              </a:solidFill>
-            </a:endParaRPr>
           </a:p>
         </p:txBody>
       </p:sp>
@@ -23055,11 +22583,6 @@
               </a:rPr>
               <a:t>ThyUS2Path</a:t>
             </a:r>
-            <a:endParaRPr lang="en-US" altLang="zh-CN" sz="600">
-              <a:solidFill>
-                <a:schemeClr val="bg1"/>
-              </a:solidFill>
-            </a:endParaRPr>
           </a:p>
           <a:p>
             <a:pPr algn="ctr"/>
@@ -23071,11 +22594,6 @@
               </a:rPr>
               <a:t>8,508</a:t>
             </a:r>
-            <a:endParaRPr lang="en-US" altLang="zh-CN" sz="800">
-              <a:solidFill>
-                <a:schemeClr val="bg1"/>
-              </a:solidFill>
-            </a:endParaRPr>
           </a:p>
         </p:txBody>
       </p:sp>
@@ -23110,11 +22628,6 @@
               </a:rPr>
               <a:t>TN5K</a:t>
             </a:r>
-            <a:endParaRPr lang="en-US" altLang="zh-CN" sz="800">
-              <a:solidFill>
-                <a:schemeClr val="bg1"/>
-              </a:solidFill>
-            </a:endParaRPr>
           </a:p>
           <a:p>
             <a:pPr algn="ctr"/>
@@ -23126,11 +22639,6 @@
               </a:rPr>
               <a:t>5,000</a:t>
             </a:r>
-            <a:endParaRPr lang="en-US" altLang="zh-CN" sz="800">
-              <a:solidFill>
-                <a:schemeClr val="bg1"/>
-              </a:solidFill>
-            </a:endParaRPr>
           </a:p>
         </p:txBody>
       </p:sp>
@@ -23165,11 +22673,6 @@
               </a:rPr>
               <a:t>TN3K</a:t>
             </a:r>
-            <a:endParaRPr lang="en-US" altLang="zh-CN" sz="800" dirty="0">
-              <a:solidFill>
-                <a:schemeClr val="bg1"/>
-              </a:solidFill>
-            </a:endParaRPr>
           </a:p>
           <a:p>
             <a:pPr algn="ctr"/>
@@ -23179,13 +22682,8 @@
                   <a:schemeClr val="bg1"/>
                 </a:solidFill>
               </a:rPr>
-              <a:t>3,493</a:t>
+              <a:t>5,347</a:t>
             </a:r>
-            <a:endParaRPr lang="en-US" altLang="zh-CN" sz="800" dirty="0">
-              <a:solidFill>
-                <a:schemeClr val="bg1"/>
-              </a:solidFill>
-            </a:endParaRPr>
           </a:p>
         </p:txBody>
       </p:sp>
@@ -23220,11 +22718,6 @@
               </a:rPr>
               <a:t>DDTI</a:t>
             </a:r>
-            <a:endParaRPr lang="en-US" altLang="zh-CN" sz="800">
-              <a:solidFill>
-                <a:schemeClr val="bg1"/>
-              </a:solidFill>
-            </a:endParaRPr>
           </a:p>
           <a:p>
             <a:pPr algn="ctr"/>
@@ -23236,11 +22729,6 @@
               </a:rPr>
               <a:t>349</a:t>
             </a:r>
-            <a:endParaRPr lang="en-US" altLang="zh-CN" sz="800">
-              <a:solidFill>
-                <a:schemeClr val="bg1"/>
-              </a:solidFill>
-            </a:endParaRPr>
           </a:p>
         </p:txBody>
       </p:sp>
@@ -23271,7 +22759,6 @@
               <a:rPr lang="en-US" altLang="zh-CN" sz="700" dirty="0"/>
               <a:t>Public</a:t>
             </a:r>
-            <a:endParaRPr lang="en-US" altLang="zh-CN" sz="700" dirty="0"/>
           </a:p>
           <a:p>
             <a:pPr algn="ctr"/>
@@ -23279,7 +22766,6 @@
               <a:rPr lang="en-US" altLang="zh-CN" sz="700" dirty="0"/>
               <a:t>datasets</a:t>
             </a:r>
-            <a:endParaRPr lang="en-US" altLang="zh-CN" sz="700" dirty="0"/>
           </a:p>
         </p:txBody>
       </p:sp>
@@ -23309,7 +22795,6 @@
               <a:rPr lang="en-US" altLang="zh-CN" sz="900" dirty="0"/>
               <a:t>Images-report pairs for standardized reporting</a:t>
             </a:r>
-            <a:endParaRPr lang="en-US" altLang="zh-CN" sz="900" dirty="0"/>
           </a:p>
         </p:txBody>
       </p:sp>
@@ -23530,10 +23015,6 @@
                   </a:rPr>
                   <a:t>353 reports,</a:t>
                 </a:r>
-                <a:endParaRPr lang="en-US" altLang="zh-CN" sz="900" dirty="0">
-                  <a:latin typeface="Arial" panose="020B0604020202020204" pitchFamily="34" charset="0"/>
-                  <a:cs typeface="Arial" panose="020B0604020202020204" pitchFamily="34" charset="0"/>
-                </a:endParaRPr>
               </a:p>
               <a:p>
                 <a:pPr algn="ctr">
@@ -23548,10 +23029,6 @@
                   </a:rPr>
                   <a:t>4,471 images</a:t>
                 </a:r>
-                <a:endParaRPr lang="en-US" altLang="zh-CN" sz="900" dirty="0">
-                  <a:latin typeface="Arial" panose="020B0604020202020204" pitchFamily="34" charset="0"/>
-                  <a:cs typeface="Arial" panose="020B0604020202020204" pitchFamily="34" charset="0"/>
-                </a:endParaRPr>
               </a:p>
             </p:txBody>
           </p:sp>
@@ -23593,13 +23070,6 @@
                 </a:rPr>
                 <a:t>ZJH-TS</a:t>
               </a:r>
-              <a:endParaRPr lang="en-US" altLang="zh-CN" sz="1000" b="1" dirty="0">
-                <a:solidFill>
-                  <a:schemeClr val="bg1"/>
-                </a:solidFill>
-                <a:latin typeface="Arial" panose="020B0604020202020204" pitchFamily="34" charset="0"/>
-                <a:cs typeface="Arial" panose="020B0604020202020204" pitchFamily="34" charset="0"/>
-              </a:endParaRPr>
             </a:p>
           </p:txBody>
         </p:sp>
@@ -23611,7 +23081,7 @@
           <p:nvPr/>
         </p:nvGrpSpPr>
         <p:grpSpPr>
-          <a:xfrm rot="0">
+          <a:xfrm>
             <a:off x="4763135" y="5330191"/>
             <a:ext cx="2426970" cy="276225"/>
             <a:chOff x="7804" y="13506"/>
@@ -23807,10 +23277,6 @@
                 </a:rPr>
                 <a:t>23,955 reports,</a:t>
               </a:r>
-              <a:endParaRPr lang="en-US" altLang="zh-CN" sz="900" dirty="0">
-                <a:latin typeface="Arial" panose="020B0604020202020204" pitchFamily="34" charset="0"/>
-                <a:cs typeface="Arial" panose="020B0604020202020204" pitchFamily="34" charset="0"/>
-              </a:endParaRPr>
             </a:p>
             <a:p>
               <a:pPr algn="ctr">
@@ -23825,10 +23291,6 @@
                 </a:rPr>
                 <a:t>248,194 images</a:t>
               </a:r>
-              <a:endParaRPr lang="en-US" altLang="zh-CN" sz="900" dirty="0">
-                <a:latin typeface="Arial" panose="020B0604020202020204" pitchFamily="34" charset="0"/>
-                <a:cs typeface="Arial" panose="020B0604020202020204" pitchFamily="34" charset="0"/>
-              </a:endParaRPr>
             </a:p>
           </p:txBody>
         </p:sp>
@@ -23859,7 +23321,6 @@
               <a:rPr lang="en-US" altLang="zh-CN" sz="1400" dirty="0"/>
               <a:t>Opportunistic diagnosis</a:t>
             </a:r>
-            <a:endParaRPr lang="en-US" altLang="zh-CN" sz="1400" dirty="0"/>
           </a:p>
         </p:txBody>
       </p:sp>
@@ -23889,7 +23350,6 @@
               <a:rPr lang="en-US" altLang="zh-CN" sz="900"/>
               <a:t>LNM prediction and FTC/PTC subtype classification</a:t>
             </a:r>
-            <a:endParaRPr lang="en-US" altLang="zh-CN" sz="900"/>
           </a:p>
         </p:txBody>
       </p:sp>
@@ -23901,10 +23361,10 @@
         </p:nvGrpSpPr>
         <p:grpSpPr>
           <a:xfrm>
-            <a:off x="7781290" y="5240975"/>
-            <a:ext cx="2638425" cy="303530"/>
+            <a:off x="7781288" y="5240975"/>
+            <a:ext cx="1749803" cy="303530"/>
             <a:chOff x="7773" y="13497"/>
-            <a:chExt cx="2500" cy="421"/>
+            <a:chExt cx="1658" cy="421"/>
           </a:xfrm>
         </p:grpSpPr>
         <p:sp>
@@ -23916,7 +23376,7 @@
           <p:spPr>
             <a:xfrm>
               <a:off x="7804" y="13528"/>
-              <a:ext cx="2469" cy="384"/>
+              <a:ext cx="1627" cy="384"/>
             </a:xfrm>
             <a:prstGeom prst="roundRect">
               <a:avLst/>
@@ -24110,10 +23570,6 @@
                   </a:rPr>
                   <a:t>Public dataset</a:t>
                 </a:r>
-                <a:endParaRPr lang="en-US" altLang="zh-CN" sz="800" dirty="0">
-                  <a:latin typeface="Arial" panose="020B0604020202020204" pitchFamily="34" charset="0"/>
-                  <a:cs typeface="Arial" panose="020B0604020202020204" pitchFamily="34" charset="0"/>
-                </a:endParaRPr>
               </a:p>
               <a:p>
                 <a:pPr algn="ctr">
@@ -24128,10 +23584,6 @@
                   </a:rPr>
                   <a:t>200 images</a:t>
                 </a:r>
-                <a:endParaRPr lang="en-US" altLang="zh-CN" sz="800" dirty="0">
-                  <a:latin typeface="Arial" panose="020B0604020202020204" pitchFamily="34" charset="0"/>
-                  <a:cs typeface="Arial" panose="020B0604020202020204" pitchFamily="34" charset="0"/>
-                </a:endParaRPr>
               </a:p>
             </p:txBody>
           </p:sp>
@@ -24172,13 +23624,6 @@
                   </a:rPr>
                   <a:t>FTC / PTC</a:t>
                 </a:r>
-                <a:endParaRPr lang="en-US" altLang="zh-CN" sz="1000" b="1">
-                  <a:solidFill>
-                    <a:schemeClr val="bg1"/>
-                  </a:solidFill>
-                  <a:latin typeface="Arial" panose="020B0604020202020204" pitchFamily="34" charset="0"/>
-                  <a:cs typeface="Arial" panose="020B0604020202020204" pitchFamily="34" charset="0"/>
-                </a:endParaRPr>
               </a:p>
             </p:txBody>
           </p:sp>
@@ -24192,10 +23637,10 @@
         </p:nvGrpSpPr>
         <p:grpSpPr>
           <a:xfrm>
-            <a:off x="7814310" y="5596575"/>
-            <a:ext cx="2605405" cy="276860"/>
+            <a:off x="7814311" y="5596575"/>
+            <a:ext cx="1715832" cy="276860"/>
             <a:chOff x="7804" y="13528"/>
-            <a:chExt cx="2469" cy="384"/>
+            <a:chExt cx="1626" cy="384"/>
           </a:xfrm>
         </p:grpSpPr>
         <p:sp>
@@ -24207,7 +23652,7 @@
           <p:spPr>
             <a:xfrm>
               <a:off x="7804" y="13528"/>
-              <a:ext cx="2469" cy="384"/>
+              <a:ext cx="1626" cy="384"/>
             </a:xfrm>
             <a:prstGeom prst="roundRect">
               <a:avLst/>
@@ -24354,41 +23799,6 @@
           </p:sp>
         </p:grpSp>
       </p:grpSp>
-      <p:cxnSp>
-        <p:nvCxnSpPr>
-          <p:cNvPr id="53" name="直接连接符 52"/>
-          <p:cNvCxnSpPr/>
-          <p:nvPr/>
-        </p:nvCxnSpPr>
-        <p:spPr>
-          <a:xfrm>
-            <a:off x="9521825" y="5273995"/>
-            <a:ext cx="0" cy="270510"/>
-          </a:xfrm>
-          <a:prstGeom prst="line">
-            <a:avLst/>
-          </a:prstGeom>
-          <a:ln w="3175">
-            <a:solidFill>
-              <a:schemeClr val="tx1"/>
-            </a:solidFill>
-          </a:ln>
-        </p:spPr>
-        <p:style>
-          <a:lnRef idx="2">
-            <a:schemeClr val="accent1"/>
-          </a:lnRef>
-          <a:fillRef idx="0">
-            <a:srgbClr val="FFFFFF"/>
-          </a:fillRef>
-          <a:effectRef idx="0">
-            <a:srgbClr val="FFFFFF"/>
-          </a:effectRef>
-          <a:fontRef idx="minor">
-            <a:schemeClr val="tx1"/>
-          </a:fontRef>
-        </p:style>
-      </p:cxnSp>
       <p:sp>
         <p:nvSpPr>
           <p:cNvPr id="54" name="文本框 53"/>
@@ -24397,7 +23807,7 @@
         </p:nvSpPr>
         <p:spPr>
           <a:xfrm>
-            <a:off x="9531985" y="5240975"/>
+            <a:off x="9567172" y="5399725"/>
             <a:ext cx="916305" cy="303530"/>
           </a:xfrm>
           <a:prstGeom prst="rect">
@@ -24423,10 +23833,34 @@
               </a:rPr>
               <a:t>Ours</a:t>
             </a:r>
-            <a:endParaRPr lang="en-US" altLang="zh-CN" sz="800" dirty="0">
-              <a:latin typeface="Arial" panose="020B0604020202020204" pitchFamily="34" charset="0"/>
-              <a:cs typeface="Arial" panose="020B0604020202020204" pitchFamily="34" charset="0"/>
-            </a:endParaRPr>
+            <a:r>
+              <a:rPr lang="zh-CN" altLang="en-US" sz="800" dirty="0">
+                <a:latin typeface="Arial" panose="020B0604020202020204" pitchFamily="34" charset="0"/>
+                <a:cs typeface="Arial" panose="020B0604020202020204" pitchFamily="34" charset="0"/>
+              </a:rPr>
+              <a:t> </a:t>
+            </a:r>
+            <a:r>
+              <a:rPr lang="en-US" altLang="zh-CN" sz="800" dirty="0">
+                <a:latin typeface="Arial" panose="020B0604020202020204" pitchFamily="34" charset="0"/>
+                <a:cs typeface="Arial" panose="020B0604020202020204" pitchFamily="34" charset="0"/>
+              </a:rPr>
+              <a:t>-</a:t>
+            </a:r>
+            <a:r>
+              <a:rPr lang="zh-CN" altLang="en-US" sz="800" dirty="0">
+                <a:latin typeface="Arial" panose="020B0604020202020204" pitchFamily="34" charset="0"/>
+                <a:cs typeface="Arial" panose="020B0604020202020204" pitchFamily="34" charset="0"/>
+              </a:rPr>
+              <a:t> </a:t>
+            </a:r>
+            <a:r>
+              <a:rPr lang="en-US" altLang="zh-CN" sz="800" dirty="0">
+                <a:latin typeface="Arial" panose="020B0604020202020204" pitchFamily="34" charset="0"/>
+                <a:cs typeface="Arial" panose="020B0604020202020204" pitchFamily="34" charset="0"/>
+              </a:rPr>
+              <a:t>ZJH</a:t>
+            </a:r>
           </a:p>
           <a:p>
             <a:pPr algn="ctr">
@@ -24435,16 +23869,28 @@
               </a:lnSpc>
             </a:pPr>
             <a:r>
+              <a:rPr lang="zh-CN" altLang="zh-CN" sz="800" dirty="0"/>
+              <a:t>4</a:t>
+            </a:r>
+            <a:r>
+              <a:rPr lang="en-US" altLang="zh-CN" sz="800" dirty="0"/>
+              <a:t>,</a:t>
+            </a:r>
+            <a:r>
+              <a:rPr lang="zh-CN" altLang="zh-CN" sz="800" dirty="0"/>
+              <a:t>756</a:t>
+            </a:r>
+            <a:r>
+              <a:rPr lang="zh-CN" altLang="en-US" sz="800" dirty="0"/>
+              <a:t> </a:t>
+            </a:r>
+            <a:r>
               <a:rPr lang="en-US" altLang="zh-CN" sz="800" dirty="0">
                 <a:latin typeface="Arial" panose="020B0604020202020204" pitchFamily="34" charset="0"/>
                 <a:cs typeface="Arial" panose="020B0604020202020204" pitchFamily="34" charset="0"/>
               </a:rPr>
-              <a:t>496 images</a:t>
+              <a:t>images</a:t>
             </a:r>
-            <a:endParaRPr lang="en-US" altLang="zh-CN" sz="800" dirty="0">
-              <a:latin typeface="Arial" panose="020B0604020202020204" pitchFamily="34" charset="0"/>
-              <a:cs typeface="Arial" panose="020B0604020202020204" pitchFamily="34" charset="0"/>
-            </a:endParaRPr>
           </a:p>
         </p:txBody>
       </p:sp>
@@ -24485,13 +23931,6 @@
               </a:rPr>
               <a:t>LNM</a:t>
             </a:r>
-            <a:endParaRPr lang="en-US" altLang="zh-CN" sz="1000" b="1" dirty="0">
-              <a:solidFill>
-                <a:schemeClr val="bg1"/>
-              </a:solidFill>
-              <a:latin typeface="Arial" panose="020B0604020202020204" pitchFamily="34" charset="0"/>
-              <a:cs typeface="Arial" panose="020B0604020202020204" pitchFamily="34" charset="0"/>
-            </a:endParaRPr>
           </a:p>
         </p:txBody>
       </p:sp>
@@ -24503,8 +23942,8 @@
         </p:nvSpPr>
         <p:spPr>
           <a:xfrm>
-            <a:off x="8514080" y="5585145"/>
-            <a:ext cx="1904365" cy="303530"/>
+            <a:off x="8514081" y="5585145"/>
+            <a:ext cx="1016492" cy="303530"/>
           </a:xfrm>
           <a:prstGeom prst="rect">
             <a:avLst/>
@@ -24536,10 +23975,6 @@
               </a:rPr>
               <a:t>,</a:t>
             </a:r>
-            <a:endParaRPr lang="en-US" altLang="zh-CN" sz="800" dirty="0">
-              <a:latin typeface="Arial" panose="020B0604020202020204" pitchFamily="34" charset="0"/>
-              <a:cs typeface="Arial" panose="020B0604020202020204" pitchFamily="34" charset="0"/>
-            </a:endParaRPr>
           </a:p>
           <a:p>
             <a:pPr algn="ctr">
@@ -24554,10 +23989,6 @@
               </a:rPr>
               <a:t>338 images</a:t>
             </a:r>
-            <a:endParaRPr lang="en-US" altLang="zh-CN" sz="800" dirty="0">
-              <a:latin typeface="Arial" panose="020B0604020202020204" pitchFamily="34" charset="0"/>
-              <a:cs typeface="Arial" panose="020B0604020202020204" pitchFamily="34" charset="0"/>
-            </a:endParaRPr>
           </a:p>
         </p:txBody>
       </p:sp>
@@ -24590,13 +24021,8 @@
                   <a:schemeClr val="bg1"/>
                 </a:solidFill>
               </a:rPr>
-              <a:t>Cline-clip</a:t>
+              <a:t>Cine-clip</a:t>
             </a:r>
-            <a:endParaRPr lang="en-US" altLang="zh-CN" sz="800" dirty="0">
-              <a:solidFill>
-                <a:schemeClr val="bg1"/>
-              </a:solidFill>
-            </a:endParaRPr>
           </a:p>
           <a:p>
             <a:pPr algn="ctr"/>
@@ -24608,11 +24034,6 @@
               </a:rPr>
               <a:t>17,417</a:t>
             </a:r>
-            <a:endParaRPr lang="en-US" altLang="zh-CN" sz="800" dirty="0">
-              <a:solidFill>
-                <a:schemeClr val="bg1"/>
-              </a:solidFill>
-            </a:endParaRPr>
           </a:p>
         </p:txBody>
       </p:sp>
@@ -24663,11 +24084,6 @@
               </a:rPr>
               <a:t>15,186</a:t>
             </a:r>
-            <a:endParaRPr lang="en-US" altLang="zh-CN" sz="800" dirty="0">
-              <a:solidFill>
-                <a:schemeClr val="bg1"/>
-              </a:solidFill>
-            </a:endParaRPr>
           </a:p>
         </p:txBody>
       </p:sp>
@@ -24716,13 +24132,8 @@
                   <a:schemeClr val="bg1"/>
                 </a:solidFill>
               </a:rPr>
-              <a:t>11,635</a:t>
+              <a:t>11,631</a:t>
             </a:r>
-            <a:endParaRPr lang="en-US" altLang="zh-CN" sz="800" dirty="0">
-              <a:solidFill>
-                <a:schemeClr val="bg1"/>
-              </a:solidFill>
-            </a:endParaRPr>
           </a:p>
         </p:txBody>
       </p:sp>
@@ -24750,34 +24161,24 @@
           <a:p>
             <a:pPr algn="ctr"/>
             <a:r>
-              <a:rPr lang="en-US" altLang="zh-CN" sz="800">
+              <a:rPr lang="en-US" altLang="zh-CN" sz="800" dirty="0">
                 <a:solidFill>
                   <a:schemeClr val="bg1"/>
                 </a:solidFill>
               </a:rPr>
               <a:t>TN3K</a:t>
             </a:r>
-            <a:endParaRPr lang="en-US" altLang="zh-CN" sz="800">
-              <a:solidFill>
-                <a:schemeClr val="bg1"/>
-              </a:solidFill>
-            </a:endParaRPr>
           </a:p>
           <a:p>
             <a:pPr algn="ctr"/>
             <a:r>
-              <a:rPr lang="en-US" altLang="zh-CN" sz="800">
+              <a:rPr lang="en-US" altLang="zh-CN" sz="800" dirty="0">
                 <a:solidFill>
                   <a:schemeClr val="bg1"/>
                 </a:solidFill>
               </a:rPr>
-              <a:t>3,493</a:t>
+              <a:t>5,347</a:t>
             </a:r>
-            <a:endParaRPr lang="en-US" altLang="zh-CN" sz="800">
-              <a:solidFill>
-                <a:schemeClr val="bg1"/>
-              </a:solidFill>
-            </a:endParaRPr>
           </a:p>
         </p:txBody>
       </p:sp>
@@ -24836,11 +24237,6 @@
               </a:rPr>
               <a:t>7,288</a:t>
             </a:r>
-            <a:endParaRPr lang="en-US" altLang="zh-CN" sz="800" dirty="0">
-              <a:solidFill>
-                <a:schemeClr val="bg1"/>
-              </a:solidFill>
-            </a:endParaRPr>
           </a:p>
         </p:txBody>
       </p:sp>
@@ -24868,34 +24264,24 @@
           <a:p>
             <a:pPr algn="ctr"/>
             <a:r>
-              <a:rPr lang="en-US" altLang="zh-CN" sz="800">
+              <a:rPr lang="en-US" altLang="zh-CN" sz="800" dirty="0">
                 <a:solidFill>
                   <a:schemeClr val="bg1"/>
                 </a:solidFill>
               </a:rPr>
               <a:t>PKTN</a:t>
             </a:r>
-            <a:endParaRPr lang="en-US" altLang="zh-CN" sz="800">
-              <a:solidFill>
-                <a:schemeClr val="bg1"/>
-              </a:solidFill>
-            </a:endParaRPr>
           </a:p>
           <a:p>
             <a:pPr algn="ctr"/>
             <a:r>
-              <a:rPr lang="en-US" altLang="zh-CN" sz="800">
+              <a:rPr lang="en-US" altLang="zh-CN" sz="800" dirty="0">
                 <a:solidFill>
                   <a:schemeClr val="bg1"/>
                 </a:solidFill>
               </a:rPr>
-              <a:t>1,005</a:t>
+              <a:t>1,003</a:t>
             </a:r>
-            <a:endParaRPr lang="en-US" altLang="zh-CN" sz="800">
-              <a:solidFill>
-                <a:schemeClr val="bg1"/>
-              </a:solidFill>
-            </a:endParaRPr>
           </a:p>
         </p:txBody>
       </p:sp>
@@ -24930,11 +24316,6 @@
               </a:rPr>
               <a:t>DDTI</a:t>
             </a:r>
-            <a:endParaRPr lang="en-US" altLang="zh-CN" sz="800" dirty="0">
-              <a:solidFill>
-                <a:schemeClr val="bg1"/>
-              </a:solidFill>
-            </a:endParaRPr>
           </a:p>
           <a:p>
             <a:pPr algn="ctr"/>
@@ -24946,11 +24327,6 @@
               </a:rPr>
               <a:t>637</a:t>
             </a:r>
-            <a:endParaRPr lang="en-US" altLang="zh-CN" sz="800" dirty="0">
-              <a:solidFill>
-                <a:schemeClr val="bg1"/>
-              </a:solidFill>
-            </a:endParaRPr>
           </a:p>
         </p:txBody>
       </p:sp>
@@ -24986,7 +24362,6 @@
               <a:rPr lang="en-US" altLang="zh-CN" sz="1200" dirty="0"/>
               <a:t>Agentic nodule mask generation</a:t>
             </a:r>
-            <a:endParaRPr lang="en-US" altLang="zh-CN" sz="1200" dirty="0"/>
           </a:p>
           <a:p>
             <a:pPr indent="0">
@@ -25000,7 +24375,6 @@
               <a:rPr lang="en-US" altLang="zh-CN" sz="1200" dirty="0"/>
               <a:t>Clinician-auditable refinement</a:t>
             </a:r>
-            <a:endParaRPr lang="en-US" altLang="zh-CN" sz="1200" dirty="0"/>
           </a:p>
           <a:p>
             <a:pPr indent="0">
@@ -25014,7 +24388,6 @@
               <a:rPr lang="en-US" altLang="zh-CN" sz="1200" dirty="0"/>
               <a:t>Traceable tool calls</a:t>
             </a:r>
-            <a:endParaRPr lang="en-US" altLang="zh-CN" sz="1200" dirty="0"/>
           </a:p>
         </p:txBody>
       </p:sp>
@@ -25051,7 +24424,6 @@
               <a:rPr lang="en-US" altLang="zh-CN" sz="1200" dirty="0"/>
               <a:t>Auditable malignancy assessment</a:t>
             </a:r>
-            <a:endParaRPr lang="en-US" altLang="zh-CN" sz="1200" dirty="0"/>
           </a:p>
           <a:p>
             <a:pPr algn="r">
@@ -25066,7 +24438,6 @@
               <a:rPr lang="en-US" altLang="zh-CN" sz="1200" dirty="0"/>
               <a:t>Radiomic feature analysis</a:t>
             </a:r>
-            <a:endParaRPr lang="en-US" altLang="zh-CN" sz="1200" dirty="0"/>
           </a:p>
           <a:p>
             <a:pPr algn="r">
@@ -25081,7 +24452,6 @@
               <a:rPr lang="en-US" altLang="zh-CN" sz="1200" dirty="0"/>
               <a:t>SHAP-based explanation</a:t>
             </a:r>
-            <a:endParaRPr lang="en-US" altLang="zh-CN" sz="1200" dirty="0"/>
           </a:p>
         </p:txBody>
       </p:sp>
@@ -25115,7 +24485,6 @@
               <a:rPr lang="en-US" altLang="zh-CN" sz="1200" dirty="0"/>
               <a:t>Ultrasound-based report drafting</a:t>
             </a:r>
-            <a:endParaRPr lang="en-US" altLang="zh-CN" sz="1200" dirty="0"/>
           </a:p>
           <a:p>
             <a:pPr>
@@ -25127,7 +24496,6 @@
               <a:rPr lang="en-US" altLang="zh-CN" sz="1200" dirty="0"/>
               <a:t>Image and video interpretation</a:t>
             </a:r>
-            <a:endParaRPr lang="en-US" altLang="zh-CN" sz="1200" dirty="0"/>
           </a:p>
         </p:txBody>
       </p:sp>
@@ -25160,10 +24528,6 @@
               </a:rPr>
               <a:t>a</a:t>
             </a:r>
-            <a:endParaRPr lang="en-US" altLang="zh-CN" sz="2400" b="1">
-              <a:latin typeface="Arial" panose="020B0604020202020204" pitchFamily="34" charset="0"/>
-              <a:cs typeface="Arial" panose="020B0604020202020204" pitchFamily="34" charset="0"/>
-            </a:endParaRPr>
           </a:p>
         </p:txBody>
       </p:sp>
@@ -25196,10 +24560,6 @@
               </a:rPr>
               <a:t>b</a:t>
             </a:r>
-            <a:endParaRPr lang="en-US" altLang="zh-CN" sz="2400" b="1" dirty="0">
-              <a:latin typeface="Arial" panose="020B0604020202020204" pitchFamily="34" charset="0"/>
-              <a:cs typeface="Arial" panose="020B0604020202020204" pitchFamily="34" charset="0"/>
-            </a:endParaRPr>
           </a:p>
         </p:txBody>
       </p:sp>
@@ -25232,10 +24592,6 @@
               </a:rPr>
               <a:t>c</a:t>
             </a:r>
-            <a:endParaRPr lang="en-US" altLang="zh-CN" sz="2400" b="1" dirty="0">
-              <a:latin typeface="Arial" panose="020B0604020202020204" pitchFamily="34" charset="0"/>
-              <a:cs typeface="Arial" panose="020B0604020202020204" pitchFamily="34" charset="0"/>
-            </a:endParaRPr>
           </a:p>
         </p:txBody>
       </p:sp>
@@ -25317,7 +24673,7 @@
             <p:nvPr/>
           </p:nvPicPr>
           <p:blipFill>
-            <a:blip r:embed="rId7">
+            <a:blip>
               <a:extLst>
                 <a:ext uri="{96DAC541-7B7A-43D3-8B79-37D633B846F1}">
                   <asvg:svgBlip xmlns:asvg="http://schemas.microsoft.com/office/drawing/2016/SVG/main" r:embed="rId8"/>
@@ -25369,11 +24725,6 @@
                 </a:rPr>
                 <a:t>ThyroidXAgent</a:t>
               </a:r>
-              <a:endParaRPr lang="en-US" altLang="zh-CN" sz="1400" b="1" dirty="0">
-                <a:solidFill>
-                  <a:schemeClr val="bg1"/>
-                </a:solidFill>
-              </a:endParaRPr>
             </a:p>
           </p:txBody>
         </p:sp>
@@ -25386,15 +24737,15 @@
           </p:cNvPicPr>
           <p:nvPr>
             <p:custDataLst>
-              <p:tags r:id="rId9"/>
+              <p:tags r:id="rId1"/>
             </p:custDataLst>
           </p:nvPr>
         </p:nvPicPr>
         <p:blipFill>
-          <a:blip r:embed="rId10">
+          <a:blip>
             <a:extLst>
               <a:ext uri="{96DAC541-7B7A-43D3-8B79-37D633B846F1}">
-                <asvg:svgBlip xmlns:asvg="http://schemas.microsoft.com/office/drawing/2016/SVG/main" r:embed="rId11"/>
+                <asvg:svgBlip xmlns:asvg="http://schemas.microsoft.com/office/drawing/2016/SVG/main" r:embed="rId9"/>
               </a:ext>
             </a:extLst>
           </a:blip>
@@ -25839,10 +25190,10 @@
                 <p:nvPr/>
               </p:nvPicPr>
               <p:blipFill>
-                <a:blip r:embed="rId12">
+                <a:blip>
                   <a:extLst>
                     <a:ext uri="{96DAC541-7B7A-43D3-8B79-37D633B846F1}">
-                      <asvg:svgBlip xmlns:asvg="http://schemas.microsoft.com/office/drawing/2016/SVG/main" r:embed="rId13"/>
+                      <asvg:svgBlip xmlns:asvg="http://schemas.microsoft.com/office/drawing/2016/SVG/main" r:embed="rId10"/>
                     </a:ext>
                   </a:extLst>
                 </a:blip>
@@ -25888,7 +25239,6 @@
                   <a:rPr lang="en-US" altLang="zh-CN" sz="800" dirty="0"/>
                   <a:t>Review and correction</a:t>
                 </a:r>
-                <a:endParaRPr lang="en-US" altLang="zh-CN" sz="800" dirty="0"/>
               </a:p>
             </p:txBody>
           </p:sp>
@@ -25920,7 +25270,6 @@
                 <a:rPr lang="en-US" altLang="zh-CN" sz="1200" dirty="0"/>
                 <a:t>Expert refinement</a:t>
               </a:r>
-              <a:endParaRPr lang="en-US" altLang="zh-CN" sz="1200" dirty="0"/>
             </a:p>
           </p:txBody>
         </p:sp>
@@ -25966,7 +25315,6 @@
                 <a:rPr lang="en-US" altLang="zh-CN" sz="1200" dirty="0"/>
                 <a:t>Refined outputs</a:t>
               </a:r>
-              <a:endParaRPr lang="en-US" altLang="zh-CN" sz="1200" dirty="0"/>
             </a:p>
           </p:txBody>
         </p:sp>
@@ -26208,10 +25556,10 @@
                 <p:nvPr/>
               </p:nvPicPr>
               <p:blipFill>
-                <a:blip r:embed="rId14">
+                <a:blip>
                   <a:extLst>
                     <a:ext uri="{96DAC541-7B7A-43D3-8B79-37D633B846F1}">
-                      <asvg:svgBlip xmlns:asvg="http://schemas.microsoft.com/office/drawing/2016/SVG/main" r:embed="rId15"/>
+                      <asvg:svgBlip xmlns:asvg="http://schemas.microsoft.com/office/drawing/2016/SVG/main" r:embed="rId11"/>
                     </a:ext>
                   </a:extLst>
                 </a:blip>
@@ -26257,7 +25605,6 @@
                   <a:rPr lang="en-US" altLang="zh-CN" sz="800" dirty="0"/>
                   <a:t>Refined mask</a:t>
                 </a:r>
-                <a:endParaRPr lang="en-US" altLang="zh-CN" sz="800" dirty="0"/>
               </a:p>
             </p:txBody>
           </p:sp>
@@ -26288,7 +25635,6 @@
                   <a:rPr lang="en-US" altLang="zh-CN" sz="800" dirty="0"/>
                   <a:t>Verified</a:t>
                 </a:r>
-                <a:endParaRPr lang="en-US" altLang="zh-CN" sz="800" dirty="0"/>
               </a:p>
               <a:p>
                 <a:pPr algn="ctr"/>
@@ -26296,7 +25642,6 @@
                   <a:rPr lang="en-US" altLang="zh-CN" sz="800" dirty="0"/>
                   <a:t>diagnosis</a:t>
                 </a:r>
-                <a:endParaRPr lang="en-US" altLang="zh-CN" sz="800" dirty="0"/>
               </a:p>
             </p:txBody>
           </p:sp>
@@ -26327,7 +25672,6 @@
                   <a:rPr lang="en-US" altLang="zh-CN" sz="800" dirty="0"/>
                   <a:t>Corrected</a:t>
                 </a:r>
-                <a:endParaRPr lang="en-US" altLang="zh-CN" sz="800" dirty="0"/>
               </a:p>
               <a:p>
                 <a:pPr algn="ctr"/>
@@ -26335,7 +25679,6 @@
                   <a:rPr lang="en-US" altLang="zh-CN" sz="800" dirty="0"/>
                   <a:t>report</a:t>
                 </a:r>
-                <a:endParaRPr lang="en-US" altLang="zh-CN" sz="800" dirty="0"/>
               </a:p>
             </p:txBody>
           </p:sp>
@@ -26778,10 +26121,10 @@
               <p:nvPr/>
             </p:nvPicPr>
             <p:blipFill>
-              <a:blip r:embed="rId16">
+              <a:blip>
                 <a:extLst>
                   <a:ext uri="{96DAC541-7B7A-43D3-8B79-37D633B846F1}">
-                    <asvg:svgBlip xmlns:asvg="http://schemas.microsoft.com/office/drawing/2016/SVG/main" r:embed="rId17"/>
+                    <asvg:svgBlip xmlns:asvg="http://schemas.microsoft.com/office/drawing/2016/SVG/main" r:embed="rId12"/>
                   </a:ext>
                 </a:extLst>
               </a:blip>
@@ -26827,7 +26170,6 @@
                 <a:rPr lang="en-US" altLang="zh-CN" sz="1200"/>
                 <a:t>Evolving Database</a:t>
               </a:r>
-              <a:endParaRPr lang="en-US" altLang="zh-CN" sz="1200"/>
             </a:p>
           </p:txBody>
         </p:sp>
@@ -26858,7 +26200,6 @@
                 <a:rPr lang="en-US" altLang="zh-CN" sz="800" dirty="0"/>
                 <a:t>High-quality, expert-refined data repository</a:t>
               </a:r>
-              <a:endParaRPr lang="en-US" altLang="zh-CN" sz="800" dirty="0"/>
             </a:p>
           </p:txBody>
         </p:sp>
@@ -26886,10 +26227,10 @@
             <p:nvPr/>
           </p:nvPicPr>
           <p:blipFill>
-            <a:blip r:embed="rId18">
+            <a:blip>
               <a:extLst>
                 <a:ext uri="{96DAC541-7B7A-43D3-8B79-37D633B846F1}">
-                  <asvg:svgBlip xmlns:asvg="http://schemas.microsoft.com/office/drawing/2016/SVG/main" r:embed="rId19"/>
+                  <asvg:svgBlip xmlns:asvg="http://schemas.microsoft.com/office/drawing/2016/SVG/main" r:embed="rId13"/>
                 </a:ext>
               </a:extLst>
             </a:blip>
@@ -26934,7 +26275,6 @@
                 <a:rPr lang="en-US" altLang="zh-CN" sz="1200" dirty="0"/>
                 <a:t>Model updating</a:t>
               </a:r>
-              <a:endParaRPr lang="en-US" altLang="zh-CN" sz="1200" dirty="0"/>
             </a:p>
           </p:txBody>
         </p:sp>
@@ -26977,7 +26317,6 @@
                 <a:rPr lang="en-US" altLang="zh-CN" sz="800" dirty="0"/>
                 <a:t>evolving</a:t>
               </a:r>
-              <a:endParaRPr lang="en-US" altLang="zh-CN" sz="800" dirty="0"/>
             </a:p>
           </p:txBody>
         </p:sp>
@@ -27009,7 +26348,6 @@
               <a:rPr lang="en-US" altLang="zh-CN" sz="1200" dirty="0"/>
               <a:t>Clinician-in-the-loop</a:t>
             </a:r>
-            <a:endParaRPr lang="en-US" altLang="zh-CN" sz="1200" dirty="0"/>
           </a:p>
         </p:txBody>
       </p:sp>
@@ -27044,7 +26382,6 @@
               <a:rPr lang="en-US" altLang="zh-CN" sz="1200" dirty="0"/>
               <a:t>Efficient and reliable diagnosis</a:t>
             </a:r>
-            <a:endParaRPr lang="en-US" altLang="zh-CN" sz="1200" dirty="0"/>
           </a:p>
         </p:txBody>
       </p:sp>
@@ -27202,10 +26539,10 @@
           <p:nvPr/>
         </p:nvPicPr>
         <p:blipFill>
-          <a:blip r:embed="rId20">
+          <a:blip>
             <a:extLst>
               <a:ext uri="{96DAC541-7B7A-43D3-8B79-37D633B846F1}">
-                <asvg:svgBlip xmlns:asvg="http://schemas.microsoft.com/office/drawing/2016/SVG/main" r:embed="rId21"/>
+                <asvg:svgBlip xmlns:asvg="http://schemas.microsoft.com/office/drawing/2016/SVG/main" r:embed="rId14"/>
               </a:ext>
             </a:extLst>
           </a:blip>
@@ -27264,7 +26601,6 @@
                 <a:rPr lang="en-US" altLang="zh-CN" sz="1200" dirty="0"/>
                 <a:t>Initial outputs</a:t>
               </a:r>
-              <a:endParaRPr lang="en-US" altLang="zh-CN" sz="1200" dirty="0"/>
             </a:p>
           </p:txBody>
         </p:sp>
@@ -27309,7 +26645,6 @@
                   <a:rPr lang="en-US" altLang="zh-CN" sz="800" dirty="0"/>
                   <a:t>mask</a:t>
                 </a:r>
-                <a:endParaRPr lang="en-US" altLang="zh-CN" sz="800" dirty="0"/>
               </a:p>
             </p:txBody>
           </p:sp>
@@ -27340,7 +26675,6 @@
                   <a:rPr lang="en-US" altLang="zh-CN" sz="800" dirty="0"/>
                   <a:t>diagnosis</a:t>
                 </a:r>
-                <a:endParaRPr lang="en-US" altLang="zh-CN" sz="800" dirty="0"/>
               </a:p>
             </p:txBody>
           </p:sp>
@@ -27371,7 +26705,6 @@
                   <a:rPr lang="en-US" altLang="zh-CN" sz="800" dirty="0"/>
                   <a:t>report</a:t>
                 </a:r>
-                <a:endParaRPr lang="en-US" altLang="zh-CN" sz="800" dirty="0"/>
               </a:p>
             </p:txBody>
           </p:sp>
@@ -27384,10 +26717,10 @@
               <p:nvPr/>
             </p:nvPicPr>
             <p:blipFill>
-              <a:blip r:embed="rId22">
+              <a:blip>
                 <a:extLst>
                   <a:ext uri="{96DAC541-7B7A-43D3-8B79-37D633B846F1}">
-                    <asvg:svgBlip xmlns:asvg="http://schemas.microsoft.com/office/drawing/2016/SVG/main" r:embed="rId23"/>
+                    <asvg:svgBlip xmlns:asvg="http://schemas.microsoft.com/office/drawing/2016/SVG/main" r:embed="rId15"/>
                   </a:ext>
                 </a:extLst>
               </a:blip>
@@ -27430,10 +26763,10 @@
             <p:nvPr/>
           </p:nvPicPr>
           <p:blipFill>
-            <a:blip r:embed="rId24">
+            <a:blip>
               <a:extLst>
                 <a:ext uri="{96DAC541-7B7A-43D3-8B79-37D633B846F1}">
-                  <asvg:svgBlip xmlns:asvg="http://schemas.microsoft.com/office/drawing/2016/SVG/main" r:embed="rId25"/>
+                  <asvg:svgBlip xmlns:asvg="http://schemas.microsoft.com/office/drawing/2016/SVG/main" r:embed="rId16"/>
                 </a:ext>
               </a:extLst>
             </a:blip>
@@ -27478,7 +26811,6 @@
                 <a:rPr lang="en-US" altLang="zh-CN" sz="1200" dirty="0"/>
                 <a:t>Curated feedback</a:t>
               </a:r>
-              <a:endParaRPr lang="en-US" altLang="zh-CN" sz="1200" dirty="0"/>
             </a:p>
           </p:txBody>
         </p:sp>
@@ -27512,7 +26844,6 @@
                 <a:rPr lang="en-US" altLang="zh-CN" sz="800" dirty="0"/>
                 <a:t>Verified corrections and annotations</a:t>
               </a:r>
-              <a:endParaRPr lang="en-US" altLang="zh-CN" sz="800" dirty="0"/>
             </a:p>
           </p:txBody>
         </p:sp>
@@ -27687,7 +27018,6 @@
               <a:rPr lang="en-US" altLang="zh-CN" sz="900" dirty="0"/>
               <a:t>Expert review</a:t>
             </a:r>
-            <a:endParaRPr lang="en-US" altLang="zh-CN" sz="900" dirty="0"/>
           </a:p>
         </p:txBody>
       </p:sp>
@@ -27717,7 +27047,6 @@
               <a:rPr lang="en-US" altLang="zh-CN" sz="900" dirty="0"/>
               <a:t>After refinement</a:t>
             </a:r>
-            <a:endParaRPr lang="en-US" altLang="zh-CN" sz="900" dirty="0"/>
           </a:p>
         </p:txBody>
       </p:sp>
@@ -27747,7 +27076,6 @@
               <a:rPr lang="en-US" altLang="zh-CN" sz="900"/>
               <a:t>Stored as feedback</a:t>
             </a:r>
-            <a:endParaRPr lang="en-US" altLang="zh-CN" sz="900"/>
           </a:p>
         </p:txBody>
       </p:sp>
@@ -27777,7 +27105,6 @@
               <a:rPr lang="en-US" altLang="zh-CN" sz="900"/>
               <a:t>Used for updating</a:t>
             </a:r>
-            <a:endParaRPr lang="en-US" altLang="zh-CN" sz="900"/>
           </a:p>
         </p:txBody>
       </p:sp>
@@ -27808,7 +27135,6 @@
               <a:rPr lang="en-US" altLang="zh-CN" sz="700" dirty="0"/>
               <a:t>Ours newly contributed</a:t>
             </a:r>
-            <a:endParaRPr lang="en-US" altLang="zh-CN" sz="700" dirty="0"/>
           </a:p>
         </p:txBody>
       </p:sp>
@@ -28022,7 +27348,6 @@
                   <a:rPr lang="en-US" altLang="zh-CN" sz="900" dirty="0"/>
                   <a:t>145 cases videos</a:t>
                 </a:r>
-                <a:endParaRPr lang="en-US" altLang="zh-CN" sz="900" dirty="0"/>
               </a:p>
             </p:txBody>
           </p:sp>
@@ -28064,13 +27389,6 @@
                 </a:rPr>
                 <a:t>TNVideo</a:t>
               </a:r>
-              <a:endParaRPr lang="en-US" altLang="zh-CN" sz="1000" b="1" dirty="0">
-                <a:solidFill>
-                  <a:schemeClr val="bg1"/>
-                </a:solidFill>
-                <a:latin typeface="Arial" panose="020B0604020202020204" pitchFamily="34" charset="0"/>
-                <a:cs typeface="Arial" panose="020B0604020202020204" pitchFamily="34" charset="0"/>
-              </a:endParaRPr>
             </a:p>
           </p:txBody>
         </p:sp>
@@ -28102,7 +27420,6 @@
               <a:rPr lang="en-US" altLang="zh-CN" sz="700" dirty="0"/>
               <a:t>Public</a:t>
             </a:r>
-            <a:endParaRPr lang="en-US" altLang="zh-CN" sz="700" dirty="0"/>
           </a:p>
           <a:p>
             <a:pPr algn="ctr"/>
@@ -28110,7 +27427,6 @@
               <a:rPr lang="en-US" altLang="zh-CN" sz="700" dirty="0"/>
               <a:t>datasets</a:t>
             </a:r>
-            <a:endParaRPr lang="en-US" altLang="zh-CN" sz="700" dirty="0"/>
           </a:p>
         </p:txBody>
       </p:sp>
@@ -28141,7 +27457,6 @@
               <a:rPr lang="en-US" altLang="zh-CN" sz="700" dirty="0"/>
               <a:t>Ours newly contributed</a:t>
             </a:r>
-            <a:endParaRPr lang="en-US" altLang="zh-CN" sz="700" dirty="0"/>
           </a:p>
         </p:txBody>
       </p:sp>
@@ -28378,15 +27693,8 @@
                     <a:latin typeface="Arial" panose="020B0604020202020204" pitchFamily="34" charset="0"/>
                     <a:cs typeface="Arial" panose="020B0604020202020204" pitchFamily="34" charset="0"/>
                   </a:rPr>
-                  <a:t>ZJH-2K</a:t>
+                  <a:t>ZJH-8K</a:t>
                 </a:r>
-                <a:endParaRPr lang="en-US" altLang="zh-CN" sz="1000" b="1" dirty="0">
-                  <a:solidFill>
-                    <a:schemeClr val="bg1"/>
-                  </a:solidFill>
-                  <a:latin typeface="Arial" panose="020B0604020202020204" pitchFamily="34" charset="0"/>
-                  <a:cs typeface="Arial" panose="020B0604020202020204" pitchFamily="34" charset="0"/>
-                </a:endParaRPr>
               </a:p>
             </p:txBody>
           </p:sp>
@@ -28416,9 +27724,8 @@
               <a:pPr algn="ctr"/>
               <a:r>
                 <a:rPr lang="en-US" altLang="zh-CN" sz="800" dirty="0"/>
-                <a:t>1,854 images</a:t>
+                <a:t>7,958 images</a:t>
               </a:r>
-              <a:endParaRPr lang="en-US" altLang="zh-CN" sz="800" dirty="0"/>
             </a:p>
           </p:txBody>
         </p:sp>
@@ -28658,13 +27965,6 @@
                   </a:rPr>
                   <a:t>TNVideo</a:t>
                 </a:r>
-                <a:endParaRPr lang="en-US" altLang="zh-CN" sz="1000" b="1" dirty="0">
-                  <a:solidFill>
-                    <a:schemeClr val="bg1"/>
-                  </a:solidFill>
-                  <a:latin typeface="Arial" panose="020B0604020202020204" pitchFamily="34" charset="0"/>
-                  <a:cs typeface="Arial" panose="020B0604020202020204" pitchFamily="34" charset="0"/>
-                </a:endParaRPr>
               </a:p>
             </p:txBody>
           </p:sp>
@@ -28696,7 +27996,6 @@
                 <a:rPr lang="en-US" altLang="zh-CN" sz="800" dirty="0"/>
                 <a:t>148 cases</a:t>
               </a:r>
-              <a:endParaRPr lang="en-US" altLang="zh-CN" sz="800" dirty="0"/>
             </a:p>
           </p:txBody>
         </p:sp>
@@ -28728,7 +28027,6 @@
               <a:rPr lang="en-US" altLang="zh-CN" sz="700" dirty="0"/>
               <a:t>Ours newly contributed</a:t>
             </a:r>
-            <a:endParaRPr lang="en-US" altLang="zh-CN" sz="700" dirty="0"/>
           </a:p>
         </p:txBody>
       </p:sp>
@@ -28965,15 +28263,8 @@
                     <a:latin typeface="Arial" panose="020B0604020202020204" pitchFamily="34" charset="0"/>
                     <a:cs typeface="Arial" panose="020B0604020202020204" pitchFamily="34" charset="0"/>
                   </a:rPr>
-                  <a:t>ZJH-2K</a:t>
+                  <a:t>ZJH-8K</a:t>
                 </a:r>
-                <a:endParaRPr lang="en-US" altLang="zh-CN" sz="1000" b="1" dirty="0">
-                  <a:solidFill>
-                    <a:schemeClr val="bg1"/>
-                  </a:solidFill>
-                  <a:latin typeface="Arial" panose="020B0604020202020204" pitchFamily="34" charset="0"/>
-                  <a:cs typeface="Arial" panose="020B0604020202020204" pitchFamily="34" charset="0"/>
-                </a:endParaRPr>
               </a:p>
             </p:txBody>
           </p:sp>
@@ -29003,9 +28294,8 @@
               <a:pPr algn="ctr"/>
               <a:r>
                 <a:rPr lang="en-US" altLang="zh-CN" sz="800" dirty="0"/>
-                <a:t>1,854 cases</a:t>
+                <a:t>7,958 cases</a:t>
               </a:r>
-              <a:endParaRPr lang="en-US" altLang="zh-CN" sz="800" dirty="0"/>
             </a:p>
           </p:txBody>
         </p:sp>
@@ -29245,13 +28535,6 @@
                   </a:rPr>
                   <a:t>TNVideo</a:t>
                 </a:r>
-                <a:endParaRPr lang="en-US" altLang="zh-CN" sz="1000" b="1" dirty="0">
-                  <a:solidFill>
-                    <a:schemeClr val="bg1"/>
-                  </a:solidFill>
-                  <a:latin typeface="Arial" panose="020B0604020202020204" pitchFamily="34" charset="0"/>
-                  <a:cs typeface="Arial" panose="020B0604020202020204" pitchFamily="34" charset="0"/>
-                </a:endParaRPr>
               </a:p>
             </p:txBody>
           </p:sp>
@@ -29283,7 +28566,6 @@
                 <a:rPr lang="en-US" altLang="zh-CN" sz="800" dirty="0"/>
                 <a:t>148 cases</a:t>
               </a:r>
-              <a:endParaRPr lang="en-US" altLang="zh-CN" sz="800" dirty="0"/>
             </a:p>
           </p:txBody>
         </p:sp>
@@ -29317,10 +28599,6 @@
               </a:rPr>
               <a:t>d</a:t>
             </a:r>
-            <a:endParaRPr lang="en-US" altLang="zh-CN" sz="2400" b="1" dirty="0">
-              <a:latin typeface="Arial" panose="020B0604020202020204" pitchFamily="34" charset="0"/>
-              <a:cs typeface="Arial" panose="020B0604020202020204" pitchFamily="34" charset="0"/>
-            </a:endParaRPr>
           </a:p>
         </p:txBody>
       </p:sp>
@@ -29409,7 +28687,7 @@
               <p:nvPr/>
             </p:nvPicPr>
             <p:blipFill>
-              <a:blip r:embed="rId7">
+              <a:blip>
                 <a:extLst>
                   <a:ext uri="{96DAC541-7B7A-43D3-8B79-37D633B846F1}">
                     <asvg:svgBlip xmlns:asvg="http://schemas.microsoft.com/office/drawing/2016/SVG/main" r:embed="rId8"/>
@@ -29461,11 +28739,6 @@
                   </a:rPr>
                   <a:t>ThyroidX</a:t>
                 </a:r>
-                <a:endParaRPr lang="en-US" altLang="zh-CN" sz="800" b="1" dirty="0">
-                  <a:solidFill>
-                    <a:schemeClr val="bg1"/>
-                  </a:solidFill>
-                </a:endParaRPr>
               </a:p>
               <a:p>
                 <a:pPr algn="ctr"/>
@@ -29477,11 +28750,6 @@
                   </a:rPr>
                   <a:t>Agent</a:t>
                 </a:r>
-                <a:endParaRPr lang="en-US" altLang="zh-CN" sz="800" b="1" dirty="0">
-                  <a:solidFill>
-                    <a:schemeClr val="bg1"/>
-                  </a:solidFill>
-                </a:endParaRPr>
               </a:p>
             </p:txBody>
           </p:sp>
@@ -29509,10 +28777,10 @@
               <p:nvPr/>
             </p:nvPicPr>
             <p:blipFill>
-              <a:blip r:embed="rId26">
+              <a:blip>
                 <a:extLst>
                   <a:ext uri="{96DAC541-7B7A-43D3-8B79-37D633B846F1}">
-                    <asvg:svgBlip xmlns:asvg="http://schemas.microsoft.com/office/drawing/2016/SVG/main" r:embed="rId27"/>
+                    <asvg:svgBlip xmlns:asvg="http://schemas.microsoft.com/office/drawing/2016/SVG/main" r:embed="rId17"/>
                   </a:ext>
                 </a:extLst>
               </a:blip>
@@ -29550,13 +28818,13 @@
               <a:bodyPr wrap="square" lIns="36195" rIns="36195" rtlCol="0">
                 <a:spAutoFit/>
               </a:bodyPr>
+              <a:lstStyle/>
               <a:p>
                 <a:pPr algn="ctr"/>
                 <a:r>
                   <a:rPr lang="en-US" altLang="zh-CN" sz="900"/>
                   <a:t>Training and internal validation</a:t>
                 </a:r>
-                <a:endParaRPr lang="en-US" altLang="zh-CN" sz="900"/>
               </a:p>
             </p:txBody>
           </p:sp>
@@ -29580,6 +28848,7 @@
               <a:bodyPr wrap="square" rtlCol="0">
                 <a:spAutoFit/>
               </a:bodyPr>
+              <a:lstStyle/>
               <a:p>
                 <a:pPr algn="ctr"/>
                 <a:r>
@@ -29590,11 +28859,6 @@
                   </a:rPr>
                   <a:t>10 centers</a:t>
                 </a:r>
-                <a:endParaRPr lang="en-US" altLang="zh-CN" sz="1000">
-                  <a:solidFill>
-                    <a:srgbClr val="0D3565"/>
-                  </a:solidFill>
-                </a:endParaRPr>
               </a:p>
             </p:txBody>
           </p:sp>
@@ -29622,10 +28886,10 @@
               <p:nvPr/>
             </p:nvPicPr>
             <p:blipFill>
-              <a:blip r:embed="rId28">
+              <a:blip>
                 <a:extLst>
                   <a:ext uri="{96DAC541-7B7A-43D3-8B79-37D633B846F1}">
-                    <asvg:svgBlip xmlns:asvg="http://schemas.microsoft.com/office/drawing/2016/SVG/main" r:embed="rId29"/>
+                    <asvg:svgBlip xmlns:asvg="http://schemas.microsoft.com/office/drawing/2016/SVG/main" r:embed="rId18"/>
                   </a:ext>
                 </a:extLst>
               </a:blip>
@@ -29663,13 +28927,13 @@
               <a:bodyPr wrap="square" rtlCol="0">
                 <a:spAutoFit/>
               </a:bodyPr>
+              <a:lstStyle/>
               <a:p>
                 <a:pPr algn="ctr"/>
                 <a:r>
                   <a:rPr lang="en-US" altLang="zh-CN" sz="900"/>
                   <a:t>External validation</a:t>
                 </a:r>
-                <a:endParaRPr lang="en-US" altLang="zh-CN" sz="900"/>
               </a:p>
             </p:txBody>
           </p:sp>
@@ -29693,6 +28957,7 @@
               <a:bodyPr wrap="square" rtlCol="0">
                 <a:spAutoFit/>
               </a:bodyPr>
+              <a:lstStyle/>
               <a:p>
                 <a:pPr algn="ctr"/>
                 <a:r>
@@ -29703,11 +28968,6 @@
                   </a:rPr>
                   <a:t>35 centers</a:t>
                 </a:r>
-                <a:endParaRPr lang="en-US" altLang="zh-CN" sz="1000">
-                  <a:solidFill>
-                    <a:srgbClr val="EA6F17"/>
-                  </a:solidFill>
-                </a:endParaRPr>
               </a:p>
             </p:txBody>
           </p:sp>
@@ -30002,10 +29262,6 @@
                   </a:rPr>
                   <a:t>2,474 reports,</a:t>
                 </a:r>
-                <a:endParaRPr lang="en-US" altLang="zh-CN" sz="900" dirty="0">
-                  <a:latin typeface="Arial" panose="020B0604020202020204" pitchFamily="34" charset="0"/>
-                  <a:cs typeface="Arial" panose="020B0604020202020204" pitchFamily="34" charset="0"/>
-                </a:endParaRPr>
               </a:p>
               <a:p>
                 <a:pPr algn="ctr">
@@ -30020,10 +29276,6 @@
                   </a:rPr>
                   <a:t>15,921 images</a:t>
                 </a:r>
-                <a:endParaRPr lang="en-US" altLang="zh-CN" sz="900" dirty="0">
-                  <a:latin typeface="Arial" panose="020B0604020202020204" pitchFamily="34" charset="0"/>
-                  <a:cs typeface="Arial" panose="020B0604020202020204" pitchFamily="34" charset="0"/>
-                </a:endParaRPr>
               </a:p>
             </p:txBody>
           </p:sp>
@@ -30064,13 +29316,6 @@
                   </a:rPr>
                   <a:t>KMVE</a:t>
                 </a:r>
-                <a:endParaRPr lang="en-US" altLang="zh-CN" sz="1000" b="1" dirty="0">
-                  <a:solidFill>
-                    <a:schemeClr val="bg1"/>
-                  </a:solidFill>
-                  <a:latin typeface="Arial" panose="020B0604020202020204" pitchFamily="34" charset="0"/>
-                  <a:cs typeface="Arial" panose="020B0604020202020204" pitchFamily="34" charset="0"/>
-                </a:endParaRPr>
               </a:p>
             </p:txBody>
           </p:sp>
@@ -30103,7 +29348,6 @@
               <a:rPr lang="en-US" altLang="zh-CN" sz="700" dirty="0"/>
               <a:t>Public</a:t>
             </a:r>
-            <a:endParaRPr lang="en-US" altLang="zh-CN" sz="700" dirty="0"/>
           </a:p>
           <a:p>
             <a:pPr algn="ctr"/>
@@ -30111,7 +29355,6 @@
               <a:rPr lang="en-US" altLang="zh-CN" sz="700" dirty="0"/>
               <a:t>datasets</a:t>
             </a:r>
-            <a:endParaRPr lang="en-US" altLang="zh-CN" sz="700" dirty="0"/>
           </a:p>
         </p:txBody>
       </p:sp>
@@ -30152,13 +29395,6 @@
               </a:rPr>
               <a:t>SMU-HMC</a:t>
             </a:r>
-            <a:endParaRPr lang="en-US" altLang="zh-CN" sz="1000" b="1" dirty="0">
-              <a:solidFill>
-                <a:schemeClr val="bg1"/>
-              </a:solidFill>
-              <a:latin typeface="Arial" panose="020B0604020202020204" pitchFamily="34" charset="0"/>
-              <a:cs typeface="Arial" panose="020B0604020202020204" pitchFamily="34" charset="0"/>
-            </a:endParaRPr>
           </a:p>
         </p:txBody>
       </p:sp>
@@ -30501,11 +29737,6 @@
                           </a:rPr>
                           <a:t>ThyroidXAgent</a:t>
                         </a:r>
-                        <a:endParaRPr lang="en-US" altLang="zh-CN" sz="1400" b="1" dirty="0">
-                          <a:solidFill>
-                            <a:schemeClr val="bg1"/>
-                          </a:solidFill>
-                        </a:endParaRPr>
                       </a:p>
                     </p:txBody>
                   </p:sp>
@@ -30518,7 +29749,7 @@
                       <p:nvPr/>
                     </p:nvPicPr>
                     <p:blipFill>
-                      <a:blip r:embed="rId7">
+                      <a:blip>
                         <a:extLst>
                           <a:ext uri="{96DAC541-7B7A-43D3-8B79-37D633B846F1}">
                             <asvg:svgBlip xmlns:asvg="http://schemas.microsoft.com/office/drawing/2016/SVG/main" r:embed="rId8"/>
@@ -31232,10 +30463,10 @@
                       <p:nvPr/>
                     </p:nvPicPr>
                     <p:blipFill>
-                      <a:blip r:embed="rId30">
+                      <a:blip>
                         <a:extLst>
                           <a:ext uri="{96DAC541-7B7A-43D3-8B79-37D633B846F1}">
-                            <asvg:svgBlip xmlns:asvg="http://schemas.microsoft.com/office/drawing/2016/SVG/main" r:embed="rId31"/>
+                            <asvg:svgBlip xmlns:asvg="http://schemas.microsoft.com/office/drawing/2016/SVG/main" r:embed="rId19"/>
                           </a:ext>
                         </a:extLst>
                       </a:blip>
@@ -31262,10 +30493,10 @@
                       <p:nvPr/>
                     </p:nvPicPr>
                     <p:blipFill>
-                      <a:blip r:embed="rId32">
+                      <a:blip>
                         <a:extLst>
                           <a:ext uri="{96DAC541-7B7A-43D3-8B79-37D633B846F1}">
-                            <asvg:svgBlip xmlns:asvg="http://schemas.microsoft.com/office/drawing/2016/SVG/main" r:embed="rId33"/>
+                            <asvg:svgBlip xmlns:asvg="http://schemas.microsoft.com/office/drawing/2016/SVG/main" r:embed="rId20"/>
                           </a:ext>
                         </a:extLst>
                       </a:blip>
@@ -31595,10 +30826,10 @@
                         <p:nvPr/>
                       </p:nvPicPr>
                       <p:blipFill>
-                        <a:blip r:embed="rId34">
+                        <a:blip>
                           <a:extLst>
                             <a:ext uri="{96DAC541-7B7A-43D3-8B79-37D633B846F1}">
-                              <asvg:svgBlip xmlns:asvg="http://schemas.microsoft.com/office/drawing/2016/SVG/main" r:embed="rId35"/>
+                              <asvg:svgBlip xmlns:asvg="http://schemas.microsoft.com/office/drawing/2016/SVG/main" r:embed="rId21"/>
                             </a:ext>
                           </a:extLst>
                         </a:blip>
@@ -31715,10 +30946,10 @@
                       <p:nvPr/>
                     </p:nvPicPr>
                     <p:blipFill>
-                      <a:blip r:embed="rId36">
+                      <a:blip>
                         <a:extLst>
                           <a:ext uri="{96DAC541-7B7A-43D3-8B79-37D633B846F1}">
-                            <asvg:svgBlip xmlns:asvg="http://schemas.microsoft.com/office/drawing/2016/SVG/main" r:embed="rId37"/>
+                            <asvg:svgBlip xmlns:asvg="http://schemas.microsoft.com/office/drawing/2016/SVG/main" r:embed="rId22"/>
                           </a:ext>
                         </a:extLst>
                       </a:blip>
@@ -31976,10 +31207,10 @@
                         <p:nvPr/>
                       </p:nvPicPr>
                       <p:blipFill>
-                        <a:blip r:embed="rId38">
+                        <a:blip>
                           <a:extLst>
                             <a:ext uri="{96DAC541-7B7A-43D3-8B79-37D633B846F1}">
-                              <asvg:svgBlip xmlns:asvg="http://schemas.microsoft.com/office/drawing/2016/SVG/main" r:embed="rId39"/>
+                              <asvg:svgBlip xmlns:asvg="http://schemas.microsoft.com/office/drawing/2016/SVG/main" r:embed="rId23"/>
                             </a:ext>
                           </a:extLst>
                         </a:blip>
@@ -32254,10 +31485,10 @@
                         <p:nvPr/>
                       </p:nvPicPr>
                       <p:blipFill>
-                        <a:blip r:embed="rId40">
+                        <a:blip>
                           <a:extLst>
                             <a:ext uri="{96DAC541-7B7A-43D3-8B79-37D633B846F1}">
-                              <asvg:svgBlip xmlns:asvg="http://schemas.microsoft.com/office/drawing/2016/SVG/main" r:embed="rId41"/>
+                              <asvg:svgBlip xmlns:asvg="http://schemas.microsoft.com/office/drawing/2016/SVG/main" r:embed="rId24"/>
                             </a:ext>
                           </a:extLst>
                         </a:blip>
@@ -32285,10 +31516,10 @@
                       <p:nvPr/>
                     </p:nvPicPr>
                     <p:blipFill>
-                      <a:blip r:embed="rId42">
+                      <a:blip>
                         <a:extLst>
                           <a:ext uri="{96DAC541-7B7A-43D3-8B79-37D633B846F1}">
-                            <asvg:svgBlip xmlns:asvg="http://schemas.microsoft.com/office/drawing/2016/SVG/main" r:embed="rId43"/>
+                            <asvg:svgBlip xmlns:asvg="http://schemas.microsoft.com/office/drawing/2016/SVG/main" r:embed="rId25"/>
                           </a:ext>
                         </a:extLst>
                       </a:blip>
@@ -32858,6 +32089,7 @@
                     </p:style>
                     <p:txBody>
                       <a:bodyPr rtlCol="0" anchor="ctr"/>
+                      <a:lstStyle/>
                       <a:p>
                         <a:pPr algn="ctr"/>
                         <a:endParaRPr lang="zh-CN" altLang="en-US"/>
@@ -32873,10 +32105,10 @@
                       <p:nvPr/>
                     </p:nvPicPr>
                     <p:blipFill>
-                      <a:blip r:embed="rId44">
+                      <a:blip>
                         <a:extLst>
                           <a:ext uri="{96DAC541-7B7A-43D3-8B79-37D633B846F1}">
-                            <asvg:svgBlip xmlns:asvg="http://schemas.microsoft.com/office/drawing/2016/SVG/main" r:embed="rId45"/>
+                            <asvg:svgBlip xmlns:asvg="http://schemas.microsoft.com/office/drawing/2016/SVG/main" r:embed="rId26"/>
                           </a:ext>
                         </a:extLst>
                       </a:blip>
@@ -32939,6 +32171,7 @@
         </p:style>
         <p:txBody>
           <a:bodyPr rtlCol="0" anchor="ctr"/>
+          <a:lstStyle/>
           <a:p>
             <a:pPr algn="ctr"/>
             <a:endParaRPr lang="zh-CN" altLang="en-US"/>
@@ -32984,6 +32217,7 @@
         </p:style>
         <p:txBody>
           <a:bodyPr rtlCol="0" anchor="ctr"/>
+          <a:lstStyle/>
           <a:p>
             <a:pPr algn="ctr"/>
             <a:endParaRPr lang="zh-CN" altLang="en-US"/>
@@ -33029,6 +32263,7 @@
         </p:style>
         <p:txBody>
           <a:bodyPr rtlCol="0" anchor="ctr"/>
+          <a:lstStyle/>
           <a:p>
             <a:pPr algn="ctr"/>
             <a:endParaRPr lang="zh-CN" altLang="en-US"/>
@@ -33074,6 +32309,7 @@
         </p:style>
         <p:txBody>
           <a:bodyPr rtlCol="0" anchor="ctr"/>
+          <a:lstStyle/>
           <a:p>
             <a:pPr algn="ctr"/>
             <a:endParaRPr lang="zh-CN" altLang="en-US"/>
@@ -33119,6 +32355,7 @@
         </p:style>
         <p:txBody>
           <a:bodyPr rtlCol="0" anchor="ctr"/>
+          <a:lstStyle/>
           <a:p>
             <a:pPr algn="ctr"/>
             <a:endParaRPr lang="zh-CN" altLang="en-US"/>
@@ -33164,6 +32401,7 @@
         </p:style>
         <p:txBody>
           <a:bodyPr rtlCol="0" anchor="ctr"/>
+          <a:lstStyle/>
           <a:p>
             <a:pPr algn="ctr"/>
             <a:endParaRPr lang="zh-CN" altLang="en-US"/>
@@ -33209,6 +32447,7 @@
         </p:style>
         <p:txBody>
           <a:bodyPr rtlCol="0" anchor="ctr"/>
+          <a:lstStyle/>
           <a:p>
             <a:pPr algn="ctr"/>
             <a:endParaRPr lang="zh-CN" altLang="en-US"/>
@@ -33254,6 +32493,7 @@
         </p:style>
         <p:txBody>
           <a:bodyPr rtlCol="0" anchor="ctr"/>
+          <a:lstStyle/>
           <a:p>
             <a:pPr algn="ctr"/>
             <a:endParaRPr lang="zh-CN" altLang="en-US"/>
@@ -33299,6 +32539,7 @@
         </p:style>
         <p:txBody>
           <a:bodyPr rtlCol="0" anchor="ctr"/>
+          <a:lstStyle/>
           <a:p>
             <a:pPr algn="ctr"/>
             <a:endParaRPr lang="zh-CN" altLang="en-US"/>
@@ -33325,6 +32566,7 @@
           <a:bodyPr wrap="square" lIns="36195" rtlCol="0" anchor="t">
             <a:spAutoFit/>
           </a:bodyPr>
+          <a:lstStyle/>
           <a:p>
             <a:pPr>
               <a:lnSpc>
@@ -33337,9 +32579,6 @@
               </a:rPr>
               <a:t>Traceable tool-call records</a:t>
             </a:r>
-            <a:endParaRPr lang="en-US" altLang="zh-CN" sz="1200" dirty="0">
-              <a:sym typeface="+mn-ea"/>
-            </a:endParaRPr>
           </a:p>
         </p:txBody>
       </p:sp>
@@ -33394,13 +32633,13 @@
           <a:bodyPr wrap="square" rIns="36195">
             <a:spAutoFit/>
           </a:bodyPr>
+          <a:lstStyle/>
           <a:p>
             <a:pPr algn="r"/>
             <a:r>
               <a:rPr lang="en-US" altLang="zh-CN" sz="1200"/>
               <a:t>Lymph-node metastasis</a:t>
             </a:r>
-            <a:endParaRPr lang="en-US" altLang="zh-CN" sz="1200"/>
           </a:p>
           <a:p>
             <a:pPr algn="r"/>
@@ -33408,7 +32647,6 @@
               <a:rPr lang="en-US" altLang="zh-CN" sz="1200"/>
               <a:t>prediction</a:t>
             </a:r>
-            <a:endParaRPr lang="en-US" altLang="zh-CN" sz="1200"/>
           </a:p>
         </p:txBody>
       </p:sp>
@@ -33438,7 +32676,6 @@
               <a:rPr lang="en-US" altLang="zh-CN" sz="1200" dirty="0"/>
               <a:t>Explainable risk prediction</a:t>
             </a:r>
-            <a:endParaRPr lang="en-US" altLang="zh-CN" sz="1200" dirty="0"/>
           </a:p>
         </p:txBody>
       </p:sp>
@@ -33481,6 +32718,7 @@
         </p:style>
         <p:txBody>
           <a:bodyPr rtlCol="0" anchor="ctr"/>
+          <a:lstStyle/>
           <a:p>
             <a:pPr algn="ctr"/>
             <a:endParaRPr lang="zh-CN" altLang="en-US"/>
@@ -33526,6 +32764,7 @@
         </p:style>
         <p:txBody>
           <a:bodyPr rtlCol="0" anchor="ctr"/>
+          <a:lstStyle/>
           <a:p>
             <a:pPr algn="ctr"/>
             <a:endParaRPr lang="zh-CN" altLang="en-US"/>
@@ -33571,6 +32810,7 @@
         </p:style>
         <p:txBody>
           <a:bodyPr rtlCol="0" anchor="ctr"/>
+          <a:lstStyle/>
           <a:p>
             <a:pPr algn="ctr"/>
             <a:endParaRPr lang="zh-CN" altLang="en-US"/>
@@ -33586,20 +32826,20 @@
 </file>
 
 <file path=ppt/tags/tag1.xml><?xml version="1.0" encoding="utf-8"?>
-<p:tagLst xmlns:p="http://schemas.openxmlformats.org/presentationml/2006/main">
-  <p:tag name="KSO_DOCER_RESOURCE_TRACE_INFO" val="{&quot;id&quot;:&quot;3659276&quot;,&quot;origin&quot;:0,&quot;type&quot;:&quot;icons&quot;,&quot;user&quot;:&quot;1636842455&quot;}"/>
+<p:tagLst xmlns:a="http://schemas.openxmlformats.org/drawingml/2006/main" xmlns:r="http://schemas.openxmlformats.org/officeDocument/2006/relationships" xmlns:p="http://schemas.openxmlformats.org/presentationml/2006/main">
+  <p:tag name="RESOURCE_RECORD_KEY" val="{&quot;10&quot;:[3659276]}"/>
 </p:tagLst>
 </file>
 
 <file path=ppt/tags/tag2.xml><?xml version="1.0" encoding="utf-8"?>
-<p:tagLst xmlns:p="http://schemas.openxmlformats.org/presentationml/2006/main">
+<p:tagLst xmlns:a="http://schemas.openxmlformats.org/drawingml/2006/main" xmlns:r="http://schemas.openxmlformats.org/officeDocument/2006/relationships" xmlns:p="http://schemas.openxmlformats.org/presentationml/2006/main">
   <p:tag name="KSO_DOCER_RESOURCE_TRACE_INFO" val="{&quot;id&quot;:&quot;3659276&quot;,&quot;origin&quot;:0,&quot;type&quot;:&quot;icons&quot;,&quot;user&quot;:&quot;1636842455&quot;}"/>
 </p:tagLst>
 </file>
 
 <file path=ppt/tags/tag3.xml><?xml version="1.0" encoding="utf-8"?>
-<p:tagLst xmlns:p="http://schemas.openxmlformats.org/presentationml/2006/main">
-  <p:tag name="RESOURCE_RECORD_KEY" val="{&quot;10&quot;:[3659276]}"/>
+<p:tagLst xmlns:a="http://schemas.openxmlformats.org/drawingml/2006/main" xmlns:r="http://schemas.openxmlformats.org/officeDocument/2006/relationships" xmlns:p="http://schemas.openxmlformats.org/presentationml/2006/main">
+  <p:tag name="KSO_DOCER_RESOURCE_TRACE_INFO" val="{&quot;id&quot;:&quot;3659276&quot;,&quot;origin&quot;:0,&quot;type&quot;:&quot;icons&quot;,&quot;user&quot;:&quot;1636842455&quot;}"/>
 </p:tagLst>
 </file>
 
@@ -33846,6 +33086,8 @@
       </a:bgFillStyleLst>
     </a:fmtScheme>
   </a:themeElements>
+  <a:objectDefaults/>
+  <a:extraClrSchemeLst/>
   <a:extLst>
     <a:ext uri="{05A4C25C-085E-4340-85A3-A5531E510DB2}">
       <thm15:themeFamily xmlns:thm15="http://schemas.microsoft.com/office/thememl/2012/main" name="Office Theme" id="{62F939B6-93AF-4DB8-9C6B-D6C7DFDC589F}" vid="{4A3C46E8-61CC-4603-A589-7422A47A8E4A}"/>
@@ -34105,6 +33347,8 @@
       </a:bgFillStyleLst>
     </a:fmtScheme>
   </a:themeElements>
+  <a:objectDefaults/>
+  <a:extraClrSchemeLst/>
   <a:extLst>
     <a:ext uri="{05A4C25C-085E-4340-85A3-A5531E510DB2}">
       <thm15:themeFamily xmlns:thm15="http://schemas.microsoft.com/office/thememl/2012/main" name="Office Theme" id="{62F939B6-93AF-4DB8-9C6B-D6C7DFDC589F}" vid="{4A3C46E8-61CC-4603-A589-7422A47A8E4A}"/>
@@ -34364,6 +33608,8 @@
       </a:bgFillStyleLst>
     </a:fmtScheme>
   </a:themeElements>
+  <a:objectDefaults/>
+  <a:extraClrSchemeLst/>
   <a:extLst>
     <a:ext uri="{05A4C25C-085E-4340-85A3-A5531E510DB2}">
       <thm15:themeFamily xmlns:thm15="http://schemas.microsoft.com/office/thememl/2012/main" name="Office Theme" id="{62F939B6-93AF-4DB8-9C6B-D6C7DFDC589F}" vid="{4A3C46E8-61CC-4603-A589-7422A47A8E4A}"/>
